--- a/docs/content/05-teaching-resources/slides/specialism/11-designing-modelling-and-prototyping.pptx
+++ b/docs/content/05-teaching-resources/slides/specialism/11-designing-modelling-and-prototyping.pptx
@@ -10,10 +10,14 @@
     <p:sldId id="258" r:id="rId9"/>
     <p:sldId id="259" r:id="rId10"/>
     <p:sldId id="260" r:id="rId11"/>
-    <p:sldId id="261" r:id="rId12"/>
+    <p:sldId id="261" r:id="rId13"/>
     <p:sldId id="262" r:id="rId14"/>
     <p:sldId id="263" r:id="rId15"/>
     <p:sldId id="264" r:id="rId16"/>
+    <p:sldId id="265" r:id="rId17"/>
+    <p:sldId id="266" r:id="rId18"/>
+    <p:sldId id="267" r:id="rId19"/>
+    <p:sldId id="268" r:id="rId20"/>
   </p:sldIdLst>
   <p:sldSz cx="12191695" cy="6858000" type="screen4x3"/>
   <p:notesSz cx="6858000" cy="9144000"/>
@@ -510,7 +514,22 @@
           <a:lstStyle/>
           <a:p>
             <a:r>
-              <a:t>Give students a few minutes to answer on mini whiteboards or paper, then reveal the answers on the next slide.</a:t>
+              <a:t>Answers:</a:t>
+            </a:r>
+          </a:p>
+          <a:p>
+            <a:r>
+              <a:t>1. To show how requirements are met and justify choices.</a:t>
+            </a:r>
+          </a:p>
+          <a:p>
+            <a:r>
+              <a:t>2. E.g. gears or flywheels.</a:t>
+            </a:r>
+          </a:p>
+          <a:p>
+            <a:r>
+              <a:t>3. BS and ISO.</a:t>
             </a:r>
           </a:p>
         </p:txBody>
@@ -580,7 +599,22 @@
           <a:lstStyle/>
           <a:p>
             <a:r>
-              <a:t>Talk through any answers the class found difficult.</a:t>
+              <a:t>Answers:</a:t>
+            </a:r>
+          </a:p>
+          <a:p>
+            <a:r>
+              <a:t>1. E.g. guards fitted, cable undamaged, correct blade.</a:t>
+            </a:r>
+          </a:p>
+          <a:p>
+            <a:r>
+              <a:t>2. Stored energy could cause injury.</a:t>
+            </a:r>
+          </a:p>
+          <a:p>
+            <a:r>
+              <a:t>3. It can be manufactured, operated and maintained.</a:t>
             </a:r>
           </a:p>
         </p:txBody>
@@ -606,6 +640,146 @@
 </file>
 
 <file path=ppt/notesSlides/notesSlide3.xml><?xml version="1.0" encoding="utf-8"?>
+<p:notes xmlns:a="http://schemas.openxmlformats.org/drawingml/2006/main" xmlns:p="http://schemas.openxmlformats.org/presentationml/2006/main" xmlns:r="http://schemas.openxmlformats.org/officeDocument/2006/relationships">
+  <p:cSld>
+    <p:spTree>
+      <p:nvGrpSpPr>
+        <p:cNvPr id="1" name=""/>
+        <p:cNvGrpSpPr/>
+        <p:nvPr/>
+      </p:nvGrpSpPr>
+      <p:grpSpPr>
+        <a:xfrm>
+          <a:off x="0" y="0"/>
+          <a:ext cx="0" cy="0"/>
+          <a:chOff x="0" y="0"/>
+          <a:chExt cx="0" cy="0"/>
+        </a:xfrm>
+      </p:grpSpPr>
+      <p:sp>
+        <p:nvSpPr>
+          <p:cNvPr id="2" name="Slide Image Placeholder 1"/>
+          <p:cNvSpPr>
+            <a:spLocks noGrp="1"/>
+          </p:cNvSpPr>
+          <p:nvPr>
+            <p:ph type="sldImg" idx="2"/>
+          </p:nvPr>
+        </p:nvSpPr>
+        <p:spPr/>
+      </p:sp>
+      <p:sp>
+        <p:nvSpPr>
+          <p:cNvPr id="3" name="Notes Placeholder 2"/>
+          <p:cNvSpPr>
+            <a:spLocks noGrp="1"/>
+          </p:cNvSpPr>
+          <p:nvPr>
+            <p:ph type="body" idx="3" sz="quarter"/>
+          </p:nvPr>
+        </p:nvSpPr>
+        <p:spPr/>
+        <p:txBody>
+          <a:bodyPr/>
+          <a:lstStyle/>
+          <a:p>
+            <a:r>
+              <a:t>Give students a few minutes to answer on mini whiteboards or paper, then reveal the answers on the next slide.</a:t>
+            </a:r>
+          </a:p>
+        </p:txBody>
+      </p:sp>
+      <p:sp>
+        <p:nvSpPr>
+          <p:cNvPr id="4" name="Slide Number Placeholder 3"/>
+          <p:cNvSpPr>
+            <a:spLocks noGrp="1"/>
+          </p:cNvSpPr>
+          <p:nvPr>
+            <p:ph type="sldNum" idx="5" sz="quarter"/>
+          </p:nvPr>
+        </p:nvSpPr>
+        <p:spPr/>
+      </p:sp>
+    </p:spTree>
+  </p:cSld>
+  <p:clrMapOvr>
+    <a:masterClrMapping/>
+  </p:clrMapOvr>
+</p:notes>
+</file>
+
+<file path=ppt/notesSlides/notesSlide4.xml><?xml version="1.0" encoding="utf-8"?>
+<p:notes xmlns:a="http://schemas.openxmlformats.org/drawingml/2006/main" xmlns:p="http://schemas.openxmlformats.org/presentationml/2006/main" xmlns:r="http://schemas.openxmlformats.org/officeDocument/2006/relationships">
+  <p:cSld>
+    <p:spTree>
+      <p:nvGrpSpPr>
+        <p:cNvPr id="1" name=""/>
+        <p:cNvGrpSpPr/>
+        <p:nvPr/>
+      </p:nvGrpSpPr>
+      <p:grpSpPr>
+        <a:xfrm>
+          <a:off x="0" y="0"/>
+          <a:ext cx="0" cy="0"/>
+          <a:chOff x="0" y="0"/>
+          <a:chExt cx="0" cy="0"/>
+        </a:xfrm>
+      </p:grpSpPr>
+      <p:sp>
+        <p:nvSpPr>
+          <p:cNvPr id="2" name="Slide Image Placeholder 1"/>
+          <p:cNvSpPr>
+            <a:spLocks noGrp="1"/>
+          </p:cNvSpPr>
+          <p:nvPr>
+            <p:ph type="sldImg" idx="2"/>
+          </p:nvPr>
+        </p:nvSpPr>
+        <p:spPr/>
+      </p:sp>
+      <p:sp>
+        <p:nvSpPr>
+          <p:cNvPr id="3" name="Notes Placeholder 2"/>
+          <p:cNvSpPr>
+            <a:spLocks noGrp="1"/>
+          </p:cNvSpPr>
+          <p:nvPr>
+            <p:ph type="body" idx="3" sz="quarter"/>
+          </p:nvPr>
+        </p:nvSpPr>
+        <p:spPr/>
+        <p:txBody>
+          <a:bodyPr/>
+          <a:lstStyle/>
+          <a:p>
+            <a:r>
+              <a:t>Talk through any answers the class found difficult.</a:t>
+            </a:r>
+          </a:p>
+        </p:txBody>
+      </p:sp>
+      <p:sp>
+        <p:nvSpPr>
+          <p:cNvPr id="4" name="Slide Number Placeholder 3"/>
+          <p:cNvSpPr>
+            <a:spLocks noGrp="1"/>
+          </p:cNvSpPr>
+          <p:nvPr>
+            <p:ph type="sldNum" idx="5" sz="quarter"/>
+          </p:nvPr>
+        </p:nvSpPr>
+        <p:spPr/>
+      </p:sp>
+    </p:spTree>
+  </p:cSld>
+  <p:clrMapOvr>
+    <a:masterClrMapping/>
+  </p:clrMapOvr>
+</p:notes>
+</file>
+
+<file path=ppt/notesSlides/notesSlide5.xml><?xml version="1.0" encoding="utf-8"?>
 <p:notes xmlns:a="http://schemas.openxmlformats.org/drawingml/2006/main" xmlns:p="http://schemas.openxmlformats.org/presentationml/2006/main" xmlns:r="http://schemas.openxmlformats.org/officeDocument/2006/relationships">
   <p:cSld>
     <p:spTree>
@@ -3975,6 +4149,2172 @@
 </p:sld>
 </file>
 
+<file path=ppt/slides/slide10.xml><?xml version="1.0" encoding="utf-8"?>
+<p:sld xmlns:a="http://schemas.openxmlformats.org/drawingml/2006/main" xmlns:p="http://schemas.openxmlformats.org/presentationml/2006/main" xmlns:r="http://schemas.openxmlformats.org/officeDocument/2006/relationships">
+  <p:cSld>
+    <p:bg>
+      <p:bgPr>
+        <a:solidFill>
+          <a:srgbClr val="FFFFFF"/>
+        </a:solidFill>
+        <a:effectLst/>
+      </p:bgPr>
+    </p:bg>
+    <p:spTree>
+      <p:nvGrpSpPr>
+        <p:cNvPr id="1" name=""/>
+        <p:cNvGrpSpPr/>
+        <p:nvPr/>
+      </p:nvGrpSpPr>
+      <p:grpSpPr/>
+      <p:sp>
+        <p:nvSpPr>
+          <p:cNvPr id="2" name="TextBox 1"/>
+          <p:cNvSpPr txBox="1"/>
+          <p:nvPr/>
+        </p:nvSpPr>
+        <p:spPr>
+          <a:xfrm>
+            <a:off x="548640" y="320040"/>
+            <a:ext cx="11094415" cy="274320"/>
+          </a:xfrm>
+          <a:prstGeom prst="rect">
+            <a:avLst/>
+          </a:prstGeom>
+          <a:noFill/>
+        </p:spPr>
+        <p:txBody>
+          <a:bodyPr wrap="square" anchor="t" lIns="0" rIns="0" tIns="0" bIns="0"/>
+          <a:lstStyle/>
+          <a:p>
+            <a:pPr algn="l"/>
+            <a:r>
+              <a:rPr sz="1100" b="1" i="0">
+                <a:solidFill>
+                  <a:srgbClr val="54595D"/>
+                </a:solidFill>
+                <a:latin typeface="Calibri"/>
+              </a:rPr>
+              <a:t>MECHANICAL ENGINEERING  ·  Mechanical: Performance Outcome 4</a:t>
+            </a:r>
+          </a:p>
+        </p:txBody>
+      </p:sp>
+      <p:sp>
+        <p:nvSpPr>
+          <p:cNvPr id="3" name="TextBox 2"/>
+          <p:cNvSpPr txBox="1"/>
+          <p:nvPr/>
+        </p:nvSpPr>
+        <p:spPr>
+          <a:xfrm>
+            <a:off x="548640" y="566928"/>
+            <a:ext cx="11094415" cy="822960"/>
+          </a:xfrm>
+          <a:prstGeom prst="rect">
+            <a:avLst/>
+          </a:prstGeom>
+          <a:noFill/>
+        </p:spPr>
+        <p:txBody>
+          <a:bodyPr wrap="square" anchor="ctr" lIns="0" rIns="0" tIns="0" bIns="0"/>
+          <a:lstStyle/>
+          <a:p>
+            <a:pPr algn="l"/>
+            <a:r>
+              <a:rPr sz="3200" b="1" i="0">
+                <a:solidFill>
+                  <a:srgbClr val="03306E"/>
+                </a:solidFill>
+                <a:latin typeface="Cambria"/>
+              </a:rPr>
+              <a:t>Check your understanding</a:t>
+            </a:r>
+          </a:p>
+        </p:txBody>
+      </p:sp>
+      <p:sp>
+        <p:nvSpPr>
+          <p:cNvPr id="4" name="TextBox 3"/>
+          <p:cNvSpPr txBox="1"/>
+          <p:nvPr/>
+        </p:nvSpPr>
+        <p:spPr>
+          <a:xfrm>
+            <a:off x="548640" y="6446520"/>
+            <a:ext cx="8229600" cy="274320"/>
+          </a:xfrm>
+          <a:prstGeom prst="rect">
+            <a:avLst/>
+          </a:prstGeom>
+          <a:noFill/>
+        </p:spPr>
+        <p:txBody>
+          <a:bodyPr wrap="square" anchor="t" lIns="0" rIns="0" tIns="0" bIns="0"/>
+          <a:lstStyle/>
+          <a:p>
+            <a:pPr algn="l"/>
+            <a:r>
+              <a:rPr sz="1000" b="0" i="0">
+                <a:solidFill>
+                  <a:srgbClr val="54595D"/>
+                </a:solidFill>
+                <a:latin typeface="Calibri"/>
+              </a:rPr>
+              <a:t>Design and Development for Engineering and Manufacturing T Level  ·  Designing, Modelling and Prototyping</a:t>
+            </a:r>
+          </a:p>
+        </p:txBody>
+      </p:sp>
+      <p:sp>
+        <p:nvSpPr>
+          <p:cNvPr id="5" name="TextBox 4"/>
+          <p:cNvSpPr txBox="1"/>
+          <p:nvPr/>
+        </p:nvSpPr>
+        <p:spPr>
+          <a:xfrm>
+            <a:off x="10728655" y="6446520"/>
+            <a:ext cx="914400" cy="274320"/>
+          </a:xfrm>
+          <a:prstGeom prst="rect">
+            <a:avLst/>
+          </a:prstGeom>
+          <a:noFill/>
+        </p:spPr>
+        <p:txBody>
+          <a:bodyPr wrap="square" anchor="t" lIns="0" rIns="0" tIns="0" bIns="0"/>
+          <a:lstStyle/>
+          <a:p>
+            <a:pPr algn="r"/>
+            <a:r>
+              <a:rPr sz="1000" b="0" i="0">
+                <a:solidFill>
+                  <a:srgbClr val="54595D"/>
+                </a:solidFill>
+                <a:latin typeface="Calibri"/>
+              </a:rPr>
+              <a:t>10</a:t>
+            </a:r>
+          </a:p>
+        </p:txBody>
+      </p:sp>
+      <p:sp>
+        <p:nvSpPr>
+          <p:cNvPr id="6" name="Oval 5"/>
+          <p:cNvSpPr/>
+          <p:nvPr/>
+        </p:nvSpPr>
+        <p:spPr>
+          <a:xfrm>
+            <a:off x="548640" y="1618488"/>
+            <a:ext cx="411480" cy="411480"/>
+          </a:xfrm>
+          <a:prstGeom prst="ellipse">
+            <a:avLst/>
+          </a:prstGeom>
+          <a:solidFill>
+            <a:srgbClr val="E0463A"/>
+          </a:solidFill>
+          <a:ln>
+            <a:noFill/>
+          </a:ln>
+          <a:effectLst/>
+        </p:spPr>
+        <p:style>
+          <a:lnRef idx="1">
+            <a:schemeClr val="accent1"/>
+          </a:lnRef>
+          <a:fillRef idx="3">
+            <a:schemeClr val="accent1"/>
+          </a:fillRef>
+          <a:effectRef idx="2">
+            <a:schemeClr val="accent1"/>
+          </a:effectRef>
+          <a:fontRef idx="minor">
+            <a:schemeClr val="lt1"/>
+          </a:fontRef>
+        </p:style>
+        <p:txBody>
+          <a:bodyPr rtlCol="0" anchor="ctr" lIns="0" rIns="0" tIns="0" bIns="0"/>
+          <a:lstStyle/>
+          <a:p>
+            <a:pPr algn="ctr"/>
+            <a:r>
+              <a:rPr sz="1400" b="1">
+                <a:solidFill>
+                  <a:srgbClr val="FFFFFF"/>
+                </a:solidFill>
+                <a:latin typeface="Calibri"/>
+              </a:rPr>
+              <a:t>1</a:t>
+            </a:r>
+          </a:p>
+        </p:txBody>
+      </p:sp>
+      <p:sp>
+        <p:nvSpPr>
+          <p:cNvPr id="7" name="TextBox 6"/>
+          <p:cNvSpPr txBox="1"/>
+          <p:nvPr/>
+        </p:nvSpPr>
+        <p:spPr>
+          <a:xfrm>
+            <a:off x="1234440" y="1600200"/>
+            <a:ext cx="10408615" cy="1429512"/>
+          </a:xfrm>
+          <a:prstGeom prst="rect">
+            <a:avLst/>
+          </a:prstGeom>
+          <a:noFill/>
+        </p:spPr>
+        <p:txBody>
+          <a:bodyPr wrap="square" anchor="t" lIns="0" rIns="0" tIns="0" bIns="0"/>
+          <a:lstStyle/>
+          <a:p>
+            <a:pPr algn="l"/>
+            <a:r>
+              <a:rPr sz="2200" b="0" i="0">
+                <a:solidFill>
+                  <a:srgbClr val="202122"/>
+                </a:solidFill>
+                <a:latin typeface="Calibri"/>
+              </a:rPr>
+              <a:t>What is a block model for?</a:t>
+            </a:r>
+          </a:p>
+        </p:txBody>
+      </p:sp>
+      <p:sp>
+        <p:nvSpPr>
+          <p:cNvPr id="8" name="Oval 7"/>
+          <p:cNvSpPr/>
+          <p:nvPr/>
+        </p:nvSpPr>
+        <p:spPr>
+          <a:xfrm>
+            <a:off x="548640" y="3212592"/>
+            <a:ext cx="411480" cy="411480"/>
+          </a:xfrm>
+          <a:prstGeom prst="ellipse">
+            <a:avLst/>
+          </a:prstGeom>
+          <a:solidFill>
+            <a:srgbClr val="E0463A"/>
+          </a:solidFill>
+          <a:ln>
+            <a:noFill/>
+          </a:ln>
+          <a:effectLst/>
+        </p:spPr>
+        <p:style>
+          <a:lnRef idx="1">
+            <a:schemeClr val="accent1"/>
+          </a:lnRef>
+          <a:fillRef idx="3">
+            <a:schemeClr val="accent1"/>
+          </a:fillRef>
+          <a:effectRef idx="2">
+            <a:schemeClr val="accent1"/>
+          </a:effectRef>
+          <a:fontRef idx="minor">
+            <a:schemeClr val="lt1"/>
+          </a:fontRef>
+        </p:style>
+        <p:txBody>
+          <a:bodyPr rtlCol="0" anchor="ctr" lIns="0" rIns="0" tIns="0" bIns="0"/>
+          <a:lstStyle/>
+          <a:p>
+            <a:pPr algn="ctr"/>
+            <a:r>
+              <a:rPr sz="1400" b="1">
+                <a:solidFill>
+                  <a:srgbClr val="FFFFFF"/>
+                </a:solidFill>
+                <a:latin typeface="Calibri"/>
+              </a:rPr>
+              <a:t>2</a:t>
+            </a:r>
+          </a:p>
+        </p:txBody>
+      </p:sp>
+      <p:sp>
+        <p:nvSpPr>
+          <p:cNvPr id="9" name="TextBox 8"/>
+          <p:cNvSpPr txBox="1"/>
+          <p:nvPr/>
+        </p:nvSpPr>
+        <p:spPr>
+          <a:xfrm>
+            <a:off x="1234440" y="3194304"/>
+            <a:ext cx="10408615" cy="1429512"/>
+          </a:xfrm>
+          <a:prstGeom prst="rect">
+            <a:avLst/>
+          </a:prstGeom>
+          <a:noFill/>
+        </p:spPr>
+        <p:txBody>
+          <a:bodyPr wrap="square" anchor="t" lIns="0" rIns="0" tIns="0" bIns="0"/>
+          <a:lstStyle/>
+          <a:p>
+            <a:pPr algn="l"/>
+            <a:r>
+              <a:rPr sz="2200" b="0" i="0">
+                <a:solidFill>
+                  <a:srgbClr val="202122"/>
+                </a:solidFill>
+                <a:latin typeface="Calibri"/>
+              </a:rPr>
+              <a:t>Why release tension or pressure before disassembly?</a:t>
+            </a:r>
+          </a:p>
+        </p:txBody>
+      </p:sp>
+      <p:sp>
+        <p:nvSpPr>
+          <p:cNvPr id="10" name="Oval 9"/>
+          <p:cNvSpPr/>
+          <p:nvPr/>
+        </p:nvSpPr>
+        <p:spPr>
+          <a:xfrm>
+            <a:off x="548640" y="4806695"/>
+            <a:ext cx="411480" cy="411480"/>
+          </a:xfrm>
+          <a:prstGeom prst="ellipse">
+            <a:avLst/>
+          </a:prstGeom>
+          <a:solidFill>
+            <a:srgbClr val="E0463A"/>
+          </a:solidFill>
+          <a:ln>
+            <a:noFill/>
+          </a:ln>
+          <a:effectLst/>
+        </p:spPr>
+        <p:style>
+          <a:lnRef idx="1">
+            <a:schemeClr val="accent1"/>
+          </a:lnRef>
+          <a:fillRef idx="3">
+            <a:schemeClr val="accent1"/>
+          </a:fillRef>
+          <a:effectRef idx="2">
+            <a:schemeClr val="accent1"/>
+          </a:effectRef>
+          <a:fontRef idx="minor">
+            <a:schemeClr val="lt1"/>
+          </a:fontRef>
+        </p:style>
+        <p:txBody>
+          <a:bodyPr rtlCol="0" anchor="ctr" lIns="0" rIns="0" tIns="0" bIns="0"/>
+          <a:lstStyle/>
+          <a:p>
+            <a:pPr algn="ctr"/>
+            <a:r>
+              <a:rPr sz="1400" b="1">
+                <a:solidFill>
+                  <a:srgbClr val="FFFFFF"/>
+                </a:solidFill>
+                <a:latin typeface="Calibri"/>
+              </a:rPr>
+              <a:t>3</a:t>
+            </a:r>
+          </a:p>
+        </p:txBody>
+      </p:sp>
+      <p:sp>
+        <p:nvSpPr>
+          <p:cNvPr id="11" name="TextBox 10"/>
+          <p:cNvSpPr txBox="1"/>
+          <p:nvPr/>
+        </p:nvSpPr>
+        <p:spPr>
+          <a:xfrm>
+            <a:off x="1234440" y="4788408"/>
+            <a:ext cx="10408615" cy="1429512"/>
+          </a:xfrm>
+          <a:prstGeom prst="rect">
+            <a:avLst/>
+          </a:prstGeom>
+          <a:noFill/>
+        </p:spPr>
+        <p:txBody>
+          <a:bodyPr wrap="square" anchor="t" lIns="0" rIns="0" tIns="0" bIns="0"/>
+          <a:lstStyle/>
+          <a:p>
+            <a:pPr algn="l"/>
+            <a:r>
+              <a:rPr sz="2200" b="0" i="0">
+                <a:solidFill>
+                  <a:srgbClr val="202122"/>
+                </a:solidFill>
+                <a:latin typeface="Calibri"/>
+              </a:rPr>
+              <a:t>Name two pre-use checks on a power tool.</a:t>
+            </a:r>
+          </a:p>
+        </p:txBody>
+      </p:sp>
+    </p:spTree>
+  </p:cSld>
+  <p:clrMapOvr>
+    <a:masterClrMapping/>
+  </p:clrMapOvr>
+</p:sld>
+</file>
+
+<file path=ppt/slides/slide11.xml><?xml version="1.0" encoding="utf-8"?>
+<p:sld xmlns:a="http://schemas.openxmlformats.org/drawingml/2006/main" xmlns:p="http://schemas.openxmlformats.org/presentationml/2006/main" xmlns:r="http://schemas.openxmlformats.org/officeDocument/2006/relationships">
+  <p:cSld>
+    <p:bg>
+      <p:bgPr>
+        <a:solidFill>
+          <a:srgbClr val="FFFFFF"/>
+        </a:solidFill>
+        <a:effectLst/>
+      </p:bgPr>
+    </p:bg>
+    <p:spTree>
+      <p:nvGrpSpPr>
+        <p:cNvPr id="1" name=""/>
+        <p:cNvGrpSpPr/>
+        <p:nvPr/>
+      </p:nvGrpSpPr>
+      <p:grpSpPr/>
+      <p:sp>
+        <p:nvSpPr>
+          <p:cNvPr id="2" name="TextBox 1"/>
+          <p:cNvSpPr txBox="1"/>
+          <p:nvPr/>
+        </p:nvSpPr>
+        <p:spPr>
+          <a:xfrm>
+            <a:off x="548640" y="320040"/>
+            <a:ext cx="11094415" cy="274320"/>
+          </a:xfrm>
+          <a:prstGeom prst="rect">
+            <a:avLst/>
+          </a:prstGeom>
+          <a:noFill/>
+        </p:spPr>
+        <p:txBody>
+          <a:bodyPr wrap="square" anchor="t" lIns="0" rIns="0" tIns="0" bIns="0"/>
+          <a:lstStyle/>
+          <a:p>
+            <a:pPr algn="l"/>
+            <a:r>
+              <a:rPr sz="1100" b="1" i="0">
+                <a:solidFill>
+                  <a:srgbClr val="54595D"/>
+                </a:solidFill>
+                <a:latin typeface="Calibri"/>
+              </a:rPr>
+              <a:t>MECHANICAL ENGINEERING  ·  Mechanical: Performance Outcome 4</a:t>
+            </a:r>
+          </a:p>
+        </p:txBody>
+      </p:sp>
+      <p:sp>
+        <p:nvSpPr>
+          <p:cNvPr id="3" name="TextBox 2"/>
+          <p:cNvSpPr txBox="1"/>
+          <p:nvPr/>
+        </p:nvSpPr>
+        <p:spPr>
+          <a:xfrm>
+            <a:off x="548640" y="566928"/>
+            <a:ext cx="11094415" cy="822960"/>
+          </a:xfrm>
+          <a:prstGeom prst="rect">
+            <a:avLst/>
+          </a:prstGeom>
+          <a:noFill/>
+        </p:spPr>
+        <p:txBody>
+          <a:bodyPr wrap="square" anchor="ctr" lIns="0" rIns="0" tIns="0" bIns="0"/>
+          <a:lstStyle/>
+          <a:p>
+            <a:pPr algn="l"/>
+            <a:r>
+              <a:rPr sz="3200" b="1" i="0">
+                <a:solidFill>
+                  <a:srgbClr val="03306E"/>
+                </a:solidFill>
+                <a:latin typeface="Cambria"/>
+              </a:rPr>
+              <a:t>Answers</a:t>
+            </a:r>
+          </a:p>
+        </p:txBody>
+      </p:sp>
+      <p:sp>
+        <p:nvSpPr>
+          <p:cNvPr id="4" name="TextBox 3"/>
+          <p:cNvSpPr txBox="1"/>
+          <p:nvPr/>
+        </p:nvSpPr>
+        <p:spPr>
+          <a:xfrm>
+            <a:off x="548640" y="6446520"/>
+            <a:ext cx="8229600" cy="274320"/>
+          </a:xfrm>
+          <a:prstGeom prst="rect">
+            <a:avLst/>
+          </a:prstGeom>
+          <a:noFill/>
+        </p:spPr>
+        <p:txBody>
+          <a:bodyPr wrap="square" anchor="t" lIns="0" rIns="0" tIns="0" bIns="0"/>
+          <a:lstStyle/>
+          <a:p>
+            <a:pPr algn="l"/>
+            <a:r>
+              <a:rPr sz="1000" b="0" i="0">
+                <a:solidFill>
+                  <a:srgbClr val="54595D"/>
+                </a:solidFill>
+                <a:latin typeface="Calibri"/>
+              </a:rPr>
+              <a:t>Design and Development for Engineering and Manufacturing T Level  ·  Designing, Modelling and Prototyping</a:t>
+            </a:r>
+          </a:p>
+        </p:txBody>
+      </p:sp>
+      <p:sp>
+        <p:nvSpPr>
+          <p:cNvPr id="5" name="TextBox 4"/>
+          <p:cNvSpPr txBox="1"/>
+          <p:nvPr/>
+        </p:nvSpPr>
+        <p:spPr>
+          <a:xfrm>
+            <a:off x="10728655" y="6446520"/>
+            <a:ext cx="914400" cy="274320"/>
+          </a:xfrm>
+          <a:prstGeom prst="rect">
+            <a:avLst/>
+          </a:prstGeom>
+          <a:noFill/>
+        </p:spPr>
+        <p:txBody>
+          <a:bodyPr wrap="square" anchor="t" lIns="0" rIns="0" tIns="0" bIns="0"/>
+          <a:lstStyle/>
+          <a:p>
+            <a:pPr algn="r"/>
+            <a:r>
+              <a:rPr sz="1000" b="0" i="0">
+                <a:solidFill>
+                  <a:srgbClr val="54595D"/>
+                </a:solidFill>
+                <a:latin typeface="Calibri"/>
+              </a:rPr>
+              <a:t>11</a:t>
+            </a:r>
+          </a:p>
+        </p:txBody>
+      </p:sp>
+      <p:sp>
+        <p:nvSpPr>
+          <p:cNvPr id="6" name="Oval 5"/>
+          <p:cNvSpPr/>
+          <p:nvPr/>
+        </p:nvSpPr>
+        <p:spPr>
+          <a:xfrm>
+            <a:off x="548640" y="1618488"/>
+            <a:ext cx="411480" cy="411480"/>
+          </a:xfrm>
+          <a:prstGeom prst="ellipse">
+            <a:avLst/>
+          </a:prstGeom>
+          <a:solidFill>
+            <a:srgbClr val="E0463A"/>
+          </a:solidFill>
+          <a:ln>
+            <a:noFill/>
+          </a:ln>
+          <a:effectLst/>
+        </p:spPr>
+        <p:style>
+          <a:lnRef idx="1">
+            <a:schemeClr val="accent1"/>
+          </a:lnRef>
+          <a:fillRef idx="3">
+            <a:schemeClr val="accent1"/>
+          </a:fillRef>
+          <a:effectRef idx="2">
+            <a:schemeClr val="accent1"/>
+          </a:effectRef>
+          <a:fontRef idx="minor">
+            <a:schemeClr val="lt1"/>
+          </a:fontRef>
+        </p:style>
+        <p:txBody>
+          <a:bodyPr rtlCol="0" anchor="ctr" lIns="0" rIns="0" tIns="0" bIns="0"/>
+          <a:lstStyle/>
+          <a:p>
+            <a:pPr algn="ctr"/>
+            <a:r>
+              <a:rPr sz="1400" b="1">
+                <a:solidFill>
+                  <a:srgbClr val="FFFFFF"/>
+                </a:solidFill>
+                <a:latin typeface="Calibri"/>
+              </a:rPr>
+              <a:t>1</a:t>
+            </a:r>
+          </a:p>
+        </p:txBody>
+      </p:sp>
+      <p:sp>
+        <p:nvSpPr>
+          <p:cNvPr id="7" name="TextBox 6"/>
+          <p:cNvSpPr txBox="1"/>
+          <p:nvPr/>
+        </p:nvSpPr>
+        <p:spPr>
+          <a:xfrm>
+            <a:off x="1234440" y="1600200"/>
+            <a:ext cx="10408615" cy="1429512"/>
+          </a:xfrm>
+          <a:prstGeom prst="rect">
+            <a:avLst/>
+          </a:prstGeom>
+          <a:noFill/>
+        </p:spPr>
+        <p:txBody>
+          <a:bodyPr wrap="square" anchor="t" lIns="0" rIns="0" tIns="0" bIns="0"/>
+          <a:lstStyle/>
+          <a:p>
+            <a:pPr algn="l"/>
+            <a:r>
+              <a:rPr sz="1800" b="0" i="0">
+                <a:solidFill>
+                  <a:srgbClr val="54595D"/>
+                </a:solidFill>
+                <a:latin typeface="Calibri"/>
+              </a:rPr>
+              <a:t>What is a block model for?</a:t>
+            </a:r>
+          </a:p>
+          <a:p>
+            <a:r>
+              <a:rPr sz="1800" b="1">
+                <a:solidFill>
+                  <a:srgbClr val="03306E"/>
+                </a:solidFill>
+                <a:latin typeface="Calibri"/>
+              </a:rPr>
+              <a:t>Checking size, form and proportion.</a:t>
+            </a:r>
+          </a:p>
+        </p:txBody>
+      </p:sp>
+      <p:sp>
+        <p:nvSpPr>
+          <p:cNvPr id="8" name="Oval 7"/>
+          <p:cNvSpPr/>
+          <p:nvPr/>
+        </p:nvSpPr>
+        <p:spPr>
+          <a:xfrm>
+            <a:off x="548640" y="3212592"/>
+            <a:ext cx="411480" cy="411480"/>
+          </a:xfrm>
+          <a:prstGeom prst="ellipse">
+            <a:avLst/>
+          </a:prstGeom>
+          <a:solidFill>
+            <a:srgbClr val="E0463A"/>
+          </a:solidFill>
+          <a:ln>
+            <a:noFill/>
+          </a:ln>
+          <a:effectLst/>
+        </p:spPr>
+        <p:style>
+          <a:lnRef idx="1">
+            <a:schemeClr val="accent1"/>
+          </a:lnRef>
+          <a:fillRef idx="3">
+            <a:schemeClr val="accent1"/>
+          </a:fillRef>
+          <a:effectRef idx="2">
+            <a:schemeClr val="accent1"/>
+          </a:effectRef>
+          <a:fontRef idx="minor">
+            <a:schemeClr val="lt1"/>
+          </a:fontRef>
+        </p:style>
+        <p:txBody>
+          <a:bodyPr rtlCol="0" anchor="ctr" lIns="0" rIns="0" tIns="0" bIns="0"/>
+          <a:lstStyle/>
+          <a:p>
+            <a:pPr algn="ctr"/>
+            <a:r>
+              <a:rPr sz="1400" b="1">
+                <a:solidFill>
+                  <a:srgbClr val="FFFFFF"/>
+                </a:solidFill>
+                <a:latin typeface="Calibri"/>
+              </a:rPr>
+              <a:t>2</a:t>
+            </a:r>
+          </a:p>
+        </p:txBody>
+      </p:sp>
+      <p:sp>
+        <p:nvSpPr>
+          <p:cNvPr id="9" name="TextBox 8"/>
+          <p:cNvSpPr txBox="1"/>
+          <p:nvPr/>
+        </p:nvSpPr>
+        <p:spPr>
+          <a:xfrm>
+            <a:off x="1234440" y="3194304"/>
+            <a:ext cx="10408615" cy="1429512"/>
+          </a:xfrm>
+          <a:prstGeom prst="rect">
+            <a:avLst/>
+          </a:prstGeom>
+          <a:noFill/>
+        </p:spPr>
+        <p:txBody>
+          <a:bodyPr wrap="square" anchor="t" lIns="0" rIns="0" tIns="0" bIns="0"/>
+          <a:lstStyle/>
+          <a:p>
+            <a:pPr algn="l"/>
+            <a:r>
+              <a:rPr sz="1800" b="0" i="0">
+                <a:solidFill>
+                  <a:srgbClr val="54595D"/>
+                </a:solidFill>
+                <a:latin typeface="Calibri"/>
+              </a:rPr>
+              <a:t>Why release tension or pressure before disassembly?</a:t>
+            </a:r>
+          </a:p>
+          <a:p>
+            <a:r>
+              <a:rPr sz="1800" b="1">
+                <a:solidFill>
+                  <a:srgbClr val="03306E"/>
+                </a:solidFill>
+                <a:latin typeface="Calibri"/>
+              </a:rPr>
+              <a:t>Stored energy could cause injury.</a:t>
+            </a:r>
+          </a:p>
+        </p:txBody>
+      </p:sp>
+      <p:sp>
+        <p:nvSpPr>
+          <p:cNvPr id="10" name="Oval 9"/>
+          <p:cNvSpPr/>
+          <p:nvPr/>
+        </p:nvSpPr>
+        <p:spPr>
+          <a:xfrm>
+            <a:off x="548640" y="4806695"/>
+            <a:ext cx="411480" cy="411480"/>
+          </a:xfrm>
+          <a:prstGeom prst="ellipse">
+            <a:avLst/>
+          </a:prstGeom>
+          <a:solidFill>
+            <a:srgbClr val="E0463A"/>
+          </a:solidFill>
+          <a:ln>
+            <a:noFill/>
+          </a:ln>
+          <a:effectLst/>
+        </p:spPr>
+        <p:style>
+          <a:lnRef idx="1">
+            <a:schemeClr val="accent1"/>
+          </a:lnRef>
+          <a:fillRef idx="3">
+            <a:schemeClr val="accent1"/>
+          </a:fillRef>
+          <a:effectRef idx="2">
+            <a:schemeClr val="accent1"/>
+          </a:effectRef>
+          <a:fontRef idx="minor">
+            <a:schemeClr val="lt1"/>
+          </a:fontRef>
+        </p:style>
+        <p:txBody>
+          <a:bodyPr rtlCol="0" anchor="ctr" lIns="0" rIns="0" tIns="0" bIns="0"/>
+          <a:lstStyle/>
+          <a:p>
+            <a:pPr algn="ctr"/>
+            <a:r>
+              <a:rPr sz="1400" b="1">
+                <a:solidFill>
+                  <a:srgbClr val="FFFFFF"/>
+                </a:solidFill>
+                <a:latin typeface="Calibri"/>
+              </a:rPr>
+              <a:t>3</a:t>
+            </a:r>
+          </a:p>
+        </p:txBody>
+      </p:sp>
+      <p:sp>
+        <p:nvSpPr>
+          <p:cNvPr id="11" name="TextBox 10"/>
+          <p:cNvSpPr txBox="1"/>
+          <p:nvPr/>
+        </p:nvSpPr>
+        <p:spPr>
+          <a:xfrm>
+            <a:off x="1234440" y="4788408"/>
+            <a:ext cx="10408615" cy="1429512"/>
+          </a:xfrm>
+          <a:prstGeom prst="rect">
+            <a:avLst/>
+          </a:prstGeom>
+          <a:noFill/>
+        </p:spPr>
+        <p:txBody>
+          <a:bodyPr wrap="square" anchor="t" lIns="0" rIns="0" tIns="0" bIns="0"/>
+          <a:lstStyle/>
+          <a:p>
+            <a:pPr algn="l"/>
+            <a:r>
+              <a:rPr sz="1800" b="0" i="0">
+                <a:solidFill>
+                  <a:srgbClr val="54595D"/>
+                </a:solidFill>
+                <a:latin typeface="Calibri"/>
+              </a:rPr>
+              <a:t>Name two pre-use checks on a power tool.</a:t>
+            </a:r>
+          </a:p>
+          <a:p>
+            <a:r>
+              <a:rPr sz="1800" b="1">
+                <a:solidFill>
+                  <a:srgbClr val="03306E"/>
+                </a:solidFill>
+                <a:latin typeface="Calibri"/>
+              </a:rPr>
+              <a:t>E.g. guards fitted, cable undamaged, correct bit or blade, calibration.</a:t>
+            </a:r>
+          </a:p>
+        </p:txBody>
+      </p:sp>
+    </p:spTree>
+  </p:cSld>
+  <p:clrMapOvr>
+    <a:masterClrMapping/>
+  </p:clrMapOvr>
+</p:sld>
+</file>
+
+<file path=ppt/slides/slide12.xml><?xml version="1.0" encoding="utf-8"?>
+<p:sld xmlns:a="http://schemas.openxmlformats.org/drawingml/2006/main" xmlns:p="http://schemas.openxmlformats.org/presentationml/2006/main" xmlns:r="http://schemas.openxmlformats.org/officeDocument/2006/relationships">
+  <p:cSld>
+    <p:bg>
+      <p:bgPr>
+        <a:solidFill>
+          <a:srgbClr val="FFFFFF"/>
+        </a:solidFill>
+        <a:effectLst/>
+      </p:bgPr>
+    </p:bg>
+    <p:spTree>
+      <p:nvGrpSpPr>
+        <p:cNvPr id="1" name=""/>
+        <p:cNvGrpSpPr/>
+        <p:nvPr/>
+      </p:nvGrpSpPr>
+      <p:grpSpPr/>
+      <p:sp>
+        <p:nvSpPr>
+          <p:cNvPr id="2" name="TextBox 1"/>
+          <p:cNvSpPr txBox="1"/>
+          <p:nvPr/>
+        </p:nvSpPr>
+        <p:spPr>
+          <a:xfrm>
+            <a:off x="548640" y="320040"/>
+            <a:ext cx="11094415" cy="274320"/>
+          </a:xfrm>
+          <a:prstGeom prst="rect">
+            <a:avLst/>
+          </a:prstGeom>
+          <a:noFill/>
+        </p:spPr>
+        <p:txBody>
+          <a:bodyPr wrap="square" anchor="t" lIns="0" rIns="0" tIns="0" bIns="0"/>
+          <a:lstStyle/>
+          <a:p>
+            <a:pPr algn="l"/>
+            <a:r>
+              <a:rPr sz="1100" b="1" i="0">
+                <a:solidFill>
+                  <a:srgbClr val="54595D"/>
+                </a:solidFill>
+                <a:latin typeface="Calibri"/>
+              </a:rPr>
+              <a:t>MECHANICAL ENGINEERING  ·  Mechanical: Performance Outcome 4</a:t>
+            </a:r>
+          </a:p>
+        </p:txBody>
+      </p:sp>
+      <p:sp>
+        <p:nvSpPr>
+          <p:cNvPr id="3" name="TextBox 2"/>
+          <p:cNvSpPr txBox="1"/>
+          <p:nvPr/>
+        </p:nvSpPr>
+        <p:spPr>
+          <a:xfrm>
+            <a:off x="548640" y="566928"/>
+            <a:ext cx="11094415" cy="822960"/>
+          </a:xfrm>
+          <a:prstGeom prst="rect">
+            <a:avLst/>
+          </a:prstGeom>
+          <a:noFill/>
+        </p:spPr>
+        <p:txBody>
+          <a:bodyPr wrap="square" anchor="ctr" lIns="0" rIns="0" tIns="0" bIns="0"/>
+          <a:lstStyle/>
+          <a:p>
+            <a:pPr algn="l"/>
+            <a:r>
+              <a:rPr sz="3200" b="1" i="0">
+                <a:solidFill>
+                  <a:srgbClr val="03306E"/>
+                </a:solidFill>
+                <a:latin typeface="Cambria"/>
+              </a:rPr>
+              <a:t>Activity: Prototype sprint</a:t>
+            </a:r>
+          </a:p>
+        </p:txBody>
+      </p:sp>
+      <p:sp>
+        <p:nvSpPr>
+          <p:cNvPr id="4" name="TextBox 3"/>
+          <p:cNvSpPr txBox="1"/>
+          <p:nvPr/>
+        </p:nvSpPr>
+        <p:spPr>
+          <a:xfrm>
+            <a:off x="548640" y="6446520"/>
+            <a:ext cx="8229600" cy="274320"/>
+          </a:xfrm>
+          <a:prstGeom prst="rect">
+            <a:avLst/>
+          </a:prstGeom>
+          <a:noFill/>
+        </p:spPr>
+        <p:txBody>
+          <a:bodyPr wrap="square" anchor="t" lIns="0" rIns="0" tIns="0" bIns="0"/>
+          <a:lstStyle/>
+          <a:p>
+            <a:pPr algn="l"/>
+            <a:r>
+              <a:rPr sz="1000" b="0" i="0">
+                <a:solidFill>
+                  <a:srgbClr val="54595D"/>
+                </a:solidFill>
+                <a:latin typeface="Calibri"/>
+              </a:rPr>
+              <a:t>Design and Development for Engineering and Manufacturing T Level  ·  Designing, Modelling and Prototyping</a:t>
+            </a:r>
+          </a:p>
+        </p:txBody>
+      </p:sp>
+      <p:sp>
+        <p:nvSpPr>
+          <p:cNvPr id="5" name="TextBox 4"/>
+          <p:cNvSpPr txBox="1"/>
+          <p:nvPr/>
+        </p:nvSpPr>
+        <p:spPr>
+          <a:xfrm>
+            <a:off x="10728655" y="6446520"/>
+            <a:ext cx="914400" cy="274320"/>
+          </a:xfrm>
+          <a:prstGeom prst="rect">
+            <a:avLst/>
+          </a:prstGeom>
+          <a:noFill/>
+        </p:spPr>
+        <p:txBody>
+          <a:bodyPr wrap="square" anchor="t" lIns="0" rIns="0" tIns="0" bIns="0"/>
+          <a:lstStyle/>
+          <a:p>
+            <a:pPr algn="r"/>
+            <a:r>
+              <a:rPr sz="1000" b="0" i="0">
+                <a:solidFill>
+                  <a:srgbClr val="54595D"/>
+                </a:solidFill>
+                <a:latin typeface="Calibri"/>
+              </a:rPr>
+              <a:t>12</a:t>
+            </a:r>
+          </a:p>
+        </p:txBody>
+      </p:sp>
+      <p:sp>
+        <p:nvSpPr>
+          <p:cNvPr id="6" name="Rounded Rectangle 5"/>
+          <p:cNvSpPr/>
+          <p:nvPr/>
+        </p:nvSpPr>
+        <p:spPr>
+          <a:xfrm>
+            <a:off x="548640" y="1508760"/>
+            <a:ext cx="2011680" cy="457200"/>
+          </a:xfrm>
+          <a:prstGeom prst="roundRect">
+            <a:avLst>
+              <a:gd name="adj" fmla="val 50000"/>
+            </a:avLst>
+          </a:prstGeom>
+          <a:solidFill>
+            <a:srgbClr val="E0463A"/>
+          </a:solidFill>
+          <a:ln>
+            <a:noFill/>
+          </a:ln>
+          <a:effectLst/>
+        </p:spPr>
+        <p:style>
+          <a:lnRef idx="1">
+            <a:schemeClr val="accent1"/>
+          </a:lnRef>
+          <a:fillRef idx="3">
+            <a:schemeClr val="accent1"/>
+          </a:fillRef>
+          <a:effectRef idx="2">
+            <a:schemeClr val="accent1"/>
+          </a:effectRef>
+          <a:fontRef idx="minor">
+            <a:schemeClr val="lt1"/>
+          </a:fontRef>
+        </p:style>
+        <p:txBody>
+          <a:bodyPr rtlCol="0" anchor="ctr"/>
+          <a:lstStyle/>
+          <a:p/>
+        </p:txBody>
+      </p:sp>
+      <p:sp>
+        <p:nvSpPr>
+          <p:cNvPr id="7" name="TextBox 6"/>
+          <p:cNvSpPr txBox="1"/>
+          <p:nvPr/>
+        </p:nvSpPr>
+        <p:spPr>
+          <a:xfrm>
+            <a:off x="548640" y="1508760"/>
+            <a:ext cx="2011680" cy="457200"/>
+          </a:xfrm>
+          <a:prstGeom prst="rect">
+            <a:avLst/>
+          </a:prstGeom>
+          <a:noFill/>
+        </p:spPr>
+        <p:txBody>
+          <a:bodyPr wrap="square" anchor="ctr" lIns="0" rIns="0" tIns="0" bIns="0"/>
+          <a:lstStyle/>
+          <a:p>
+            <a:pPr algn="ctr"/>
+            <a:r>
+              <a:rPr sz="1400" b="1" i="0">
+                <a:solidFill>
+                  <a:srgbClr val="FFFFFF"/>
+                </a:solidFill>
+                <a:latin typeface="Calibri"/>
+              </a:rPr>
+              <a:t>60 minutes</a:t>
+            </a:r>
+          </a:p>
+        </p:txBody>
+      </p:sp>
+      <p:sp>
+        <p:nvSpPr>
+          <p:cNvPr id="8" name="TextBox 7"/>
+          <p:cNvSpPr txBox="1"/>
+          <p:nvPr/>
+        </p:nvSpPr>
+        <p:spPr>
+          <a:xfrm>
+            <a:off x="2743200" y="1508760"/>
+            <a:ext cx="4754880" cy="457200"/>
+          </a:xfrm>
+          <a:prstGeom prst="rect">
+            <a:avLst/>
+          </a:prstGeom>
+          <a:noFill/>
+        </p:spPr>
+        <p:txBody>
+          <a:bodyPr wrap="square" anchor="ctr" lIns="0" rIns="0" tIns="0" bIns="0"/>
+          <a:lstStyle/>
+          <a:p>
+            <a:pPr algn="l"/>
+            <a:r>
+              <a:rPr sz="1400" b="0" i="1">
+                <a:solidFill>
+                  <a:srgbClr val="54595D"/>
+                </a:solidFill>
+                <a:latin typeface="Calibri"/>
+              </a:rPr>
+              <a:t>Pairs, practical, can run over two lessons</a:t>
+            </a:r>
+          </a:p>
+        </p:txBody>
+      </p:sp>
+      <p:sp>
+        <p:nvSpPr>
+          <p:cNvPr id="9" name="Oval 8"/>
+          <p:cNvSpPr/>
+          <p:nvPr/>
+        </p:nvSpPr>
+        <p:spPr>
+          <a:xfrm>
+            <a:off x="548640" y="2482596"/>
+            <a:ext cx="384048" cy="384048"/>
+          </a:xfrm>
+          <a:prstGeom prst="ellipse">
+            <a:avLst/>
+          </a:prstGeom>
+          <a:solidFill>
+            <a:srgbClr val="0645AD"/>
+          </a:solidFill>
+          <a:ln>
+            <a:noFill/>
+          </a:ln>
+          <a:effectLst/>
+        </p:spPr>
+        <p:style>
+          <a:lnRef idx="1">
+            <a:schemeClr val="accent1"/>
+          </a:lnRef>
+          <a:fillRef idx="3">
+            <a:schemeClr val="accent1"/>
+          </a:fillRef>
+          <a:effectRef idx="2">
+            <a:schemeClr val="accent1"/>
+          </a:effectRef>
+          <a:fontRef idx="minor">
+            <a:schemeClr val="lt1"/>
+          </a:fontRef>
+        </p:style>
+        <p:txBody>
+          <a:bodyPr rtlCol="0" anchor="ctr" lIns="0" rIns="0" tIns="0" bIns="0"/>
+          <a:lstStyle/>
+          <a:p>
+            <a:pPr algn="ctr"/>
+            <a:r>
+              <a:rPr sz="1300" b="1">
+                <a:solidFill>
+                  <a:srgbClr val="FFFFFF"/>
+                </a:solidFill>
+                <a:latin typeface="Calibri"/>
+              </a:rPr>
+              <a:t>1</a:t>
+            </a:r>
+          </a:p>
+        </p:txBody>
+      </p:sp>
+      <p:sp>
+        <p:nvSpPr>
+          <p:cNvPr id="10" name="TextBox 9"/>
+          <p:cNvSpPr txBox="1"/>
+          <p:nvPr/>
+        </p:nvSpPr>
+        <p:spPr>
+          <a:xfrm>
+            <a:off x="1143000" y="2240280"/>
+            <a:ext cx="5943600" cy="868680"/>
+          </a:xfrm>
+          <a:prstGeom prst="rect">
+            <a:avLst/>
+          </a:prstGeom>
+          <a:noFill/>
+        </p:spPr>
+        <p:txBody>
+          <a:bodyPr wrap="square" anchor="ctr" lIns="0" rIns="0" tIns="0" bIns="0"/>
+          <a:lstStyle/>
+          <a:p>
+            <a:pPr algn="l"/>
+            <a:r>
+              <a:rPr sz="1700" b="0" i="0">
+                <a:solidFill>
+                  <a:srgbClr val="202122"/>
+                </a:solidFill>
+                <a:latin typeface="Calibri"/>
+              </a:rPr>
+              <a:t>Design a phone stand with an adjustable angle.</a:t>
+            </a:r>
+          </a:p>
+        </p:txBody>
+      </p:sp>
+      <p:sp>
+        <p:nvSpPr>
+          <p:cNvPr id="11" name="Oval 10"/>
+          <p:cNvSpPr/>
+          <p:nvPr/>
+        </p:nvSpPr>
+        <p:spPr>
+          <a:xfrm>
+            <a:off x="548640" y="3461004"/>
+            <a:ext cx="384048" cy="384048"/>
+          </a:xfrm>
+          <a:prstGeom prst="ellipse">
+            <a:avLst/>
+          </a:prstGeom>
+          <a:solidFill>
+            <a:srgbClr val="0645AD"/>
+          </a:solidFill>
+          <a:ln>
+            <a:noFill/>
+          </a:ln>
+          <a:effectLst/>
+        </p:spPr>
+        <p:style>
+          <a:lnRef idx="1">
+            <a:schemeClr val="accent1"/>
+          </a:lnRef>
+          <a:fillRef idx="3">
+            <a:schemeClr val="accent1"/>
+          </a:fillRef>
+          <a:effectRef idx="2">
+            <a:schemeClr val="accent1"/>
+          </a:effectRef>
+          <a:fontRef idx="minor">
+            <a:schemeClr val="lt1"/>
+          </a:fontRef>
+        </p:style>
+        <p:txBody>
+          <a:bodyPr rtlCol="0" anchor="ctr" lIns="0" rIns="0" tIns="0" bIns="0"/>
+          <a:lstStyle/>
+          <a:p>
+            <a:pPr algn="ctr"/>
+            <a:r>
+              <a:rPr sz="1300" b="1">
+                <a:solidFill>
+                  <a:srgbClr val="FFFFFF"/>
+                </a:solidFill>
+                <a:latin typeface="Calibri"/>
+              </a:rPr>
+              <a:t>2</a:t>
+            </a:r>
+          </a:p>
+        </p:txBody>
+      </p:sp>
+      <p:sp>
+        <p:nvSpPr>
+          <p:cNvPr id="12" name="TextBox 11"/>
+          <p:cNvSpPr txBox="1"/>
+          <p:nvPr/>
+        </p:nvSpPr>
+        <p:spPr>
+          <a:xfrm>
+            <a:off x="1143000" y="3218688"/>
+            <a:ext cx="5943600" cy="868680"/>
+          </a:xfrm>
+          <a:prstGeom prst="rect">
+            <a:avLst/>
+          </a:prstGeom>
+          <a:noFill/>
+        </p:spPr>
+        <p:txBody>
+          <a:bodyPr wrap="square" anchor="ctr" lIns="0" rIns="0" tIns="0" bIns="0"/>
+          <a:lstStyle/>
+          <a:p>
+            <a:pPr algn="l"/>
+            <a:r>
+              <a:rPr sz="1700" b="0" i="0">
+                <a:solidFill>
+                  <a:srgbClr val="202122"/>
+                </a:solidFill>
+                <a:latin typeface="Calibri"/>
+              </a:rPr>
+              <a:t>Produce a 3D CAD model and a detailed drawing.</a:t>
+            </a:r>
+          </a:p>
+        </p:txBody>
+      </p:sp>
+      <p:sp>
+        <p:nvSpPr>
+          <p:cNvPr id="13" name="Oval 12"/>
+          <p:cNvSpPr/>
+          <p:nvPr/>
+        </p:nvSpPr>
+        <p:spPr>
+          <a:xfrm>
+            <a:off x="548640" y="4439412"/>
+            <a:ext cx="384048" cy="384048"/>
+          </a:xfrm>
+          <a:prstGeom prst="ellipse">
+            <a:avLst/>
+          </a:prstGeom>
+          <a:solidFill>
+            <a:srgbClr val="0645AD"/>
+          </a:solidFill>
+          <a:ln>
+            <a:noFill/>
+          </a:ln>
+          <a:effectLst/>
+        </p:spPr>
+        <p:style>
+          <a:lnRef idx="1">
+            <a:schemeClr val="accent1"/>
+          </a:lnRef>
+          <a:fillRef idx="3">
+            <a:schemeClr val="accent1"/>
+          </a:fillRef>
+          <a:effectRef idx="2">
+            <a:schemeClr val="accent1"/>
+          </a:effectRef>
+          <a:fontRef idx="minor">
+            <a:schemeClr val="lt1"/>
+          </a:fontRef>
+        </p:style>
+        <p:txBody>
+          <a:bodyPr rtlCol="0" anchor="ctr" lIns="0" rIns="0" tIns="0" bIns="0"/>
+          <a:lstStyle/>
+          <a:p>
+            <a:pPr algn="ctr"/>
+            <a:r>
+              <a:rPr sz="1300" b="1">
+                <a:solidFill>
+                  <a:srgbClr val="FFFFFF"/>
+                </a:solidFill>
+                <a:latin typeface="Calibri"/>
+              </a:rPr>
+              <a:t>3</a:t>
+            </a:r>
+          </a:p>
+        </p:txBody>
+      </p:sp>
+      <p:sp>
+        <p:nvSpPr>
+          <p:cNvPr id="14" name="TextBox 13"/>
+          <p:cNvSpPr txBox="1"/>
+          <p:nvPr/>
+        </p:nvSpPr>
+        <p:spPr>
+          <a:xfrm>
+            <a:off x="1143000" y="4197096"/>
+            <a:ext cx="5943600" cy="868680"/>
+          </a:xfrm>
+          <a:prstGeom prst="rect">
+            <a:avLst/>
+          </a:prstGeom>
+          <a:noFill/>
+        </p:spPr>
+        <p:txBody>
+          <a:bodyPr wrap="square" anchor="ctr" lIns="0" rIns="0" tIns="0" bIns="0"/>
+          <a:lstStyle/>
+          <a:p>
+            <a:pPr algn="l"/>
+            <a:r>
+              <a:rPr sz="1700" b="0" i="0">
+                <a:solidFill>
+                  <a:srgbClr val="202122"/>
+                </a:solidFill>
+                <a:latin typeface="Calibri"/>
+              </a:rPr>
+              <a:t>3D print or build a block model.</a:t>
+            </a:r>
+          </a:p>
+        </p:txBody>
+      </p:sp>
+      <p:sp>
+        <p:nvSpPr>
+          <p:cNvPr id="15" name="Oval 14"/>
+          <p:cNvSpPr/>
+          <p:nvPr/>
+        </p:nvSpPr>
+        <p:spPr>
+          <a:xfrm>
+            <a:off x="548640" y="5417820"/>
+            <a:ext cx="384048" cy="384048"/>
+          </a:xfrm>
+          <a:prstGeom prst="ellipse">
+            <a:avLst/>
+          </a:prstGeom>
+          <a:solidFill>
+            <a:srgbClr val="0645AD"/>
+          </a:solidFill>
+          <a:ln>
+            <a:noFill/>
+          </a:ln>
+          <a:effectLst/>
+        </p:spPr>
+        <p:style>
+          <a:lnRef idx="1">
+            <a:schemeClr val="accent1"/>
+          </a:lnRef>
+          <a:fillRef idx="3">
+            <a:schemeClr val="accent1"/>
+          </a:fillRef>
+          <a:effectRef idx="2">
+            <a:schemeClr val="accent1"/>
+          </a:effectRef>
+          <a:fontRef idx="minor">
+            <a:schemeClr val="lt1"/>
+          </a:fontRef>
+        </p:style>
+        <p:txBody>
+          <a:bodyPr rtlCol="0" anchor="ctr" lIns="0" rIns="0" tIns="0" bIns="0"/>
+          <a:lstStyle/>
+          <a:p>
+            <a:pPr algn="ctr"/>
+            <a:r>
+              <a:rPr sz="1300" b="1">
+                <a:solidFill>
+                  <a:srgbClr val="FFFFFF"/>
+                </a:solidFill>
+                <a:latin typeface="Calibri"/>
+              </a:rPr>
+              <a:t>4</a:t>
+            </a:r>
+          </a:p>
+        </p:txBody>
+      </p:sp>
+      <p:sp>
+        <p:nvSpPr>
+          <p:cNvPr id="16" name="TextBox 15"/>
+          <p:cNvSpPr txBox="1"/>
+          <p:nvPr/>
+        </p:nvSpPr>
+        <p:spPr>
+          <a:xfrm>
+            <a:off x="1143000" y="5175504"/>
+            <a:ext cx="5943600" cy="868680"/>
+          </a:xfrm>
+          <a:prstGeom prst="rect">
+            <a:avLst/>
+          </a:prstGeom>
+          <a:noFill/>
+        </p:spPr>
+        <p:txBody>
+          <a:bodyPr wrap="square" anchor="ctr" lIns="0" rIns="0" tIns="0" bIns="0"/>
+          <a:lstStyle/>
+          <a:p>
+            <a:pPr algn="l"/>
+            <a:r>
+              <a:rPr sz="1700" b="0" i="0">
+                <a:solidFill>
+                  <a:srgbClr val="202122"/>
+                </a:solidFill>
+                <a:latin typeface="Calibri"/>
+              </a:rPr>
+              <a:t>Test it and annotate improvements.</a:t>
+            </a:r>
+          </a:p>
+        </p:txBody>
+      </p:sp>
+      <p:sp>
+        <p:nvSpPr>
+          <p:cNvPr id="17" name="Rounded Rectangle 16"/>
+          <p:cNvSpPr/>
+          <p:nvPr/>
+        </p:nvSpPr>
+        <p:spPr>
+          <a:xfrm>
+            <a:off x="7772400" y="1508760"/>
+            <a:ext cx="3867912" cy="4572000"/>
+          </a:xfrm>
+          <a:prstGeom prst="roundRect">
+            <a:avLst>
+              <a:gd name="adj" fmla="val 8000"/>
+            </a:avLst>
+          </a:prstGeom>
+          <a:solidFill>
+            <a:srgbClr val="EAF3FF"/>
+          </a:solidFill>
+          <a:ln>
+            <a:noFill/>
+          </a:ln>
+          <a:effectLst/>
+        </p:spPr>
+        <p:style>
+          <a:lnRef idx="1">
+            <a:schemeClr val="accent1"/>
+          </a:lnRef>
+          <a:fillRef idx="3">
+            <a:schemeClr val="accent1"/>
+          </a:fillRef>
+          <a:effectRef idx="2">
+            <a:schemeClr val="accent1"/>
+          </a:effectRef>
+          <a:fontRef idx="minor">
+            <a:schemeClr val="lt1"/>
+          </a:fontRef>
+        </p:style>
+        <p:txBody>
+          <a:bodyPr rtlCol="0" anchor="ctr"/>
+          <a:lstStyle/>
+          <a:p/>
+        </p:txBody>
+      </p:sp>
+      <p:sp>
+        <p:nvSpPr>
+          <p:cNvPr id="18" name="TextBox 17"/>
+          <p:cNvSpPr txBox="1"/>
+          <p:nvPr/>
+        </p:nvSpPr>
+        <p:spPr>
+          <a:xfrm>
+            <a:off x="8046720" y="1737360"/>
+            <a:ext cx="3291840" cy="365760"/>
+          </a:xfrm>
+          <a:prstGeom prst="rect">
+            <a:avLst/>
+          </a:prstGeom>
+          <a:noFill/>
+        </p:spPr>
+        <p:txBody>
+          <a:bodyPr wrap="square" anchor="t" lIns="0" rIns="0" tIns="0" bIns="0"/>
+          <a:lstStyle/>
+          <a:p>
+            <a:pPr algn="l"/>
+            <a:r>
+              <a:rPr sz="1300" b="1" i="0">
+                <a:solidFill>
+                  <a:srgbClr val="0645AD"/>
+                </a:solidFill>
+                <a:latin typeface="Calibri"/>
+              </a:rPr>
+              <a:t>SUCCESS CRITERIA</a:t>
+            </a:r>
+          </a:p>
+        </p:txBody>
+      </p:sp>
+      <p:sp>
+        <p:nvSpPr>
+          <p:cNvPr id="19" name="TextBox 18"/>
+          <p:cNvSpPr txBox="1"/>
+          <p:nvPr/>
+        </p:nvSpPr>
+        <p:spPr>
+          <a:xfrm>
+            <a:off x="8046720" y="2240280"/>
+            <a:ext cx="3337560" cy="3657600"/>
+          </a:xfrm>
+          <a:prstGeom prst="rect">
+            <a:avLst/>
+          </a:prstGeom>
+          <a:noFill/>
+        </p:spPr>
+        <p:txBody>
+          <a:bodyPr wrap="square" lIns="0" rIns="0" tIns="0" bIns="0">
+            <a:spAutoFit/>
+          </a:bodyPr>
+          <a:lstStyle/>
+          <a:p>
+            <a:pPr marL="274320" indent="-274320">
+              <a:spcAft>
+                <a:spcPts val="810"/>
+              </a:spcAft>
+              <a:buClr>
+                <a:srgbClr val="0645AD"/>
+              </a:buClr>
+              <a:buFont typeface="Arial"/>
+              <a:buChar char="•"/>
+            </a:pPr>
+            <a:r>
+              <a:rPr sz="1800" b="0">
+                <a:solidFill>
+                  <a:srgbClr val="202122"/>
+                </a:solidFill>
+                <a:latin typeface="Calibri"/>
+              </a:rPr>
+              <a:t>Drawing follows standards</a:t>
+            </a:r>
+          </a:p>
+          <a:p>
+            <a:pPr marL="274320" indent="-274320">
+              <a:spcAft>
+                <a:spcPts val="810"/>
+              </a:spcAft>
+              <a:buClr>
+                <a:srgbClr val="0645AD"/>
+              </a:buClr>
+              <a:buFont typeface="Arial"/>
+              <a:buChar char="•"/>
+            </a:pPr>
+            <a:r>
+              <a:rPr sz="1800" b="0">
+                <a:solidFill>
+                  <a:srgbClr val="202122"/>
+                </a:solidFill>
+                <a:latin typeface="Calibri"/>
+              </a:rPr>
+              <a:t>Model built safely</a:t>
+            </a:r>
+          </a:p>
+          <a:p>
+            <a:pPr marL="274320" indent="-274320">
+              <a:spcAft>
+                <a:spcPts val="810"/>
+              </a:spcAft>
+              <a:buClr>
+                <a:srgbClr val="0645AD"/>
+              </a:buClr>
+              <a:buFont typeface="Arial"/>
+              <a:buChar char="•"/>
+            </a:pPr>
+            <a:r>
+              <a:rPr sz="1800" b="0">
+                <a:solidFill>
+                  <a:srgbClr val="202122"/>
+                </a:solidFill>
+                <a:latin typeface="Calibri"/>
+              </a:rPr>
+              <a:t>Improvements based on testing</a:t>
+            </a:r>
+          </a:p>
+        </p:txBody>
+      </p:sp>
+    </p:spTree>
+  </p:cSld>
+  <p:clrMapOvr>
+    <a:masterClrMapping/>
+  </p:clrMapOvr>
+</p:sld>
+</file>
+
+<file path=ppt/slides/slide13.xml><?xml version="1.0" encoding="utf-8"?>
+<p:sld xmlns:a="http://schemas.openxmlformats.org/drawingml/2006/main" xmlns:p="http://schemas.openxmlformats.org/presentationml/2006/main" xmlns:r="http://schemas.openxmlformats.org/officeDocument/2006/relationships">
+  <p:cSld>
+    <p:bg>
+      <p:bgPr>
+        <a:solidFill>
+          <a:srgbClr val="03306E"/>
+        </a:solidFill>
+        <a:effectLst/>
+      </p:bgPr>
+    </p:bg>
+    <p:spTree>
+      <p:nvGrpSpPr>
+        <p:cNvPr id="1" name=""/>
+        <p:cNvGrpSpPr/>
+        <p:nvPr/>
+      </p:nvGrpSpPr>
+      <p:grpSpPr/>
+      <p:sp>
+        <p:nvSpPr>
+          <p:cNvPr id="2" name="TextBox 1"/>
+          <p:cNvSpPr txBox="1"/>
+          <p:nvPr/>
+        </p:nvSpPr>
+        <p:spPr>
+          <a:xfrm>
+            <a:off x="548640" y="320040"/>
+            <a:ext cx="11094415" cy="274320"/>
+          </a:xfrm>
+          <a:prstGeom prst="rect">
+            <a:avLst/>
+          </a:prstGeom>
+          <a:noFill/>
+        </p:spPr>
+        <p:txBody>
+          <a:bodyPr wrap="square" anchor="t" lIns="0" rIns="0" tIns="0" bIns="0"/>
+          <a:lstStyle/>
+          <a:p>
+            <a:pPr algn="l"/>
+            <a:r>
+              <a:rPr sz="1100" b="1" i="0">
+                <a:solidFill>
+                  <a:srgbClr val="A9C8F0"/>
+                </a:solidFill>
+                <a:latin typeface="Calibri"/>
+              </a:rPr>
+              <a:t>MECHANICAL ENGINEERING  ·  Mechanical: Performance Outcome 4</a:t>
+            </a:r>
+          </a:p>
+        </p:txBody>
+      </p:sp>
+      <p:sp>
+        <p:nvSpPr>
+          <p:cNvPr id="3" name="TextBox 2"/>
+          <p:cNvSpPr txBox="1"/>
+          <p:nvPr/>
+        </p:nvSpPr>
+        <p:spPr>
+          <a:xfrm>
+            <a:off x="548640" y="566928"/>
+            <a:ext cx="11094415" cy="822960"/>
+          </a:xfrm>
+          <a:prstGeom prst="rect">
+            <a:avLst/>
+          </a:prstGeom>
+          <a:noFill/>
+        </p:spPr>
+        <p:txBody>
+          <a:bodyPr wrap="square" anchor="ctr" lIns="0" rIns="0" tIns="0" bIns="0"/>
+          <a:lstStyle/>
+          <a:p>
+            <a:pPr algn="l"/>
+            <a:r>
+              <a:rPr sz="3200" b="1" i="0">
+                <a:solidFill>
+                  <a:srgbClr val="FFFFFF"/>
+                </a:solidFill>
+                <a:latin typeface="Cambria"/>
+              </a:rPr>
+              <a:t>Exit ticket</a:t>
+            </a:r>
+          </a:p>
+        </p:txBody>
+      </p:sp>
+      <p:sp>
+        <p:nvSpPr>
+          <p:cNvPr id="4" name="Oval 3"/>
+          <p:cNvSpPr/>
+          <p:nvPr/>
+        </p:nvSpPr>
+        <p:spPr>
+          <a:xfrm>
+            <a:off x="548640" y="1737360"/>
+            <a:ext cx="502920" cy="502920"/>
+          </a:xfrm>
+          <a:prstGeom prst="ellipse">
+            <a:avLst/>
+          </a:prstGeom>
+          <a:solidFill>
+            <a:srgbClr val="E0463A"/>
+          </a:solidFill>
+          <a:ln>
+            <a:noFill/>
+          </a:ln>
+          <a:effectLst/>
+        </p:spPr>
+        <p:style>
+          <a:lnRef idx="1">
+            <a:schemeClr val="accent1"/>
+          </a:lnRef>
+          <a:fillRef idx="3">
+            <a:schemeClr val="accent1"/>
+          </a:fillRef>
+          <a:effectRef idx="2">
+            <a:schemeClr val="accent1"/>
+          </a:effectRef>
+          <a:fontRef idx="minor">
+            <a:schemeClr val="lt1"/>
+          </a:fontRef>
+        </p:style>
+        <p:txBody>
+          <a:bodyPr rtlCol="0" anchor="ctr" lIns="0" rIns="0" tIns="0" bIns="0"/>
+          <a:lstStyle/>
+          <a:p>
+            <a:pPr algn="ctr"/>
+            <a:r>
+              <a:rPr sz="1700" b="1">
+                <a:solidFill>
+                  <a:srgbClr val="FFFFFF"/>
+                </a:solidFill>
+                <a:latin typeface="Calibri"/>
+              </a:rPr>
+              <a:t>1</a:t>
+            </a:r>
+          </a:p>
+        </p:txBody>
+      </p:sp>
+      <p:sp>
+        <p:nvSpPr>
+          <p:cNvPr id="5" name="TextBox 4"/>
+          <p:cNvSpPr txBox="1"/>
+          <p:nvPr/>
+        </p:nvSpPr>
+        <p:spPr>
+          <a:xfrm>
+            <a:off x="1325880" y="1645920"/>
+            <a:ext cx="6583680" cy="822960"/>
+          </a:xfrm>
+          <a:prstGeom prst="rect">
+            <a:avLst/>
+          </a:prstGeom>
+          <a:noFill/>
+        </p:spPr>
+        <p:txBody>
+          <a:bodyPr wrap="square" anchor="ctr" lIns="0" rIns="0" tIns="0" bIns="0"/>
+          <a:lstStyle/>
+          <a:p>
+            <a:pPr algn="l"/>
+            <a:r>
+              <a:rPr sz="2000" b="0" i="0">
+                <a:solidFill>
+                  <a:srgbClr val="FFFFFF"/>
+                </a:solidFill>
+                <a:latin typeface="Calibri"/>
+              </a:rPr>
+              <a:t>When would you choose a one-off prototype over a 3D print?</a:t>
+            </a:r>
+          </a:p>
+        </p:txBody>
+      </p:sp>
+      <p:sp>
+        <p:nvSpPr>
+          <p:cNvPr id="6" name="Oval 5"/>
+          <p:cNvSpPr/>
+          <p:nvPr/>
+        </p:nvSpPr>
+        <p:spPr>
+          <a:xfrm>
+            <a:off x="548640" y="2697480"/>
+            <a:ext cx="502920" cy="502920"/>
+          </a:xfrm>
+          <a:prstGeom prst="ellipse">
+            <a:avLst/>
+          </a:prstGeom>
+          <a:solidFill>
+            <a:srgbClr val="E0463A"/>
+          </a:solidFill>
+          <a:ln>
+            <a:noFill/>
+          </a:ln>
+          <a:effectLst/>
+        </p:spPr>
+        <p:style>
+          <a:lnRef idx="1">
+            <a:schemeClr val="accent1"/>
+          </a:lnRef>
+          <a:fillRef idx="3">
+            <a:schemeClr val="accent1"/>
+          </a:fillRef>
+          <a:effectRef idx="2">
+            <a:schemeClr val="accent1"/>
+          </a:effectRef>
+          <a:fontRef idx="minor">
+            <a:schemeClr val="lt1"/>
+          </a:fontRef>
+        </p:style>
+        <p:txBody>
+          <a:bodyPr rtlCol="0" anchor="ctr" lIns="0" rIns="0" tIns="0" bIns="0"/>
+          <a:lstStyle/>
+          <a:p>
+            <a:pPr algn="ctr"/>
+            <a:r>
+              <a:rPr sz="1700" b="1">
+                <a:solidFill>
+                  <a:srgbClr val="FFFFFF"/>
+                </a:solidFill>
+                <a:latin typeface="Calibri"/>
+              </a:rPr>
+              <a:t>2</a:t>
+            </a:r>
+          </a:p>
+        </p:txBody>
+      </p:sp>
+      <p:sp>
+        <p:nvSpPr>
+          <p:cNvPr id="7" name="TextBox 6"/>
+          <p:cNvSpPr txBox="1"/>
+          <p:nvPr/>
+        </p:nvSpPr>
+        <p:spPr>
+          <a:xfrm>
+            <a:off x="1325880" y="2606040"/>
+            <a:ext cx="6583680" cy="822960"/>
+          </a:xfrm>
+          <a:prstGeom prst="rect">
+            <a:avLst/>
+          </a:prstGeom>
+          <a:noFill/>
+        </p:spPr>
+        <p:txBody>
+          <a:bodyPr wrap="square" anchor="ctr" lIns="0" rIns="0" tIns="0" bIns="0"/>
+          <a:lstStyle/>
+          <a:p>
+            <a:pPr algn="l"/>
+            <a:r>
+              <a:rPr sz="2000" b="0" i="0">
+                <a:solidFill>
+                  <a:srgbClr val="FFFFFF"/>
+                </a:solidFill>
+                <a:latin typeface="Calibri"/>
+              </a:rPr>
+              <a:t>Why annotate concept sketches?</a:t>
+            </a:r>
+          </a:p>
+        </p:txBody>
+      </p:sp>
+      <p:sp>
+        <p:nvSpPr>
+          <p:cNvPr id="8" name="Oval 7"/>
+          <p:cNvSpPr/>
+          <p:nvPr/>
+        </p:nvSpPr>
+        <p:spPr>
+          <a:xfrm>
+            <a:off x="548640" y="3657600"/>
+            <a:ext cx="502920" cy="502920"/>
+          </a:xfrm>
+          <a:prstGeom prst="ellipse">
+            <a:avLst/>
+          </a:prstGeom>
+          <a:solidFill>
+            <a:srgbClr val="E0463A"/>
+          </a:solidFill>
+          <a:ln>
+            <a:noFill/>
+          </a:ln>
+          <a:effectLst/>
+        </p:spPr>
+        <p:style>
+          <a:lnRef idx="1">
+            <a:schemeClr val="accent1"/>
+          </a:lnRef>
+          <a:fillRef idx="3">
+            <a:schemeClr val="accent1"/>
+          </a:fillRef>
+          <a:effectRef idx="2">
+            <a:schemeClr val="accent1"/>
+          </a:effectRef>
+          <a:fontRef idx="minor">
+            <a:schemeClr val="lt1"/>
+          </a:fontRef>
+        </p:style>
+        <p:txBody>
+          <a:bodyPr rtlCol="0" anchor="ctr" lIns="0" rIns="0" tIns="0" bIns="0"/>
+          <a:lstStyle/>
+          <a:p>
+            <a:pPr algn="ctr"/>
+            <a:r>
+              <a:rPr sz="1700" b="1">
+                <a:solidFill>
+                  <a:srgbClr val="FFFFFF"/>
+                </a:solidFill>
+                <a:latin typeface="Calibri"/>
+              </a:rPr>
+              <a:t>3</a:t>
+            </a:r>
+          </a:p>
+        </p:txBody>
+      </p:sp>
+      <p:sp>
+        <p:nvSpPr>
+          <p:cNvPr id="9" name="TextBox 8"/>
+          <p:cNvSpPr txBox="1"/>
+          <p:nvPr/>
+        </p:nvSpPr>
+        <p:spPr>
+          <a:xfrm>
+            <a:off x="1325880" y="3566160"/>
+            <a:ext cx="6583680" cy="822960"/>
+          </a:xfrm>
+          <a:prstGeom prst="rect">
+            <a:avLst/>
+          </a:prstGeom>
+          <a:noFill/>
+        </p:spPr>
+        <p:txBody>
+          <a:bodyPr wrap="square" anchor="ctr" lIns="0" rIns="0" tIns="0" bIns="0"/>
+          <a:lstStyle/>
+          <a:p>
+            <a:pPr algn="l"/>
+            <a:r>
+              <a:rPr sz="2000" b="0" i="0">
+                <a:solidFill>
+                  <a:srgbClr val="FFFFFF"/>
+                </a:solidFill>
+                <a:latin typeface="Calibri"/>
+              </a:rPr>
+              <a:t>What makes a design realisable?</a:t>
+            </a:r>
+          </a:p>
+        </p:txBody>
+      </p:sp>
+      <p:sp>
+        <p:nvSpPr>
+          <p:cNvPr id="10" name="Rounded Rectangle 9"/>
+          <p:cNvSpPr/>
+          <p:nvPr/>
+        </p:nvSpPr>
+        <p:spPr>
+          <a:xfrm>
+            <a:off x="8229600" y="1645920"/>
+            <a:ext cx="3410712" cy="2926080"/>
+          </a:xfrm>
+          <a:prstGeom prst="roundRect">
+            <a:avLst>
+              <a:gd name="adj" fmla="val 8000"/>
+            </a:avLst>
+          </a:prstGeom>
+          <a:solidFill>
+            <a:srgbClr val="0645AD"/>
+          </a:solidFill>
+          <a:ln>
+            <a:noFill/>
+          </a:ln>
+          <a:effectLst/>
+        </p:spPr>
+        <p:style>
+          <a:lnRef idx="1">
+            <a:schemeClr val="accent1"/>
+          </a:lnRef>
+          <a:fillRef idx="3">
+            <a:schemeClr val="accent1"/>
+          </a:fillRef>
+          <a:effectRef idx="2">
+            <a:schemeClr val="accent1"/>
+          </a:effectRef>
+          <a:fontRef idx="minor">
+            <a:schemeClr val="lt1"/>
+          </a:fontRef>
+        </p:style>
+        <p:txBody>
+          <a:bodyPr rtlCol="0" anchor="ctr"/>
+          <a:lstStyle/>
+          <a:p/>
+        </p:txBody>
+      </p:sp>
+      <p:sp>
+        <p:nvSpPr>
+          <p:cNvPr id="11" name="TextBox 10"/>
+          <p:cNvSpPr txBox="1"/>
+          <p:nvPr/>
+        </p:nvSpPr>
+        <p:spPr>
+          <a:xfrm>
+            <a:off x="8503920" y="1874519"/>
+            <a:ext cx="2926080" cy="365760"/>
+          </a:xfrm>
+          <a:prstGeom prst="rect">
+            <a:avLst/>
+          </a:prstGeom>
+          <a:noFill/>
+        </p:spPr>
+        <p:txBody>
+          <a:bodyPr wrap="square" anchor="t" lIns="0" rIns="0" tIns="0" bIns="0"/>
+          <a:lstStyle/>
+          <a:p>
+            <a:pPr algn="l"/>
+            <a:r>
+              <a:rPr sz="1300" b="1" i="0">
+                <a:solidFill>
+                  <a:srgbClr val="A9C8F0"/>
+                </a:solidFill>
+                <a:latin typeface="Calibri"/>
+              </a:rPr>
+              <a:t>REVISE THIS TOPIC</a:t>
+            </a:r>
+          </a:p>
+        </p:txBody>
+      </p:sp>
+      <p:sp>
+        <p:nvSpPr>
+          <p:cNvPr id="12" name="TextBox 11"/>
+          <p:cNvSpPr txBox="1"/>
+          <p:nvPr/>
+        </p:nvSpPr>
+        <p:spPr>
+          <a:xfrm>
+            <a:off x="8503920" y="2286000"/>
+            <a:ext cx="2926080" cy="548640"/>
+          </a:xfrm>
+          <a:prstGeom prst="rect">
+            <a:avLst/>
+          </a:prstGeom>
+          <a:noFill/>
+        </p:spPr>
+        <p:txBody>
+          <a:bodyPr wrap="square" anchor="t" lIns="0" rIns="0" tIns="0" bIns="0"/>
+          <a:lstStyle/>
+          <a:p>
+            <a:pPr algn="l"/>
+            <a:r>
+              <a:rPr sz="1400" b="0" i="0">
+                <a:solidFill>
+                  <a:srgbClr val="FFFFFF"/>
+                </a:solidFill>
+                <a:latin typeface="Calibri"/>
+              </a:rPr>
+              <a:t>Revision notes for this lesson are on the study wiki:</a:t>
+            </a:r>
+          </a:p>
+        </p:txBody>
+      </p:sp>
+      <p:sp>
+        <p:nvSpPr>
+          <p:cNvPr id="13" name="TextBox 12"/>
+          <p:cNvSpPr txBox="1"/>
+          <p:nvPr/>
+        </p:nvSpPr>
+        <p:spPr>
+          <a:xfrm>
+            <a:off x="8503920" y="2926080"/>
+            <a:ext cx="2926080" cy="1463040"/>
+          </a:xfrm>
+          <a:prstGeom prst="rect">
+            <a:avLst/>
+          </a:prstGeom>
+          <a:noFill/>
+        </p:spPr>
+        <p:txBody>
+          <a:bodyPr wrap="square" anchor="t" lIns="0" rIns="0" tIns="0" bIns="0"/>
+          <a:lstStyle/>
+          <a:p>
+            <a:pPr algn="l"/>
+            <a:r>
+              <a:rPr sz="2000" b="1" i="0">
+                <a:solidFill>
+                  <a:srgbClr val="FFFFFF"/>
+                </a:solidFill>
+                <a:latin typeface="Cambria"/>
+              </a:rPr>
+              <a:t>Practical Criteria</a:t>
+            </a:r>
+          </a:p>
+        </p:txBody>
+      </p:sp>
+      <p:sp>
+        <p:nvSpPr>
+          <p:cNvPr id="14" name="TextBox 13"/>
+          <p:cNvSpPr txBox="1"/>
+          <p:nvPr/>
+        </p:nvSpPr>
+        <p:spPr>
+          <a:xfrm>
+            <a:off x="548640" y="5669280"/>
+            <a:ext cx="11094415" cy="548640"/>
+          </a:xfrm>
+          <a:prstGeom prst="rect">
+            <a:avLst/>
+          </a:prstGeom>
+          <a:noFill/>
+        </p:spPr>
+        <p:txBody>
+          <a:bodyPr wrap="square" anchor="t" lIns="0" rIns="0" tIns="0" bIns="0"/>
+          <a:lstStyle/>
+          <a:p>
+            <a:pPr algn="l"/>
+            <a:r>
+              <a:rPr sz="1200" b="0" i="0">
+                <a:solidFill>
+                  <a:srgbClr val="A9C8F0"/>
+                </a:solidFill>
+                <a:latin typeface="Calibri"/>
+              </a:rPr>
+              <a:t>https://lana6478.github.io/T-level-Design-Development-Engineering-Manufacturing/#/02-occupational-specialism/02-practical-criteria.md</a:t>
+            </a:r>
+          </a:p>
+        </p:txBody>
+      </p:sp>
+    </p:spTree>
+  </p:cSld>
+  <p:clrMapOvr>
+    <a:masterClrMapping/>
+  </p:clrMapOvr>
+</p:sld>
+</file>
+
 <file path=ppt/slides/slide2.xml><?xml version="1.0" encoding="utf-8"?>
 <p:sld xmlns:a="http://schemas.openxmlformats.org/drawingml/2006/main" xmlns:p="http://schemas.openxmlformats.org/presentationml/2006/main" xmlns:r="http://schemas.openxmlformats.org/officeDocument/2006/relationships">
   <p:cSld>
@@ -4772,22 +7112,93 @@
       </p:sp>
       <p:sp>
         <p:nvSpPr>
-          <p:cNvPr id="6" name="Rounded Rectangle 5"/>
+          <p:cNvPr id="6" name="TextBox 5"/>
+          <p:cNvSpPr txBox="1"/>
+          <p:nvPr/>
+        </p:nvSpPr>
+        <p:spPr>
+          <a:xfrm>
+            <a:off x="548640" y="1554480"/>
+            <a:ext cx="6720840" cy="4617720"/>
+          </a:xfrm>
+          <a:prstGeom prst="rect">
+            <a:avLst/>
+          </a:prstGeom>
+          <a:noFill/>
+        </p:spPr>
+        <p:txBody>
+          <a:bodyPr wrap="square" lIns="0" rIns="0" tIns="0" bIns="0">
+            <a:spAutoFit/>
+          </a:bodyPr>
+          <a:lstStyle/>
+          <a:p>
+            <a:pPr>
+              <a:spcAft>
+                <a:spcPts val="1260"/>
+              </a:spcAft>
+            </a:pPr>
+            <a:r>
+              <a:rPr sz="2100" b="0">
+                <a:solidFill>
+                  <a:srgbClr val="202122"/>
+                </a:solidFill>
+                <a:latin typeface="Calibri"/>
+              </a:rPr>
+              <a:t>Designs develop from sketches into detailed, annotated concepts that show how each requirement is met and why materials were chosen.</a:t>
+            </a:r>
+          </a:p>
+          <a:p>
+            <a:pPr>
+              <a:spcAft>
+                <a:spcPts val="1260"/>
+              </a:spcAft>
+            </a:pPr>
+            <a:r>
+              <a:rPr sz="2100" b="0">
+                <a:solidFill>
+                  <a:srgbClr val="202122"/>
+                </a:solidFill>
+                <a:latin typeface="Calibri"/>
+              </a:rPr>
+              <a:t>Mechanical systems are modelled and their performance calculated: linear systems such as levers and linkages, rotating systems such as gears and flywheels, and lifting machines such as cranes and pulleys, including dynamic effects from acceleration.</a:t>
+            </a:r>
+          </a:p>
+          <a:p>
+            <a:pPr>
+              <a:spcAft>
+                <a:spcPts val="1260"/>
+              </a:spcAft>
+            </a:pPr>
+            <a:r>
+              <a:rPr sz="2100" b="0">
+                <a:solidFill>
+                  <a:srgbClr val="202122"/>
+                </a:solidFill>
+                <a:latin typeface="Calibri"/>
+              </a:rPr>
+              <a:t>CAD produces 2D and 3D drawings, simulations and accurate assemblies. Detailed drawings follow BS and ISO standards for accuracy, tolerances, units, scale and symbols.</a:t>
+            </a:r>
+          </a:p>
+        </p:txBody>
+      </p:sp>
+      <p:sp>
+        <p:nvSpPr>
+          <p:cNvPr id="7" name="Rounded Rectangle 6"/>
           <p:cNvSpPr/>
           <p:nvPr/>
         </p:nvSpPr>
         <p:spPr>
           <a:xfrm>
-            <a:off x="548640" y="1600200"/>
-            <a:ext cx="5410047" cy="2148840"/>
+            <a:off x="7772400" y="1554480"/>
+            <a:ext cx="3867912" cy="4526280"/>
           </a:xfrm>
           <a:prstGeom prst="roundRect">
             <a:avLst>
-              <a:gd name="adj" fmla="val 6000"/>
+              <a:gd name="adj" fmla="val 8000"/>
             </a:avLst>
           </a:prstGeom>
           <a:solidFill>
-            <a:srgbClr val="EAF3FF"/>
+            <a:srgbClr val="03306E"/>
           </a:solidFill>
           <a:ln>
             <a:noFill/>
@@ -4816,14 +7227,14 @@
       </p:sp>
       <p:sp>
         <p:nvSpPr>
-          <p:cNvPr id="7" name="Oval 6"/>
+          <p:cNvPr id="8" name="Oval 7"/>
           <p:cNvSpPr/>
           <p:nvPr/>
         </p:nvSpPr>
         <p:spPr>
           <a:xfrm>
-            <a:off x="777240" y="1828800"/>
-            <a:ext cx="457200" cy="457200"/>
+            <a:off x="8046720" y="1828800"/>
+            <a:ext cx="548640" cy="548640"/>
           </a:xfrm>
           <a:prstGeom prst="ellipse">
             <a:avLst/>
@@ -4856,46 +7267,13 @@
           <a:p>
             <a:pPr algn="ctr"/>
             <a:r>
-              <a:rPr sz="1500" b="1">
+              <a:rPr sz="1300" b="1">
                 <a:solidFill>
                   <a:srgbClr val="FFFFFF"/>
                 </a:solidFill>
                 <a:latin typeface="Calibri"/>
               </a:rPr>
-              <a:t>1</a:t>
-            </a:r>
-          </a:p>
-        </p:txBody>
-      </p:sp>
-      <p:sp>
-        <p:nvSpPr>
-          <p:cNvPr id="8" name="TextBox 7"/>
-          <p:cNvSpPr txBox="1"/>
-          <p:nvPr/>
-        </p:nvSpPr>
-        <p:spPr>
-          <a:xfrm>
-            <a:off x="1371600" y="1801368"/>
-            <a:ext cx="4404207" cy="512064"/>
-          </a:xfrm>
-          <a:prstGeom prst="rect">
-            <a:avLst/>
-          </a:prstGeom>
-          <a:noFill/>
-        </p:spPr>
-        <p:txBody>
-          <a:bodyPr wrap="square" anchor="ctr" lIns="0" rIns="0" tIns="0" bIns="0"/>
-          <a:lstStyle/>
-          <a:p>
-            <a:pPr algn="l"/>
-            <a:r>
-              <a:rPr sz="1900" b="1" i="0">
-                <a:solidFill>
-                  <a:srgbClr val="03306E"/>
-                </a:solidFill>
-                <a:latin typeface="Calibri"/>
-              </a:rPr>
-              <a:t>Concepts</a:t>
+              <a:t>e.g.</a:t>
             </a:r>
           </a:p>
         </p:txBody>
@@ -4908,8 +7286,8 @@
         </p:nvSpPr>
         <p:spPr>
           <a:xfrm>
-            <a:off x="777240" y="2468880"/>
-            <a:ext cx="4952847" cy="1143000"/>
+            <a:off x="8046720" y="2560320"/>
+            <a:ext cx="3291840" cy="365760"/>
           </a:xfrm>
           <a:prstGeom prst="rect">
             <a:avLst/>
@@ -4922,502 +7300,46 @@
           <a:p>
             <a:pPr algn="l"/>
             <a:r>
-              <a:rPr sz="2000" b="0" i="0">
-                <a:solidFill>
-                  <a:srgbClr val="202122"/>
-                </a:solidFill>
-                <a:latin typeface="Calibri"/>
-              </a:rPr>
-              <a:t>Sketch ideas into detailed, annotated concepts.</a:t>
-            </a:r>
-          </a:p>
-        </p:txBody>
-      </p:sp>
-      <p:sp>
-        <p:nvSpPr>
-          <p:cNvPr id="10" name="Rounded Rectangle 9"/>
-          <p:cNvSpPr/>
-          <p:nvPr/>
-        </p:nvSpPr>
-        <p:spPr>
-          <a:xfrm>
-            <a:off x="6233007" y="1600200"/>
-            <a:ext cx="5410047" cy="2148840"/>
-          </a:xfrm>
-          <a:prstGeom prst="roundRect">
-            <a:avLst>
-              <a:gd name="adj" fmla="val 6000"/>
-            </a:avLst>
-          </a:prstGeom>
-          <a:solidFill>
-            <a:srgbClr val="EAF3FF"/>
-          </a:solidFill>
-          <a:ln>
-            <a:noFill/>
-          </a:ln>
-          <a:effectLst/>
-        </p:spPr>
-        <p:style>
-          <a:lnRef idx="1">
-            <a:schemeClr val="accent1"/>
-          </a:lnRef>
-          <a:fillRef idx="3">
-            <a:schemeClr val="accent1"/>
-          </a:fillRef>
-          <a:effectRef idx="2">
-            <a:schemeClr val="accent1"/>
-          </a:effectRef>
-          <a:fontRef idx="minor">
-            <a:schemeClr val="lt1"/>
-          </a:fontRef>
-        </p:style>
-        <p:txBody>
-          <a:bodyPr rtlCol="0" anchor="ctr"/>
-          <a:lstStyle/>
-          <a:p/>
-        </p:txBody>
-      </p:sp>
-      <p:sp>
-        <p:nvSpPr>
-          <p:cNvPr id="11" name="Oval 10"/>
-          <p:cNvSpPr/>
-          <p:nvPr/>
-        </p:nvSpPr>
-        <p:spPr>
-          <a:xfrm>
-            <a:off x="6461607" y="1828800"/>
-            <a:ext cx="457200" cy="457200"/>
-          </a:xfrm>
-          <a:prstGeom prst="ellipse">
-            <a:avLst/>
-          </a:prstGeom>
-          <a:solidFill>
-            <a:srgbClr val="E0463A"/>
-          </a:solidFill>
-          <a:ln>
-            <a:noFill/>
-          </a:ln>
-          <a:effectLst/>
-        </p:spPr>
-        <p:style>
-          <a:lnRef idx="1">
-            <a:schemeClr val="accent1"/>
-          </a:lnRef>
-          <a:fillRef idx="3">
-            <a:schemeClr val="accent1"/>
-          </a:fillRef>
-          <a:effectRef idx="2">
-            <a:schemeClr val="accent1"/>
-          </a:effectRef>
-          <a:fontRef idx="minor">
-            <a:schemeClr val="lt1"/>
-          </a:fontRef>
-        </p:style>
-        <p:txBody>
-          <a:bodyPr rtlCol="0" anchor="ctr" lIns="0" rIns="0" tIns="0" bIns="0"/>
-          <a:lstStyle/>
-          <a:p>
-            <a:pPr algn="ctr"/>
-            <a:r>
-              <a:rPr sz="1500" b="1">
+              <a:rPr sz="1300" b="1" i="0">
+                <a:solidFill>
+                  <a:srgbClr val="A9C8F0"/>
+                </a:solidFill>
+                <a:latin typeface="Calibri"/>
+              </a:rPr>
+              <a:t>EXAMPLE</a:t>
+            </a:r>
+          </a:p>
+        </p:txBody>
+      </p:sp>
+      <p:sp>
+        <p:nvSpPr>
+          <p:cNvPr id="10" name="TextBox 9"/>
+          <p:cNvSpPr txBox="1"/>
+          <p:nvPr/>
+        </p:nvSpPr>
+        <p:spPr>
+          <a:xfrm>
+            <a:off x="8046720" y="2971800"/>
+            <a:ext cx="3291840" cy="2971800"/>
+          </a:xfrm>
+          <a:prstGeom prst="rect">
+            <a:avLst/>
+          </a:prstGeom>
+          <a:noFill/>
+        </p:spPr>
+        <p:txBody>
+          <a:bodyPr wrap="square" anchor="t" lIns="0" rIns="0" tIns="0" bIns="0"/>
+          <a:lstStyle/>
+          <a:p>
+            <a:pPr algn="l"/>
+            <a:r>
+              <a:rPr sz="1900" b="0" i="0">
                 <a:solidFill>
                   <a:srgbClr val="FFFFFF"/>
                 </a:solidFill>
-                <a:latin typeface="Calibri"/>
-              </a:rPr>
-              <a:t>2</a:t>
-            </a:r>
-          </a:p>
-        </p:txBody>
-      </p:sp>
-      <p:sp>
-        <p:nvSpPr>
-          <p:cNvPr id="12" name="TextBox 11"/>
-          <p:cNvSpPr txBox="1"/>
-          <p:nvPr/>
-        </p:nvSpPr>
-        <p:spPr>
-          <a:xfrm>
-            <a:off x="7055967" y="1801368"/>
-            <a:ext cx="4404207" cy="512064"/>
-          </a:xfrm>
-          <a:prstGeom prst="rect">
-            <a:avLst/>
-          </a:prstGeom>
-          <a:noFill/>
-        </p:spPr>
-        <p:txBody>
-          <a:bodyPr wrap="square" anchor="ctr" lIns="0" rIns="0" tIns="0" bIns="0"/>
-          <a:lstStyle/>
-          <a:p>
-            <a:pPr algn="l"/>
-            <a:r>
-              <a:rPr sz="1900" b="1" i="0">
-                <a:solidFill>
-                  <a:srgbClr val="03306E"/>
-                </a:solidFill>
-                <a:latin typeface="Calibri"/>
-              </a:rPr>
-              <a:t>Mechanical modelling</a:t>
-            </a:r>
-          </a:p>
-        </p:txBody>
-      </p:sp>
-      <p:sp>
-        <p:nvSpPr>
-          <p:cNvPr id="13" name="TextBox 12"/>
-          <p:cNvSpPr txBox="1"/>
-          <p:nvPr/>
-        </p:nvSpPr>
-        <p:spPr>
-          <a:xfrm>
-            <a:off x="6461607" y="2468880"/>
-            <a:ext cx="4952847" cy="1143000"/>
-          </a:xfrm>
-          <a:prstGeom prst="rect">
-            <a:avLst/>
-          </a:prstGeom>
-          <a:noFill/>
-        </p:spPr>
-        <p:txBody>
-          <a:bodyPr wrap="square" anchor="t" lIns="0" rIns="0" tIns="0" bIns="0"/>
-          <a:lstStyle/>
-          <a:p>
-            <a:pPr algn="l"/>
-            <a:r>
-              <a:rPr sz="2000" b="0" i="0">
-                <a:solidFill>
-                  <a:srgbClr val="202122"/>
-                </a:solidFill>
-                <a:latin typeface="Calibri"/>
-              </a:rPr>
-              <a:t>Linear systems, rotating systems (gears, flywheels), lifting machines.</a:t>
-            </a:r>
-          </a:p>
-        </p:txBody>
-      </p:sp>
-      <p:sp>
-        <p:nvSpPr>
-          <p:cNvPr id="14" name="Rounded Rectangle 13"/>
-          <p:cNvSpPr/>
-          <p:nvPr/>
-        </p:nvSpPr>
-        <p:spPr>
-          <a:xfrm>
-            <a:off x="548640" y="4023360"/>
-            <a:ext cx="5410047" cy="2148840"/>
-          </a:xfrm>
-          <a:prstGeom prst="roundRect">
-            <a:avLst>
-              <a:gd name="adj" fmla="val 6000"/>
-            </a:avLst>
-          </a:prstGeom>
-          <a:solidFill>
-            <a:srgbClr val="EAF3FF"/>
-          </a:solidFill>
-          <a:ln>
-            <a:noFill/>
-          </a:ln>
-          <a:effectLst/>
-        </p:spPr>
-        <p:style>
-          <a:lnRef idx="1">
-            <a:schemeClr val="accent1"/>
-          </a:lnRef>
-          <a:fillRef idx="3">
-            <a:schemeClr val="accent1"/>
-          </a:fillRef>
-          <a:effectRef idx="2">
-            <a:schemeClr val="accent1"/>
-          </a:effectRef>
-          <a:fontRef idx="minor">
-            <a:schemeClr val="lt1"/>
-          </a:fontRef>
-        </p:style>
-        <p:txBody>
-          <a:bodyPr rtlCol="0" anchor="ctr"/>
-          <a:lstStyle/>
-          <a:p/>
-        </p:txBody>
-      </p:sp>
-      <p:sp>
-        <p:nvSpPr>
-          <p:cNvPr id="15" name="Oval 14"/>
-          <p:cNvSpPr/>
-          <p:nvPr/>
-        </p:nvSpPr>
-        <p:spPr>
-          <a:xfrm>
-            <a:off x="777240" y="4251960"/>
-            <a:ext cx="457200" cy="457200"/>
-          </a:xfrm>
-          <a:prstGeom prst="ellipse">
-            <a:avLst/>
-          </a:prstGeom>
-          <a:solidFill>
-            <a:srgbClr val="E0463A"/>
-          </a:solidFill>
-          <a:ln>
-            <a:noFill/>
-          </a:ln>
-          <a:effectLst/>
-        </p:spPr>
-        <p:style>
-          <a:lnRef idx="1">
-            <a:schemeClr val="accent1"/>
-          </a:lnRef>
-          <a:fillRef idx="3">
-            <a:schemeClr val="accent1"/>
-          </a:fillRef>
-          <a:effectRef idx="2">
-            <a:schemeClr val="accent1"/>
-          </a:effectRef>
-          <a:fontRef idx="minor">
-            <a:schemeClr val="lt1"/>
-          </a:fontRef>
-        </p:style>
-        <p:txBody>
-          <a:bodyPr rtlCol="0" anchor="ctr" lIns="0" rIns="0" tIns="0" bIns="0"/>
-          <a:lstStyle/>
-          <a:p>
-            <a:pPr algn="ctr"/>
-            <a:r>
-              <a:rPr sz="1500" b="1">
-                <a:solidFill>
-                  <a:srgbClr val="FFFFFF"/>
-                </a:solidFill>
-                <a:latin typeface="Calibri"/>
-              </a:rPr>
-              <a:t>3</a:t>
-            </a:r>
-          </a:p>
-        </p:txBody>
-      </p:sp>
-      <p:sp>
-        <p:nvSpPr>
-          <p:cNvPr id="16" name="TextBox 15"/>
-          <p:cNvSpPr txBox="1"/>
-          <p:nvPr/>
-        </p:nvSpPr>
-        <p:spPr>
-          <a:xfrm>
-            <a:off x="1371600" y="4224528"/>
-            <a:ext cx="4404207" cy="512064"/>
-          </a:xfrm>
-          <a:prstGeom prst="rect">
-            <a:avLst/>
-          </a:prstGeom>
-          <a:noFill/>
-        </p:spPr>
-        <p:txBody>
-          <a:bodyPr wrap="square" anchor="ctr" lIns="0" rIns="0" tIns="0" bIns="0"/>
-          <a:lstStyle/>
-          <a:p>
-            <a:pPr algn="l"/>
-            <a:r>
-              <a:rPr sz="1900" b="1" i="0">
-                <a:solidFill>
-                  <a:srgbClr val="03306E"/>
-                </a:solidFill>
-                <a:latin typeface="Calibri"/>
-              </a:rPr>
-              <a:t>CAD</a:t>
-            </a:r>
-          </a:p>
-        </p:txBody>
-      </p:sp>
-      <p:sp>
-        <p:nvSpPr>
-          <p:cNvPr id="17" name="TextBox 16"/>
-          <p:cNvSpPr txBox="1"/>
-          <p:nvPr/>
-        </p:nvSpPr>
-        <p:spPr>
-          <a:xfrm>
-            <a:off x="777240" y="4892040"/>
-            <a:ext cx="4952847" cy="1143000"/>
-          </a:xfrm>
-          <a:prstGeom prst="rect">
-            <a:avLst/>
-          </a:prstGeom>
-          <a:noFill/>
-        </p:spPr>
-        <p:txBody>
-          <a:bodyPr wrap="square" anchor="t" lIns="0" rIns="0" tIns="0" bIns="0"/>
-          <a:lstStyle/>
-          <a:p>
-            <a:pPr algn="l"/>
-            <a:r>
-              <a:rPr sz="2000" b="0" i="0">
-                <a:solidFill>
-                  <a:srgbClr val="202122"/>
-                </a:solidFill>
-                <a:latin typeface="Calibri"/>
-              </a:rPr>
-              <a:t>2D and 3D drawings, simulations, accurate 3D assemblies.</a:t>
-            </a:r>
-          </a:p>
-        </p:txBody>
-      </p:sp>
-      <p:sp>
-        <p:nvSpPr>
-          <p:cNvPr id="18" name="Rounded Rectangle 17"/>
-          <p:cNvSpPr/>
-          <p:nvPr/>
-        </p:nvSpPr>
-        <p:spPr>
-          <a:xfrm>
-            <a:off x="6233007" y="4023360"/>
-            <a:ext cx="5410047" cy="2148840"/>
-          </a:xfrm>
-          <a:prstGeom prst="roundRect">
-            <a:avLst>
-              <a:gd name="adj" fmla="val 6000"/>
-            </a:avLst>
-          </a:prstGeom>
-          <a:solidFill>
-            <a:srgbClr val="EAF3FF"/>
-          </a:solidFill>
-          <a:ln>
-            <a:noFill/>
-          </a:ln>
-          <a:effectLst/>
-        </p:spPr>
-        <p:style>
-          <a:lnRef idx="1">
-            <a:schemeClr val="accent1"/>
-          </a:lnRef>
-          <a:fillRef idx="3">
-            <a:schemeClr val="accent1"/>
-          </a:fillRef>
-          <a:effectRef idx="2">
-            <a:schemeClr val="accent1"/>
-          </a:effectRef>
-          <a:fontRef idx="minor">
-            <a:schemeClr val="lt1"/>
-          </a:fontRef>
-        </p:style>
-        <p:txBody>
-          <a:bodyPr rtlCol="0" anchor="ctr"/>
-          <a:lstStyle/>
-          <a:p/>
-        </p:txBody>
-      </p:sp>
-      <p:sp>
-        <p:nvSpPr>
-          <p:cNvPr id="19" name="Oval 18"/>
-          <p:cNvSpPr/>
-          <p:nvPr/>
-        </p:nvSpPr>
-        <p:spPr>
-          <a:xfrm>
-            <a:off x="6461607" y="4251960"/>
-            <a:ext cx="457200" cy="457200"/>
-          </a:xfrm>
-          <a:prstGeom prst="ellipse">
-            <a:avLst/>
-          </a:prstGeom>
-          <a:solidFill>
-            <a:srgbClr val="E0463A"/>
-          </a:solidFill>
-          <a:ln>
-            <a:noFill/>
-          </a:ln>
-          <a:effectLst/>
-        </p:spPr>
-        <p:style>
-          <a:lnRef idx="1">
-            <a:schemeClr val="accent1"/>
-          </a:lnRef>
-          <a:fillRef idx="3">
-            <a:schemeClr val="accent1"/>
-          </a:fillRef>
-          <a:effectRef idx="2">
-            <a:schemeClr val="accent1"/>
-          </a:effectRef>
-          <a:fontRef idx="minor">
-            <a:schemeClr val="lt1"/>
-          </a:fontRef>
-        </p:style>
-        <p:txBody>
-          <a:bodyPr rtlCol="0" anchor="ctr" lIns="0" rIns="0" tIns="0" bIns="0"/>
-          <a:lstStyle/>
-          <a:p>
-            <a:pPr algn="ctr"/>
-            <a:r>
-              <a:rPr sz="1500" b="1">
-                <a:solidFill>
-                  <a:srgbClr val="FFFFFF"/>
-                </a:solidFill>
-                <a:latin typeface="Calibri"/>
-              </a:rPr>
-              <a:t>4</a:t>
-            </a:r>
-          </a:p>
-        </p:txBody>
-      </p:sp>
-      <p:sp>
-        <p:nvSpPr>
-          <p:cNvPr id="20" name="TextBox 19"/>
-          <p:cNvSpPr txBox="1"/>
-          <p:nvPr/>
-        </p:nvSpPr>
-        <p:spPr>
-          <a:xfrm>
-            <a:off x="7055967" y="4224528"/>
-            <a:ext cx="4404207" cy="512064"/>
-          </a:xfrm>
-          <a:prstGeom prst="rect">
-            <a:avLst/>
-          </a:prstGeom>
-          <a:noFill/>
-        </p:spPr>
-        <p:txBody>
-          <a:bodyPr wrap="square" anchor="ctr" lIns="0" rIns="0" tIns="0" bIns="0"/>
-          <a:lstStyle/>
-          <a:p>
-            <a:pPr algn="l"/>
-            <a:r>
-              <a:rPr sz="1900" b="1" i="0">
-                <a:solidFill>
-                  <a:srgbClr val="03306E"/>
-                </a:solidFill>
-                <a:latin typeface="Calibri"/>
-              </a:rPr>
-              <a:t>Detailed drawings</a:t>
-            </a:r>
-          </a:p>
-        </p:txBody>
-      </p:sp>
-      <p:sp>
-        <p:nvSpPr>
-          <p:cNvPr id="21" name="TextBox 20"/>
-          <p:cNvSpPr txBox="1"/>
-          <p:nvPr/>
-        </p:nvSpPr>
-        <p:spPr>
-          <a:xfrm>
-            <a:off x="6461607" y="4892040"/>
-            <a:ext cx="4952847" cy="1143000"/>
-          </a:xfrm>
-          <a:prstGeom prst="rect">
-            <a:avLst/>
-          </a:prstGeom>
-          <a:noFill/>
-        </p:spPr>
-        <p:txBody>
-          <a:bodyPr wrap="square" anchor="t" lIns="0" rIns="0" tIns="0" bIns="0"/>
-          <a:lstStyle/>
-          <a:p>
-            <a:pPr algn="l"/>
-            <a:r>
-              <a:rPr sz="2000" b="0" i="0">
-                <a:solidFill>
-                  <a:srgbClr val="202122"/>
-                </a:solidFill>
-                <a:latin typeface="Calibri"/>
-              </a:rPr>
-              <a:t>Accuracy, tolerances, units, scale and symbols to BS and ISO.</a:t>
+                <a:latin typeface="Cambria"/>
+              </a:rPr>
+              <a:t>A crane design is sketched, its lifting performance calculated, modelled in 3D CAD with a clash check, and detailed for manufacture.</a:t>
             </a:r>
           </a:p>
         </p:txBody>
@@ -5509,7 +7431,7 @@
                 </a:solidFill>
                 <a:latin typeface="Cambria"/>
               </a:rPr>
-              <a:t>Models and prototypes</a:t>
+              <a:t>From ideas to designs</a:t>
             </a:r>
           </a:p>
         </p:txBody>
@@ -5576,6 +7498,1265 @@
                 <a:latin typeface="Calibri"/>
               </a:rPr>
               <a:t>4</a:t>
+            </a:r>
+          </a:p>
+        </p:txBody>
+      </p:sp>
+      <p:sp>
+        <p:nvSpPr>
+          <p:cNvPr id="6" name="Rounded Rectangle 5"/>
+          <p:cNvSpPr/>
+          <p:nvPr/>
+        </p:nvSpPr>
+        <p:spPr>
+          <a:xfrm>
+            <a:off x="548640" y="1600200"/>
+            <a:ext cx="5410047" cy="2148840"/>
+          </a:xfrm>
+          <a:prstGeom prst="roundRect">
+            <a:avLst>
+              <a:gd name="adj" fmla="val 6000"/>
+            </a:avLst>
+          </a:prstGeom>
+          <a:solidFill>
+            <a:srgbClr val="EAF3FF"/>
+          </a:solidFill>
+          <a:ln>
+            <a:noFill/>
+          </a:ln>
+          <a:effectLst/>
+        </p:spPr>
+        <p:style>
+          <a:lnRef idx="1">
+            <a:schemeClr val="accent1"/>
+          </a:lnRef>
+          <a:fillRef idx="3">
+            <a:schemeClr val="accent1"/>
+          </a:fillRef>
+          <a:effectRef idx="2">
+            <a:schemeClr val="accent1"/>
+          </a:effectRef>
+          <a:fontRef idx="minor">
+            <a:schemeClr val="lt1"/>
+          </a:fontRef>
+        </p:style>
+        <p:txBody>
+          <a:bodyPr rtlCol="0" anchor="ctr"/>
+          <a:lstStyle/>
+          <a:p/>
+        </p:txBody>
+      </p:sp>
+      <p:sp>
+        <p:nvSpPr>
+          <p:cNvPr id="7" name="Oval 6"/>
+          <p:cNvSpPr/>
+          <p:nvPr/>
+        </p:nvSpPr>
+        <p:spPr>
+          <a:xfrm>
+            <a:off x="777240" y="1828800"/>
+            <a:ext cx="457200" cy="457200"/>
+          </a:xfrm>
+          <a:prstGeom prst="ellipse">
+            <a:avLst/>
+          </a:prstGeom>
+          <a:solidFill>
+            <a:srgbClr val="E0463A"/>
+          </a:solidFill>
+          <a:ln>
+            <a:noFill/>
+          </a:ln>
+          <a:effectLst/>
+        </p:spPr>
+        <p:style>
+          <a:lnRef idx="1">
+            <a:schemeClr val="accent1"/>
+          </a:lnRef>
+          <a:fillRef idx="3">
+            <a:schemeClr val="accent1"/>
+          </a:fillRef>
+          <a:effectRef idx="2">
+            <a:schemeClr val="accent1"/>
+          </a:effectRef>
+          <a:fontRef idx="minor">
+            <a:schemeClr val="lt1"/>
+          </a:fontRef>
+        </p:style>
+        <p:txBody>
+          <a:bodyPr rtlCol="0" anchor="ctr" lIns="0" rIns="0" tIns="0" bIns="0"/>
+          <a:lstStyle/>
+          <a:p>
+            <a:pPr algn="ctr"/>
+            <a:r>
+              <a:rPr sz="1500" b="1">
+                <a:solidFill>
+                  <a:srgbClr val="FFFFFF"/>
+                </a:solidFill>
+                <a:latin typeface="Calibri"/>
+              </a:rPr>
+              <a:t>1</a:t>
+            </a:r>
+          </a:p>
+        </p:txBody>
+      </p:sp>
+      <p:sp>
+        <p:nvSpPr>
+          <p:cNvPr id="8" name="TextBox 7"/>
+          <p:cNvSpPr txBox="1"/>
+          <p:nvPr/>
+        </p:nvSpPr>
+        <p:spPr>
+          <a:xfrm>
+            <a:off x="1371600" y="1801368"/>
+            <a:ext cx="4404207" cy="512064"/>
+          </a:xfrm>
+          <a:prstGeom prst="rect">
+            <a:avLst/>
+          </a:prstGeom>
+          <a:noFill/>
+        </p:spPr>
+        <p:txBody>
+          <a:bodyPr wrap="square" anchor="ctr" lIns="0" rIns="0" tIns="0" bIns="0"/>
+          <a:lstStyle/>
+          <a:p>
+            <a:pPr algn="l"/>
+            <a:r>
+              <a:rPr sz="1900" b="1" i="0">
+                <a:solidFill>
+                  <a:srgbClr val="03306E"/>
+                </a:solidFill>
+                <a:latin typeface="Calibri"/>
+              </a:rPr>
+              <a:t>Concepts</a:t>
+            </a:r>
+          </a:p>
+        </p:txBody>
+      </p:sp>
+      <p:sp>
+        <p:nvSpPr>
+          <p:cNvPr id="9" name="TextBox 8"/>
+          <p:cNvSpPr txBox="1"/>
+          <p:nvPr/>
+        </p:nvSpPr>
+        <p:spPr>
+          <a:xfrm>
+            <a:off x="777240" y="2468880"/>
+            <a:ext cx="4952847" cy="1143000"/>
+          </a:xfrm>
+          <a:prstGeom prst="rect">
+            <a:avLst/>
+          </a:prstGeom>
+          <a:noFill/>
+        </p:spPr>
+        <p:txBody>
+          <a:bodyPr wrap="square" anchor="t" lIns="0" rIns="0" tIns="0" bIns="0"/>
+          <a:lstStyle/>
+          <a:p>
+            <a:pPr algn="l"/>
+            <a:r>
+              <a:rPr sz="2000" b="0" i="0">
+                <a:solidFill>
+                  <a:srgbClr val="202122"/>
+                </a:solidFill>
+                <a:latin typeface="Calibri"/>
+              </a:rPr>
+              <a:t>Sketch ideas into detailed, annotated concepts.</a:t>
+            </a:r>
+          </a:p>
+        </p:txBody>
+      </p:sp>
+      <p:sp>
+        <p:nvSpPr>
+          <p:cNvPr id="10" name="Rounded Rectangle 9"/>
+          <p:cNvSpPr/>
+          <p:nvPr/>
+        </p:nvSpPr>
+        <p:spPr>
+          <a:xfrm>
+            <a:off x="6233007" y="1600200"/>
+            <a:ext cx="5410047" cy="2148840"/>
+          </a:xfrm>
+          <a:prstGeom prst="roundRect">
+            <a:avLst>
+              <a:gd name="adj" fmla="val 6000"/>
+            </a:avLst>
+          </a:prstGeom>
+          <a:solidFill>
+            <a:srgbClr val="EAF3FF"/>
+          </a:solidFill>
+          <a:ln>
+            <a:noFill/>
+          </a:ln>
+          <a:effectLst/>
+        </p:spPr>
+        <p:style>
+          <a:lnRef idx="1">
+            <a:schemeClr val="accent1"/>
+          </a:lnRef>
+          <a:fillRef idx="3">
+            <a:schemeClr val="accent1"/>
+          </a:fillRef>
+          <a:effectRef idx="2">
+            <a:schemeClr val="accent1"/>
+          </a:effectRef>
+          <a:fontRef idx="minor">
+            <a:schemeClr val="lt1"/>
+          </a:fontRef>
+        </p:style>
+        <p:txBody>
+          <a:bodyPr rtlCol="0" anchor="ctr"/>
+          <a:lstStyle/>
+          <a:p/>
+        </p:txBody>
+      </p:sp>
+      <p:sp>
+        <p:nvSpPr>
+          <p:cNvPr id="11" name="Oval 10"/>
+          <p:cNvSpPr/>
+          <p:nvPr/>
+        </p:nvSpPr>
+        <p:spPr>
+          <a:xfrm>
+            <a:off x="6461607" y="1828800"/>
+            <a:ext cx="457200" cy="457200"/>
+          </a:xfrm>
+          <a:prstGeom prst="ellipse">
+            <a:avLst/>
+          </a:prstGeom>
+          <a:solidFill>
+            <a:srgbClr val="E0463A"/>
+          </a:solidFill>
+          <a:ln>
+            <a:noFill/>
+          </a:ln>
+          <a:effectLst/>
+        </p:spPr>
+        <p:style>
+          <a:lnRef idx="1">
+            <a:schemeClr val="accent1"/>
+          </a:lnRef>
+          <a:fillRef idx="3">
+            <a:schemeClr val="accent1"/>
+          </a:fillRef>
+          <a:effectRef idx="2">
+            <a:schemeClr val="accent1"/>
+          </a:effectRef>
+          <a:fontRef idx="minor">
+            <a:schemeClr val="lt1"/>
+          </a:fontRef>
+        </p:style>
+        <p:txBody>
+          <a:bodyPr rtlCol="0" anchor="ctr" lIns="0" rIns="0" tIns="0" bIns="0"/>
+          <a:lstStyle/>
+          <a:p>
+            <a:pPr algn="ctr"/>
+            <a:r>
+              <a:rPr sz="1500" b="1">
+                <a:solidFill>
+                  <a:srgbClr val="FFFFFF"/>
+                </a:solidFill>
+                <a:latin typeface="Calibri"/>
+              </a:rPr>
+              <a:t>2</a:t>
+            </a:r>
+          </a:p>
+        </p:txBody>
+      </p:sp>
+      <p:sp>
+        <p:nvSpPr>
+          <p:cNvPr id="12" name="TextBox 11"/>
+          <p:cNvSpPr txBox="1"/>
+          <p:nvPr/>
+        </p:nvSpPr>
+        <p:spPr>
+          <a:xfrm>
+            <a:off x="7055967" y="1801368"/>
+            <a:ext cx="4404207" cy="512064"/>
+          </a:xfrm>
+          <a:prstGeom prst="rect">
+            <a:avLst/>
+          </a:prstGeom>
+          <a:noFill/>
+        </p:spPr>
+        <p:txBody>
+          <a:bodyPr wrap="square" anchor="ctr" lIns="0" rIns="0" tIns="0" bIns="0"/>
+          <a:lstStyle/>
+          <a:p>
+            <a:pPr algn="l"/>
+            <a:r>
+              <a:rPr sz="1900" b="1" i="0">
+                <a:solidFill>
+                  <a:srgbClr val="03306E"/>
+                </a:solidFill>
+                <a:latin typeface="Calibri"/>
+              </a:rPr>
+              <a:t>Mechanical modelling</a:t>
+            </a:r>
+          </a:p>
+        </p:txBody>
+      </p:sp>
+      <p:sp>
+        <p:nvSpPr>
+          <p:cNvPr id="13" name="TextBox 12"/>
+          <p:cNvSpPr txBox="1"/>
+          <p:nvPr/>
+        </p:nvSpPr>
+        <p:spPr>
+          <a:xfrm>
+            <a:off x="6461607" y="2468880"/>
+            <a:ext cx="4952847" cy="1143000"/>
+          </a:xfrm>
+          <a:prstGeom prst="rect">
+            <a:avLst/>
+          </a:prstGeom>
+          <a:noFill/>
+        </p:spPr>
+        <p:txBody>
+          <a:bodyPr wrap="square" anchor="t" lIns="0" rIns="0" tIns="0" bIns="0"/>
+          <a:lstStyle/>
+          <a:p>
+            <a:pPr algn="l"/>
+            <a:r>
+              <a:rPr sz="2000" b="0" i="0">
+                <a:solidFill>
+                  <a:srgbClr val="202122"/>
+                </a:solidFill>
+                <a:latin typeface="Calibri"/>
+              </a:rPr>
+              <a:t>Linear systems, rotating systems (gears, flywheels), lifting machines.</a:t>
+            </a:r>
+          </a:p>
+        </p:txBody>
+      </p:sp>
+      <p:sp>
+        <p:nvSpPr>
+          <p:cNvPr id="14" name="Rounded Rectangle 13"/>
+          <p:cNvSpPr/>
+          <p:nvPr/>
+        </p:nvSpPr>
+        <p:spPr>
+          <a:xfrm>
+            <a:off x="548640" y="4023360"/>
+            <a:ext cx="5410047" cy="2148840"/>
+          </a:xfrm>
+          <a:prstGeom prst="roundRect">
+            <a:avLst>
+              <a:gd name="adj" fmla="val 6000"/>
+            </a:avLst>
+          </a:prstGeom>
+          <a:solidFill>
+            <a:srgbClr val="EAF3FF"/>
+          </a:solidFill>
+          <a:ln>
+            <a:noFill/>
+          </a:ln>
+          <a:effectLst/>
+        </p:spPr>
+        <p:style>
+          <a:lnRef idx="1">
+            <a:schemeClr val="accent1"/>
+          </a:lnRef>
+          <a:fillRef idx="3">
+            <a:schemeClr val="accent1"/>
+          </a:fillRef>
+          <a:effectRef idx="2">
+            <a:schemeClr val="accent1"/>
+          </a:effectRef>
+          <a:fontRef idx="minor">
+            <a:schemeClr val="lt1"/>
+          </a:fontRef>
+        </p:style>
+        <p:txBody>
+          <a:bodyPr rtlCol="0" anchor="ctr"/>
+          <a:lstStyle/>
+          <a:p/>
+        </p:txBody>
+      </p:sp>
+      <p:sp>
+        <p:nvSpPr>
+          <p:cNvPr id="15" name="Oval 14"/>
+          <p:cNvSpPr/>
+          <p:nvPr/>
+        </p:nvSpPr>
+        <p:spPr>
+          <a:xfrm>
+            <a:off x="777240" y="4251960"/>
+            <a:ext cx="457200" cy="457200"/>
+          </a:xfrm>
+          <a:prstGeom prst="ellipse">
+            <a:avLst/>
+          </a:prstGeom>
+          <a:solidFill>
+            <a:srgbClr val="E0463A"/>
+          </a:solidFill>
+          <a:ln>
+            <a:noFill/>
+          </a:ln>
+          <a:effectLst/>
+        </p:spPr>
+        <p:style>
+          <a:lnRef idx="1">
+            <a:schemeClr val="accent1"/>
+          </a:lnRef>
+          <a:fillRef idx="3">
+            <a:schemeClr val="accent1"/>
+          </a:fillRef>
+          <a:effectRef idx="2">
+            <a:schemeClr val="accent1"/>
+          </a:effectRef>
+          <a:fontRef idx="minor">
+            <a:schemeClr val="lt1"/>
+          </a:fontRef>
+        </p:style>
+        <p:txBody>
+          <a:bodyPr rtlCol="0" anchor="ctr" lIns="0" rIns="0" tIns="0" bIns="0"/>
+          <a:lstStyle/>
+          <a:p>
+            <a:pPr algn="ctr"/>
+            <a:r>
+              <a:rPr sz="1500" b="1">
+                <a:solidFill>
+                  <a:srgbClr val="FFFFFF"/>
+                </a:solidFill>
+                <a:latin typeface="Calibri"/>
+              </a:rPr>
+              <a:t>3</a:t>
+            </a:r>
+          </a:p>
+        </p:txBody>
+      </p:sp>
+      <p:sp>
+        <p:nvSpPr>
+          <p:cNvPr id="16" name="TextBox 15"/>
+          <p:cNvSpPr txBox="1"/>
+          <p:nvPr/>
+        </p:nvSpPr>
+        <p:spPr>
+          <a:xfrm>
+            <a:off x="1371600" y="4224528"/>
+            <a:ext cx="4404207" cy="512064"/>
+          </a:xfrm>
+          <a:prstGeom prst="rect">
+            <a:avLst/>
+          </a:prstGeom>
+          <a:noFill/>
+        </p:spPr>
+        <p:txBody>
+          <a:bodyPr wrap="square" anchor="ctr" lIns="0" rIns="0" tIns="0" bIns="0"/>
+          <a:lstStyle/>
+          <a:p>
+            <a:pPr algn="l"/>
+            <a:r>
+              <a:rPr sz="1900" b="1" i="0">
+                <a:solidFill>
+                  <a:srgbClr val="03306E"/>
+                </a:solidFill>
+                <a:latin typeface="Calibri"/>
+              </a:rPr>
+              <a:t>CAD</a:t>
+            </a:r>
+          </a:p>
+        </p:txBody>
+      </p:sp>
+      <p:sp>
+        <p:nvSpPr>
+          <p:cNvPr id="17" name="TextBox 16"/>
+          <p:cNvSpPr txBox="1"/>
+          <p:nvPr/>
+        </p:nvSpPr>
+        <p:spPr>
+          <a:xfrm>
+            <a:off x="777240" y="4892040"/>
+            <a:ext cx="4952847" cy="1143000"/>
+          </a:xfrm>
+          <a:prstGeom prst="rect">
+            <a:avLst/>
+          </a:prstGeom>
+          <a:noFill/>
+        </p:spPr>
+        <p:txBody>
+          <a:bodyPr wrap="square" anchor="t" lIns="0" rIns="0" tIns="0" bIns="0"/>
+          <a:lstStyle/>
+          <a:p>
+            <a:pPr algn="l"/>
+            <a:r>
+              <a:rPr sz="2000" b="0" i="0">
+                <a:solidFill>
+                  <a:srgbClr val="202122"/>
+                </a:solidFill>
+                <a:latin typeface="Calibri"/>
+              </a:rPr>
+              <a:t>2D and 3D drawings, simulations, accurate 3D assemblies.</a:t>
+            </a:r>
+          </a:p>
+        </p:txBody>
+      </p:sp>
+      <p:sp>
+        <p:nvSpPr>
+          <p:cNvPr id="18" name="Rounded Rectangle 17"/>
+          <p:cNvSpPr/>
+          <p:nvPr/>
+        </p:nvSpPr>
+        <p:spPr>
+          <a:xfrm>
+            <a:off x="6233007" y="4023360"/>
+            <a:ext cx="5410047" cy="2148840"/>
+          </a:xfrm>
+          <a:prstGeom prst="roundRect">
+            <a:avLst>
+              <a:gd name="adj" fmla="val 6000"/>
+            </a:avLst>
+          </a:prstGeom>
+          <a:solidFill>
+            <a:srgbClr val="EAF3FF"/>
+          </a:solidFill>
+          <a:ln>
+            <a:noFill/>
+          </a:ln>
+          <a:effectLst/>
+        </p:spPr>
+        <p:style>
+          <a:lnRef idx="1">
+            <a:schemeClr val="accent1"/>
+          </a:lnRef>
+          <a:fillRef idx="3">
+            <a:schemeClr val="accent1"/>
+          </a:fillRef>
+          <a:effectRef idx="2">
+            <a:schemeClr val="accent1"/>
+          </a:effectRef>
+          <a:fontRef idx="minor">
+            <a:schemeClr val="lt1"/>
+          </a:fontRef>
+        </p:style>
+        <p:txBody>
+          <a:bodyPr rtlCol="0" anchor="ctr"/>
+          <a:lstStyle/>
+          <a:p/>
+        </p:txBody>
+      </p:sp>
+      <p:sp>
+        <p:nvSpPr>
+          <p:cNvPr id="19" name="Oval 18"/>
+          <p:cNvSpPr/>
+          <p:nvPr/>
+        </p:nvSpPr>
+        <p:spPr>
+          <a:xfrm>
+            <a:off x="6461607" y="4251960"/>
+            <a:ext cx="457200" cy="457200"/>
+          </a:xfrm>
+          <a:prstGeom prst="ellipse">
+            <a:avLst/>
+          </a:prstGeom>
+          <a:solidFill>
+            <a:srgbClr val="E0463A"/>
+          </a:solidFill>
+          <a:ln>
+            <a:noFill/>
+          </a:ln>
+          <a:effectLst/>
+        </p:spPr>
+        <p:style>
+          <a:lnRef idx="1">
+            <a:schemeClr val="accent1"/>
+          </a:lnRef>
+          <a:fillRef idx="3">
+            <a:schemeClr val="accent1"/>
+          </a:fillRef>
+          <a:effectRef idx="2">
+            <a:schemeClr val="accent1"/>
+          </a:effectRef>
+          <a:fontRef idx="minor">
+            <a:schemeClr val="lt1"/>
+          </a:fontRef>
+        </p:style>
+        <p:txBody>
+          <a:bodyPr rtlCol="0" anchor="ctr" lIns="0" rIns="0" tIns="0" bIns="0"/>
+          <a:lstStyle/>
+          <a:p>
+            <a:pPr algn="ctr"/>
+            <a:r>
+              <a:rPr sz="1500" b="1">
+                <a:solidFill>
+                  <a:srgbClr val="FFFFFF"/>
+                </a:solidFill>
+                <a:latin typeface="Calibri"/>
+              </a:rPr>
+              <a:t>4</a:t>
+            </a:r>
+          </a:p>
+        </p:txBody>
+      </p:sp>
+      <p:sp>
+        <p:nvSpPr>
+          <p:cNvPr id="20" name="TextBox 19"/>
+          <p:cNvSpPr txBox="1"/>
+          <p:nvPr/>
+        </p:nvSpPr>
+        <p:spPr>
+          <a:xfrm>
+            <a:off x="7055967" y="4224528"/>
+            <a:ext cx="4404207" cy="512064"/>
+          </a:xfrm>
+          <a:prstGeom prst="rect">
+            <a:avLst/>
+          </a:prstGeom>
+          <a:noFill/>
+        </p:spPr>
+        <p:txBody>
+          <a:bodyPr wrap="square" anchor="ctr" lIns="0" rIns="0" tIns="0" bIns="0"/>
+          <a:lstStyle/>
+          <a:p>
+            <a:pPr algn="l"/>
+            <a:r>
+              <a:rPr sz="1900" b="1" i="0">
+                <a:solidFill>
+                  <a:srgbClr val="03306E"/>
+                </a:solidFill>
+                <a:latin typeface="Calibri"/>
+              </a:rPr>
+              <a:t>Detailed drawings</a:t>
+            </a:r>
+          </a:p>
+        </p:txBody>
+      </p:sp>
+      <p:sp>
+        <p:nvSpPr>
+          <p:cNvPr id="21" name="TextBox 20"/>
+          <p:cNvSpPr txBox="1"/>
+          <p:nvPr/>
+        </p:nvSpPr>
+        <p:spPr>
+          <a:xfrm>
+            <a:off x="6461607" y="4892040"/>
+            <a:ext cx="4952847" cy="1143000"/>
+          </a:xfrm>
+          <a:prstGeom prst="rect">
+            <a:avLst/>
+          </a:prstGeom>
+          <a:noFill/>
+        </p:spPr>
+        <p:txBody>
+          <a:bodyPr wrap="square" anchor="t" lIns="0" rIns="0" tIns="0" bIns="0"/>
+          <a:lstStyle/>
+          <a:p>
+            <a:pPr algn="l"/>
+            <a:r>
+              <a:rPr sz="2000" b="0" i="0">
+                <a:solidFill>
+                  <a:srgbClr val="202122"/>
+                </a:solidFill>
+                <a:latin typeface="Calibri"/>
+              </a:rPr>
+              <a:t>Accuracy, tolerances, units, scale and symbols to BS and ISO.</a:t>
+            </a:r>
+          </a:p>
+        </p:txBody>
+      </p:sp>
+    </p:spTree>
+  </p:cSld>
+  <p:clrMapOvr>
+    <a:masterClrMapping/>
+  </p:clrMapOvr>
+</p:sld>
+</file>
+
+<file path=ppt/slides/slide5.xml><?xml version="1.0" encoding="utf-8"?>
+<p:sld xmlns:a="http://schemas.openxmlformats.org/drawingml/2006/main" xmlns:p="http://schemas.openxmlformats.org/presentationml/2006/main" xmlns:r="http://schemas.openxmlformats.org/officeDocument/2006/relationships">
+  <p:cSld>
+    <p:bg>
+      <p:bgPr>
+        <a:solidFill>
+          <a:srgbClr val="FFFFFF"/>
+        </a:solidFill>
+        <a:effectLst/>
+      </p:bgPr>
+    </p:bg>
+    <p:spTree>
+      <p:nvGrpSpPr>
+        <p:cNvPr id="1" name=""/>
+        <p:cNvGrpSpPr/>
+        <p:nvPr/>
+      </p:nvGrpSpPr>
+      <p:grpSpPr/>
+      <p:sp>
+        <p:nvSpPr>
+          <p:cNvPr id="2" name="TextBox 1"/>
+          <p:cNvSpPr txBox="1"/>
+          <p:nvPr/>
+        </p:nvSpPr>
+        <p:spPr>
+          <a:xfrm>
+            <a:off x="548640" y="320040"/>
+            <a:ext cx="11094415" cy="274320"/>
+          </a:xfrm>
+          <a:prstGeom prst="rect">
+            <a:avLst/>
+          </a:prstGeom>
+          <a:noFill/>
+        </p:spPr>
+        <p:txBody>
+          <a:bodyPr wrap="square" anchor="t" lIns="0" rIns="0" tIns="0" bIns="0"/>
+          <a:lstStyle/>
+          <a:p>
+            <a:pPr algn="l"/>
+            <a:r>
+              <a:rPr sz="1100" b="1" i="0">
+                <a:solidFill>
+                  <a:srgbClr val="54595D"/>
+                </a:solidFill>
+                <a:latin typeface="Calibri"/>
+              </a:rPr>
+              <a:t>MECHANICAL ENGINEERING  ·  Mechanical: Performance Outcome 4</a:t>
+            </a:r>
+          </a:p>
+        </p:txBody>
+      </p:sp>
+      <p:sp>
+        <p:nvSpPr>
+          <p:cNvPr id="3" name="TextBox 2"/>
+          <p:cNvSpPr txBox="1"/>
+          <p:nvPr/>
+        </p:nvSpPr>
+        <p:spPr>
+          <a:xfrm>
+            <a:off x="548640" y="566928"/>
+            <a:ext cx="11094415" cy="822960"/>
+          </a:xfrm>
+          <a:prstGeom prst="rect">
+            <a:avLst/>
+          </a:prstGeom>
+          <a:noFill/>
+        </p:spPr>
+        <p:txBody>
+          <a:bodyPr wrap="square" anchor="ctr" lIns="0" rIns="0" tIns="0" bIns="0"/>
+          <a:lstStyle/>
+          <a:p>
+            <a:pPr algn="l"/>
+            <a:r>
+              <a:rPr sz="3200" b="1" i="0">
+                <a:solidFill>
+                  <a:srgbClr val="03306E"/>
+                </a:solidFill>
+                <a:latin typeface="Cambria"/>
+              </a:rPr>
+              <a:t>Quick check: From ideas to designs</a:t>
+            </a:r>
+          </a:p>
+        </p:txBody>
+      </p:sp>
+      <p:sp>
+        <p:nvSpPr>
+          <p:cNvPr id="4" name="TextBox 3"/>
+          <p:cNvSpPr txBox="1"/>
+          <p:nvPr/>
+        </p:nvSpPr>
+        <p:spPr>
+          <a:xfrm>
+            <a:off x="548640" y="6446520"/>
+            <a:ext cx="8229600" cy="274320"/>
+          </a:xfrm>
+          <a:prstGeom prst="rect">
+            <a:avLst/>
+          </a:prstGeom>
+          <a:noFill/>
+        </p:spPr>
+        <p:txBody>
+          <a:bodyPr wrap="square" anchor="t" lIns="0" rIns="0" tIns="0" bIns="0"/>
+          <a:lstStyle/>
+          <a:p>
+            <a:pPr algn="l"/>
+            <a:r>
+              <a:rPr sz="1000" b="0" i="0">
+                <a:solidFill>
+                  <a:srgbClr val="54595D"/>
+                </a:solidFill>
+                <a:latin typeface="Calibri"/>
+              </a:rPr>
+              <a:t>Design and Development for Engineering and Manufacturing T Level  ·  Designing, Modelling and Prototyping</a:t>
+            </a:r>
+          </a:p>
+        </p:txBody>
+      </p:sp>
+      <p:sp>
+        <p:nvSpPr>
+          <p:cNvPr id="5" name="TextBox 4"/>
+          <p:cNvSpPr txBox="1"/>
+          <p:nvPr/>
+        </p:nvSpPr>
+        <p:spPr>
+          <a:xfrm>
+            <a:off x="10728655" y="6446520"/>
+            <a:ext cx="914400" cy="274320"/>
+          </a:xfrm>
+          <a:prstGeom prst="rect">
+            <a:avLst/>
+          </a:prstGeom>
+          <a:noFill/>
+        </p:spPr>
+        <p:txBody>
+          <a:bodyPr wrap="square" anchor="t" lIns="0" rIns="0" tIns="0" bIns="0"/>
+          <a:lstStyle/>
+          <a:p>
+            <a:pPr algn="r"/>
+            <a:r>
+              <a:rPr sz="1000" b="0" i="0">
+                <a:solidFill>
+                  <a:srgbClr val="54595D"/>
+                </a:solidFill>
+                <a:latin typeface="Calibri"/>
+              </a:rPr>
+              <a:t>5</a:t>
+            </a:r>
+          </a:p>
+        </p:txBody>
+      </p:sp>
+      <p:sp>
+        <p:nvSpPr>
+          <p:cNvPr id="6" name="Oval 5"/>
+          <p:cNvSpPr/>
+          <p:nvPr/>
+        </p:nvSpPr>
+        <p:spPr>
+          <a:xfrm>
+            <a:off x="548640" y="1691640"/>
+            <a:ext cx="502920" cy="502920"/>
+          </a:xfrm>
+          <a:prstGeom prst="ellipse">
+            <a:avLst/>
+          </a:prstGeom>
+          <a:solidFill>
+            <a:srgbClr val="E0463A"/>
+          </a:solidFill>
+          <a:ln>
+            <a:noFill/>
+          </a:ln>
+          <a:effectLst/>
+        </p:spPr>
+        <p:style>
+          <a:lnRef idx="1">
+            <a:schemeClr val="accent1"/>
+          </a:lnRef>
+          <a:fillRef idx="3">
+            <a:schemeClr val="accent1"/>
+          </a:fillRef>
+          <a:effectRef idx="2">
+            <a:schemeClr val="accent1"/>
+          </a:effectRef>
+          <a:fontRef idx="minor">
+            <a:schemeClr val="lt1"/>
+          </a:fontRef>
+        </p:style>
+        <p:txBody>
+          <a:bodyPr rtlCol="0" anchor="ctr" lIns="0" rIns="0" tIns="0" bIns="0"/>
+          <a:lstStyle/>
+          <a:p>
+            <a:pPr algn="ctr"/>
+            <a:r>
+              <a:rPr sz="1600" b="1">
+                <a:solidFill>
+                  <a:srgbClr val="FFFFFF"/>
+                </a:solidFill>
+                <a:latin typeface="Calibri"/>
+              </a:rPr>
+              <a:t>1</a:t>
+            </a:r>
+          </a:p>
+        </p:txBody>
+      </p:sp>
+      <p:sp>
+        <p:nvSpPr>
+          <p:cNvPr id="7" name="TextBox 6"/>
+          <p:cNvSpPr txBox="1"/>
+          <p:nvPr/>
+        </p:nvSpPr>
+        <p:spPr>
+          <a:xfrm>
+            <a:off x="1371600" y="1645920"/>
+            <a:ext cx="10271455" cy="1188720"/>
+          </a:xfrm>
+          <a:prstGeom prst="rect">
+            <a:avLst/>
+          </a:prstGeom>
+          <a:noFill/>
+        </p:spPr>
+        <p:txBody>
+          <a:bodyPr wrap="square" anchor="t" lIns="0" rIns="0" tIns="0" bIns="0"/>
+          <a:lstStyle/>
+          <a:p>
+            <a:pPr algn="l"/>
+            <a:r>
+              <a:rPr sz="2400" b="0" i="0">
+                <a:solidFill>
+                  <a:srgbClr val="202122"/>
+                </a:solidFill>
+                <a:latin typeface="Calibri"/>
+              </a:rPr>
+              <a:t>Why annotate concept sketches?</a:t>
+            </a:r>
+          </a:p>
+        </p:txBody>
+      </p:sp>
+      <p:sp>
+        <p:nvSpPr>
+          <p:cNvPr id="8" name="Oval 7"/>
+          <p:cNvSpPr/>
+          <p:nvPr/>
+        </p:nvSpPr>
+        <p:spPr>
+          <a:xfrm>
+            <a:off x="548640" y="3108960"/>
+            <a:ext cx="502920" cy="502920"/>
+          </a:xfrm>
+          <a:prstGeom prst="ellipse">
+            <a:avLst/>
+          </a:prstGeom>
+          <a:solidFill>
+            <a:srgbClr val="E0463A"/>
+          </a:solidFill>
+          <a:ln>
+            <a:noFill/>
+          </a:ln>
+          <a:effectLst/>
+        </p:spPr>
+        <p:style>
+          <a:lnRef idx="1">
+            <a:schemeClr val="accent1"/>
+          </a:lnRef>
+          <a:fillRef idx="3">
+            <a:schemeClr val="accent1"/>
+          </a:fillRef>
+          <a:effectRef idx="2">
+            <a:schemeClr val="accent1"/>
+          </a:effectRef>
+          <a:fontRef idx="minor">
+            <a:schemeClr val="lt1"/>
+          </a:fontRef>
+        </p:style>
+        <p:txBody>
+          <a:bodyPr rtlCol="0" anchor="ctr" lIns="0" rIns="0" tIns="0" bIns="0"/>
+          <a:lstStyle/>
+          <a:p>
+            <a:pPr algn="ctr"/>
+            <a:r>
+              <a:rPr sz="1600" b="1">
+                <a:solidFill>
+                  <a:srgbClr val="FFFFFF"/>
+                </a:solidFill>
+                <a:latin typeface="Calibri"/>
+              </a:rPr>
+              <a:t>2</a:t>
+            </a:r>
+          </a:p>
+        </p:txBody>
+      </p:sp>
+      <p:sp>
+        <p:nvSpPr>
+          <p:cNvPr id="9" name="TextBox 8"/>
+          <p:cNvSpPr txBox="1"/>
+          <p:nvPr/>
+        </p:nvSpPr>
+        <p:spPr>
+          <a:xfrm>
+            <a:off x="1371600" y="3063240"/>
+            <a:ext cx="10271455" cy="1188720"/>
+          </a:xfrm>
+          <a:prstGeom prst="rect">
+            <a:avLst/>
+          </a:prstGeom>
+          <a:noFill/>
+        </p:spPr>
+        <p:txBody>
+          <a:bodyPr wrap="square" anchor="t" lIns="0" rIns="0" tIns="0" bIns="0"/>
+          <a:lstStyle/>
+          <a:p>
+            <a:pPr algn="l"/>
+            <a:r>
+              <a:rPr sz="2400" b="0" i="0">
+                <a:solidFill>
+                  <a:srgbClr val="202122"/>
+                </a:solidFill>
+                <a:latin typeface="Calibri"/>
+              </a:rPr>
+              <a:t>Give an example of a rotating system.</a:t>
+            </a:r>
+          </a:p>
+        </p:txBody>
+      </p:sp>
+      <p:sp>
+        <p:nvSpPr>
+          <p:cNvPr id="10" name="Oval 9"/>
+          <p:cNvSpPr/>
+          <p:nvPr/>
+        </p:nvSpPr>
+        <p:spPr>
+          <a:xfrm>
+            <a:off x="548640" y="4526280"/>
+            <a:ext cx="502920" cy="502920"/>
+          </a:xfrm>
+          <a:prstGeom prst="ellipse">
+            <a:avLst/>
+          </a:prstGeom>
+          <a:solidFill>
+            <a:srgbClr val="E0463A"/>
+          </a:solidFill>
+          <a:ln>
+            <a:noFill/>
+          </a:ln>
+          <a:effectLst/>
+        </p:spPr>
+        <p:style>
+          <a:lnRef idx="1">
+            <a:schemeClr val="accent1"/>
+          </a:lnRef>
+          <a:fillRef idx="3">
+            <a:schemeClr val="accent1"/>
+          </a:fillRef>
+          <a:effectRef idx="2">
+            <a:schemeClr val="accent1"/>
+          </a:effectRef>
+          <a:fontRef idx="minor">
+            <a:schemeClr val="lt1"/>
+          </a:fontRef>
+        </p:style>
+        <p:txBody>
+          <a:bodyPr rtlCol="0" anchor="ctr" lIns="0" rIns="0" tIns="0" bIns="0"/>
+          <a:lstStyle/>
+          <a:p>
+            <a:pPr algn="ctr"/>
+            <a:r>
+              <a:rPr sz="1600" b="1">
+                <a:solidFill>
+                  <a:srgbClr val="FFFFFF"/>
+                </a:solidFill>
+                <a:latin typeface="Calibri"/>
+              </a:rPr>
+              <a:t>3</a:t>
+            </a:r>
+          </a:p>
+        </p:txBody>
+      </p:sp>
+      <p:sp>
+        <p:nvSpPr>
+          <p:cNvPr id="11" name="TextBox 10"/>
+          <p:cNvSpPr txBox="1"/>
+          <p:nvPr/>
+        </p:nvSpPr>
+        <p:spPr>
+          <a:xfrm>
+            <a:off x="1371600" y="4480560"/>
+            <a:ext cx="10271455" cy="1188720"/>
+          </a:xfrm>
+          <a:prstGeom prst="rect">
+            <a:avLst/>
+          </a:prstGeom>
+          <a:noFill/>
+        </p:spPr>
+        <p:txBody>
+          <a:bodyPr wrap="square" anchor="t" lIns="0" rIns="0" tIns="0" bIns="0"/>
+          <a:lstStyle/>
+          <a:p>
+            <a:pPr algn="l"/>
+            <a:r>
+              <a:rPr sz="2400" b="0" i="0">
+                <a:solidFill>
+                  <a:srgbClr val="202122"/>
+                </a:solidFill>
+                <a:latin typeface="Calibri"/>
+              </a:rPr>
+              <a:t>What standards do detailed drawings follow?</a:t>
+            </a:r>
+          </a:p>
+        </p:txBody>
+      </p:sp>
+      <p:sp>
+        <p:nvSpPr>
+          <p:cNvPr id="12" name="TextBox 11"/>
+          <p:cNvSpPr txBox="1"/>
+          <p:nvPr/>
+        </p:nvSpPr>
+        <p:spPr>
+          <a:xfrm>
+            <a:off x="548640" y="5852160"/>
+            <a:ext cx="11094415" cy="365760"/>
+          </a:xfrm>
+          <a:prstGeom prst="rect">
+            <a:avLst/>
+          </a:prstGeom>
+          <a:noFill/>
+        </p:spPr>
+        <p:txBody>
+          <a:bodyPr wrap="square" anchor="t" lIns="0" rIns="0" tIns="0" bIns="0"/>
+          <a:lstStyle/>
+          <a:p>
+            <a:pPr algn="l"/>
+            <a:r>
+              <a:rPr sz="1300" b="0" i="1">
+                <a:solidFill>
+                  <a:srgbClr val="54595D"/>
+                </a:solidFill>
+                <a:latin typeface="Calibri"/>
+              </a:rPr>
+              <a:t>Answer on mini whiteboards or in your book. Answers are in the speaker notes.</a:t>
+            </a:r>
+          </a:p>
+        </p:txBody>
+      </p:sp>
+    </p:spTree>
+  </p:cSld>
+  <p:clrMapOvr>
+    <a:masterClrMapping/>
+  </p:clrMapOvr>
+</p:sld>
+</file>
+
+<file path=ppt/slides/slide6.xml><?xml version="1.0" encoding="utf-8"?>
+<p:sld xmlns:a="http://schemas.openxmlformats.org/drawingml/2006/main" xmlns:p="http://schemas.openxmlformats.org/presentationml/2006/main" xmlns:r="http://schemas.openxmlformats.org/officeDocument/2006/relationships">
+  <p:cSld>
+    <p:bg>
+      <p:bgPr>
+        <a:solidFill>
+          <a:srgbClr val="FFFFFF"/>
+        </a:solidFill>
+        <a:effectLst/>
+      </p:bgPr>
+    </p:bg>
+    <p:spTree>
+      <p:nvGrpSpPr>
+        <p:cNvPr id="1" name=""/>
+        <p:cNvGrpSpPr/>
+        <p:nvPr/>
+      </p:nvGrpSpPr>
+      <p:grpSpPr/>
+      <p:sp>
+        <p:nvSpPr>
+          <p:cNvPr id="2" name="TextBox 1"/>
+          <p:cNvSpPr txBox="1"/>
+          <p:nvPr/>
+        </p:nvSpPr>
+        <p:spPr>
+          <a:xfrm>
+            <a:off x="548640" y="320040"/>
+            <a:ext cx="11094415" cy="274320"/>
+          </a:xfrm>
+          <a:prstGeom prst="rect">
+            <a:avLst/>
+          </a:prstGeom>
+          <a:noFill/>
+        </p:spPr>
+        <p:txBody>
+          <a:bodyPr wrap="square" anchor="t" lIns="0" rIns="0" tIns="0" bIns="0"/>
+          <a:lstStyle/>
+          <a:p>
+            <a:pPr algn="l"/>
+            <a:r>
+              <a:rPr sz="1100" b="1" i="0">
+                <a:solidFill>
+                  <a:srgbClr val="54595D"/>
+                </a:solidFill>
+                <a:latin typeface="Calibri"/>
+              </a:rPr>
+              <a:t>MECHANICAL ENGINEERING  ·  Mechanical: Performance Outcome 4</a:t>
+            </a:r>
+          </a:p>
+        </p:txBody>
+      </p:sp>
+      <p:sp>
+        <p:nvSpPr>
+          <p:cNvPr id="3" name="TextBox 2"/>
+          <p:cNvSpPr txBox="1"/>
+          <p:nvPr/>
+        </p:nvSpPr>
+        <p:spPr>
+          <a:xfrm>
+            <a:off x="548640" y="566928"/>
+            <a:ext cx="11094415" cy="822960"/>
+          </a:xfrm>
+          <a:prstGeom prst="rect">
+            <a:avLst/>
+          </a:prstGeom>
+          <a:noFill/>
+        </p:spPr>
+        <p:txBody>
+          <a:bodyPr wrap="square" anchor="ctr" lIns="0" rIns="0" tIns="0" bIns="0"/>
+          <a:lstStyle/>
+          <a:p>
+            <a:pPr algn="l"/>
+            <a:r>
+              <a:rPr sz="3200" b="1" i="0">
+                <a:solidFill>
+                  <a:srgbClr val="03306E"/>
+                </a:solidFill>
+                <a:latin typeface="Cambria"/>
+              </a:rPr>
+              <a:t>Models and prototypes</a:t>
+            </a:r>
+          </a:p>
+        </p:txBody>
+      </p:sp>
+      <p:sp>
+        <p:nvSpPr>
+          <p:cNvPr id="4" name="TextBox 3"/>
+          <p:cNvSpPr txBox="1"/>
+          <p:nvPr/>
+        </p:nvSpPr>
+        <p:spPr>
+          <a:xfrm>
+            <a:off x="548640" y="6446520"/>
+            <a:ext cx="8229600" cy="274320"/>
+          </a:xfrm>
+          <a:prstGeom prst="rect">
+            <a:avLst/>
+          </a:prstGeom>
+          <a:noFill/>
+        </p:spPr>
+        <p:txBody>
+          <a:bodyPr wrap="square" anchor="t" lIns="0" rIns="0" tIns="0" bIns="0"/>
+          <a:lstStyle/>
+          <a:p>
+            <a:pPr algn="l"/>
+            <a:r>
+              <a:rPr sz="1000" b="0" i="0">
+                <a:solidFill>
+                  <a:srgbClr val="54595D"/>
+                </a:solidFill>
+                <a:latin typeface="Calibri"/>
+              </a:rPr>
+              <a:t>Design and Development for Engineering and Manufacturing T Level  ·  Designing, Modelling and Prototyping</a:t>
+            </a:r>
+          </a:p>
+        </p:txBody>
+      </p:sp>
+      <p:sp>
+        <p:nvSpPr>
+          <p:cNvPr id="5" name="TextBox 4"/>
+          <p:cNvSpPr txBox="1"/>
+          <p:nvPr/>
+        </p:nvSpPr>
+        <p:spPr>
+          <a:xfrm>
+            <a:off x="10728655" y="6446520"/>
+            <a:ext cx="914400" cy="274320"/>
+          </a:xfrm>
+          <a:prstGeom prst="rect">
+            <a:avLst/>
+          </a:prstGeom>
+          <a:noFill/>
+        </p:spPr>
+        <p:txBody>
+          <a:bodyPr wrap="square" anchor="t" lIns="0" rIns="0" tIns="0" bIns="0"/>
+          <a:lstStyle/>
+          <a:p>
+            <a:pPr algn="r"/>
+            <a:r>
+              <a:rPr sz="1000" b="0" i="0">
+                <a:solidFill>
+                  <a:srgbClr val="54595D"/>
+                </a:solidFill>
+                <a:latin typeface="Calibri"/>
+              </a:rPr>
+              <a:t>6</a:t>
             </a:r>
           </a:p>
         </p:txBody>
@@ -5831,859 +9012,6 @@
 </p:sld>
 </file>
 
-<file path=ppt/slides/slide5.xml><?xml version="1.0" encoding="utf-8"?>
-<p:sld xmlns:a="http://schemas.openxmlformats.org/drawingml/2006/main" xmlns:p="http://schemas.openxmlformats.org/presentationml/2006/main" xmlns:r="http://schemas.openxmlformats.org/officeDocument/2006/relationships">
-  <p:cSld>
-    <p:bg>
-      <p:bgPr>
-        <a:solidFill>
-          <a:srgbClr val="FFFFFF"/>
-        </a:solidFill>
-        <a:effectLst/>
-      </p:bgPr>
-    </p:bg>
-    <p:spTree>
-      <p:nvGrpSpPr>
-        <p:cNvPr id="1" name=""/>
-        <p:cNvGrpSpPr/>
-        <p:nvPr/>
-      </p:nvGrpSpPr>
-      <p:grpSpPr/>
-      <p:sp>
-        <p:nvSpPr>
-          <p:cNvPr id="2" name="TextBox 1"/>
-          <p:cNvSpPr txBox="1"/>
-          <p:nvPr/>
-        </p:nvSpPr>
-        <p:spPr>
-          <a:xfrm>
-            <a:off x="548640" y="320040"/>
-            <a:ext cx="11094415" cy="274320"/>
-          </a:xfrm>
-          <a:prstGeom prst="rect">
-            <a:avLst/>
-          </a:prstGeom>
-          <a:noFill/>
-        </p:spPr>
-        <p:txBody>
-          <a:bodyPr wrap="square" anchor="t" lIns="0" rIns="0" tIns="0" bIns="0"/>
-          <a:lstStyle/>
-          <a:p>
-            <a:pPr algn="l"/>
-            <a:r>
-              <a:rPr sz="1100" b="1" i="0">
-                <a:solidFill>
-                  <a:srgbClr val="54595D"/>
-                </a:solidFill>
-                <a:latin typeface="Calibri"/>
-              </a:rPr>
-              <a:t>MECHANICAL ENGINEERING  ·  Mechanical: Performance Outcome 4</a:t>
-            </a:r>
-          </a:p>
-        </p:txBody>
-      </p:sp>
-      <p:sp>
-        <p:nvSpPr>
-          <p:cNvPr id="3" name="TextBox 2"/>
-          <p:cNvSpPr txBox="1"/>
-          <p:nvPr/>
-        </p:nvSpPr>
-        <p:spPr>
-          <a:xfrm>
-            <a:off x="548640" y="566928"/>
-            <a:ext cx="11094415" cy="822960"/>
-          </a:xfrm>
-          <a:prstGeom prst="rect">
-            <a:avLst/>
-          </a:prstGeom>
-          <a:noFill/>
-        </p:spPr>
-        <p:txBody>
-          <a:bodyPr wrap="square" anchor="ctr" lIns="0" rIns="0" tIns="0" bIns="0"/>
-          <a:lstStyle/>
-          <a:p>
-            <a:pPr algn="l"/>
-            <a:r>
-              <a:rPr sz="3200" b="1" i="0">
-                <a:solidFill>
-                  <a:srgbClr val="03306E"/>
-                </a:solidFill>
-                <a:latin typeface="Cambria"/>
-              </a:rPr>
-              <a:t>Tools, assembly and realisation</a:t>
-            </a:r>
-          </a:p>
-        </p:txBody>
-      </p:sp>
-      <p:sp>
-        <p:nvSpPr>
-          <p:cNvPr id="4" name="TextBox 3"/>
-          <p:cNvSpPr txBox="1"/>
-          <p:nvPr/>
-        </p:nvSpPr>
-        <p:spPr>
-          <a:xfrm>
-            <a:off x="548640" y="6446520"/>
-            <a:ext cx="8229600" cy="274320"/>
-          </a:xfrm>
-          <a:prstGeom prst="rect">
-            <a:avLst/>
-          </a:prstGeom>
-          <a:noFill/>
-        </p:spPr>
-        <p:txBody>
-          <a:bodyPr wrap="square" anchor="t" lIns="0" rIns="0" tIns="0" bIns="0"/>
-          <a:lstStyle/>
-          <a:p>
-            <a:pPr algn="l"/>
-            <a:r>
-              <a:rPr sz="1000" b="0" i="0">
-                <a:solidFill>
-                  <a:srgbClr val="54595D"/>
-                </a:solidFill>
-                <a:latin typeface="Calibri"/>
-              </a:rPr>
-              <a:t>Design and Development for Engineering and Manufacturing T Level  ·  Designing, Modelling and Prototyping</a:t>
-            </a:r>
-          </a:p>
-        </p:txBody>
-      </p:sp>
-      <p:sp>
-        <p:nvSpPr>
-          <p:cNvPr id="5" name="TextBox 4"/>
-          <p:cNvSpPr txBox="1"/>
-          <p:nvPr/>
-        </p:nvSpPr>
-        <p:spPr>
-          <a:xfrm>
-            <a:off x="10728655" y="6446520"/>
-            <a:ext cx="914400" cy="274320"/>
-          </a:xfrm>
-          <a:prstGeom prst="rect">
-            <a:avLst/>
-          </a:prstGeom>
-          <a:noFill/>
-        </p:spPr>
-        <p:txBody>
-          <a:bodyPr wrap="square" anchor="t" lIns="0" rIns="0" tIns="0" bIns="0"/>
-          <a:lstStyle/>
-          <a:p>
-            <a:pPr algn="r"/>
-            <a:r>
-              <a:rPr sz="1000" b="0" i="0">
-                <a:solidFill>
-                  <a:srgbClr val="54595D"/>
-                </a:solidFill>
-                <a:latin typeface="Calibri"/>
-              </a:rPr>
-              <a:t>5</a:t>
-            </a:r>
-          </a:p>
-        </p:txBody>
-      </p:sp>
-      <p:sp>
-        <p:nvSpPr>
-          <p:cNvPr id="6" name="TextBox 5"/>
-          <p:cNvSpPr txBox="1"/>
-          <p:nvPr/>
-        </p:nvSpPr>
-        <p:spPr>
-          <a:xfrm>
-            <a:off x="548640" y="1600200"/>
-            <a:ext cx="6675120" cy="4572000"/>
-          </a:xfrm>
-          <a:prstGeom prst="rect">
-            <a:avLst/>
-          </a:prstGeom>
-          <a:noFill/>
-        </p:spPr>
-        <p:txBody>
-          <a:bodyPr wrap="square" lIns="0" rIns="0" tIns="0" bIns="0">
-            <a:spAutoFit/>
-          </a:bodyPr>
-          <a:lstStyle/>
-          <a:p>
-            <a:pPr marL="274320" indent="-274320">
-              <a:spcAft>
-                <a:spcPts val="1080"/>
-              </a:spcAft>
-              <a:buClr>
-                <a:srgbClr val="0645AD"/>
-              </a:buClr>
-              <a:buFont typeface="Arial"/>
-              <a:buChar char="•"/>
-            </a:pPr>
-            <a:r>
-              <a:rPr sz="2400" b="0">
-                <a:solidFill>
-                  <a:srgbClr val="202122"/>
-                </a:solidFill>
-                <a:latin typeface="Calibri"/>
-              </a:rPr>
-              <a:t>Use hand and power tools safely, with checks before, during and after use.</a:t>
-            </a:r>
-          </a:p>
-          <a:p>
-            <a:pPr marL="274320" indent="-274320">
-              <a:spcAft>
-                <a:spcPts val="1080"/>
-              </a:spcAft>
-              <a:buClr>
-                <a:srgbClr val="0645AD"/>
-              </a:buClr>
-              <a:buFont typeface="Arial"/>
-              <a:buChar char="•"/>
-            </a:pPr>
-            <a:r>
-              <a:rPr sz="2400" b="0">
-                <a:solidFill>
-                  <a:srgbClr val="202122"/>
-                </a:solidFill>
-                <a:latin typeface="Calibri"/>
-              </a:rPr>
-              <a:t>Use at least one welding type and one 3D printing type when prototyping.</a:t>
-            </a:r>
-          </a:p>
-          <a:p>
-            <a:pPr marL="274320" indent="-274320">
-              <a:spcAft>
-                <a:spcPts val="1080"/>
-              </a:spcAft>
-              <a:buClr>
-                <a:srgbClr val="0645AD"/>
-              </a:buClr>
-              <a:buFont typeface="Arial"/>
-              <a:buChar char="•"/>
-            </a:pPr>
-            <a:r>
-              <a:rPr sz="2400" b="1">
-                <a:solidFill>
-                  <a:srgbClr val="202122"/>
-                </a:solidFill>
-                <a:latin typeface="Calibri"/>
-              </a:rPr>
-              <a:t>Assemble and disassemble safely:</a:t>
-            </a:r>
-            <a:r>
-              <a:rPr sz="2400" b="0">
-                <a:solidFill>
-                  <a:srgbClr val="202122"/>
-                </a:solidFill>
-                <a:latin typeface="Calibri"/>
-              </a:rPr>
-              <a:t> sequence, alignment, fixing, tensioning, sealing, testing.</a:t>
-            </a:r>
-          </a:p>
-          <a:p>
-            <a:pPr marL="274320" indent="-274320">
-              <a:spcAft>
-                <a:spcPts val="1080"/>
-              </a:spcAft>
-              <a:buClr>
-                <a:srgbClr val="0645AD"/>
-              </a:buClr>
-              <a:buFont typeface="Arial"/>
-              <a:buChar char="•"/>
-            </a:pPr>
-            <a:r>
-              <a:rPr sz="2400" b="0">
-                <a:solidFill>
-                  <a:srgbClr val="202122"/>
-                </a:solidFill>
-                <a:latin typeface="Calibri"/>
-              </a:rPr>
-              <a:t>Check the design can be manufactured, operated and maintained.</a:t>
-            </a:r>
-          </a:p>
-        </p:txBody>
-      </p:sp>
-      <p:sp>
-        <p:nvSpPr>
-          <p:cNvPr id="7" name="Rounded Rectangle 6"/>
-          <p:cNvSpPr/>
-          <p:nvPr/>
-        </p:nvSpPr>
-        <p:spPr>
-          <a:xfrm>
-            <a:off x="7772400" y="1600200"/>
-            <a:ext cx="3867912" cy="4434840"/>
-          </a:xfrm>
-          <a:prstGeom prst="roundRect">
-            <a:avLst>
-              <a:gd name="adj" fmla="val 8000"/>
-            </a:avLst>
-          </a:prstGeom>
-          <a:solidFill>
-            <a:srgbClr val="03306E"/>
-          </a:solidFill>
-          <a:ln>
-            <a:noFill/>
-          </a:ln>
-          <a:effectLst/>
-        </p:spPr>
-        <p:style>
-          <a:lnRef idx="1">
-            <a:schemeClr val="accent1"/>
-          </a:lnRef>
-          <a:fillRef idx="3">
-            <a:schemeClr val="accent1"/>
-          </a:fillRef>
-          <a:effectRef idx="2">
-            <a:schemeClr val="accent1"/>
-          </a:effectRef>
-          <a:fontRef idx="minor">
-            <a:schemeClr val="lt1"/>
-          </a:fontRef>
-        </p:style>
-        <p:txBody>
-          <a:bodyPr rtlCol="0" anchor="ctr"/>
-          <a:lstStyle/>
-          <a:p/>
-        </p:txBody>
-      </p:sp>
-      <p:sp>
-        <p:nvSpPr>
-          <p:cNvPr id="8" name="Oval 7"/>
-          <p:cNvSpPr/>
-          <p:nvPr/>
-        </p:nvSpPr>
-        <p:spPr>
-          <a:xfrm>
-            <a:off x="8046720" y="1874519"/>
-            <a:ext cx="548640" cy="548640"/>
-          </a:xfrm>
-          <a:prstGeom prst="ellipse">
-            <a:avLst/>
-          </a:prstGeom>
-          <a:solidFill>
-            <a:srgbClr val="E0463A"/>
-          </a:solidFill>
-          <a:ln>
-            <a:noFill/>
-          </a:ln>
-          <a:effectLst/>
-        </p:spPr>
-        <p:style>
-          <a:lnRef idx="1">
-            <a:schemeClr val="accent1"/>
-          </a:lnRef>
-          <a:fillRef idx="3">
-            <a:schemeClr val="accent1"/>
-          </a:fillRef>
-          <a:effectRef idx="2">
-            <a:schemeClr val="accent1"/>
-          </a:effectRef>
-          <a:fontRef idx="minor">
-            <a:schemeClr val="lt1"/>
-          </a:fontRef>
-        </p:style>
-        <p:txBody>
-          <a:bodyPr rtlCol="0" anchor="ctr" lIns="0" rIns="0" tIns="0" bIns="0"/>
-          <a:lstStyle/>
-          <a:p>
-            <a:pPr algn="ctr"/>
-            <a:r>
-              <a:rPr sz="2000" b="1">
-                <a:solidFill>
-                  <a:srgbClr val="FFFFFF"/>
-                </a:solidFill>
-                <a:latin typeface="Calibri"/>
-              </a:rPr>
-              <a:t>!</a:t>
-            </a:r>
-          </a:p>
-        </p:txBody>
-      </p:sp>
-      <p:sp>
-        <p:nvSpPr>
-          <p:cNvPr id="9" name="TextBox 8"/>
-          <p:cNvSpPr txBox="1"/>
-          <p:nvPr/>
-        </p:nvSpPr>
-        <p:spPr>
-          <a:xfrm>
-            <a:off x="8046720" y="2606040"/>
-            <a:ext cx="3291840" cy="365760"/>
-          </a:xfrm>
-          <a:prstGeom prst="rect">
-            <a:avLst/>
-          </a:prstGeom>
-          <a:noFill/>
-        </p:spPr>
-        <p:txBody>
-          <a:bodyPr wrap="square" anchor="t" lIns="0" rIns="0" tIns="0" bIns="0"/>
-          <a:lstStyle/>
-          <a:p>
-            <a:pPr algn="l"/>
-            <a:r>
-              <a:rPr sz="1300" b="1" i="0">
-                <a:solidFill>
-                  <a:srgbClr val="A9C8F0"/>
-                </a:solidFill>
-                <a:latin typeface="Calibri"/>
-              </a:rPr>
-              <a:t>KEY IDEA</a:t>
-            </a:r>
-          </a:p>
-        </p:txBody>
-      </p:sp>
-      <p:sp>
-        <p:nvSpPr>
-          <p:cNvPr id="10" name="TextBox 9"/>
-          <p:cNvSpPr txBox="1"/>
-          <p:nvPr/>
-        </p:nvSpPr>
-        <p:spPr>
-          <a:xfrm>
-            <a:off x="8046720" y="3017520"/>
-            <a:ext cx="3291840" cy="2926080"/>
-          </a:xfrm>
-          <a:prstGeom prst="rect">
-            <a:avLst/>
-          </a:prstGeom>
-          <a:noFill/>
-        </p:spPr>
-        <p:txBody>
-          <a:bodyPr wrap="square" anchor="t" lIns="0" rIns="0" tIns="0" bIns="0"/>
-          <a:lstStyle/>
-          <a:p>
-            <a:pPr algn="l"/>
-            <a:r>
-              <a:rPr sz="2200" b="0" i="0">
-                <a:solidFill>
-                  <a:srgbClr val="FFFFFF"/>
-                </a:solidFill>
-                <a:latin typeface="Cambria"/>
-              </a:rPr>
-              <a:t>A design isn't finished until someone could actually make it and look after it.</a:t>
-            </a:r>
-          </a:p>
-        </p:txBody>
-      </p:sp>
-    </p:spTree>
-  </p:cSld>
-  <p:clrMapOvr>
-    <a:masterClrMapping/>
-  </p:clrMapOvr>
-</p:sld>
-</file>
-
-<file path=ppt/slides/slide6.xml><?xml version="1.0" encoding="utf-8"?>
-<p:sld xmlns:a="http://schemas.openxmlformats.org/drawingml/2006/main" xmlns:p="http://schemas.openxmlformats.org/presentationml/2006/main" xmlns:r="http://schemas.openxmlformats.org/officeDocument/2006/relationships">
-  <p:cSld>
-    <p:bg>
-      <p:bgPr>
-        <a:solidFill>
-          <a:srgbClr val="FFFFFF"/>
-        </a:solidFill>
-        <a:effectLst/>
-      </p:bgPr>
-    </p:bg>
-    <p:spTree>
-      <p:nvGrpSpPr>
-        <p:cNvPr id="1" name=""/>
-        <p:cNvGrpSpPr/>
-        <p:nvPr/>
-      </p:nvGrpSpPr>
-      <p:grpSpPr/>
-      <p:sp>
-        <p:nvSpPr>
-          <p:cNvPr id="2" name="TextBox 1"/>
-          <p:cNvSpPr txBox="1"/>
-          <p:nvPr/>
-        </p:nvSpPr>
-        <p:spPr>
-          <a:xfrm>
-            <a:off x="548640" y="320040"/>
-            <a:ext cx="11094415" cy="274320"/>
-          </a:xfrm>
-          <a:prstGeom prst="rect">
-            <a:avLst/>
-          </a:prstGeom>
-          <a:noFill/>
-        </p:spPr>
-        <p:txBody>
-          <a:bodyPr wrap="square" anchor="t" lIns="0" rIns="0" tIns="0" bIns="0"/>
-          <a:lstStyle/>
-          <a:p>
-            <a:pPr algn="l"/>
-            <a:r>
-              <a:rPr sz="1100" b="1" i="0">
-                <a:solidFill>
-                  <a:srgbClr val="54595D"/>
-                </a:solidFill>
-                <a:latin typeface="Calibri"/>
-              </a:rPr>
-              <a:t>MECHANICAL ENGINEERING  ·  Mechanical: Performance Outcome 4</a:t>
-            </a:r>
-          </a:p>
-        </p:txBody>
-      </p:sp>
-      <p:sp>
-        <p:nvSpPr>
-          <p:cNvPr id="3" name="TextBox 2"/>
-          <p:cNvSpPr txBox="1"/>
-          <p:nvPr/>
-        </p:nvSpPr>
-        <p:spPr>
-          <a:xfrm>
-            <a:off x="548640" y="566928"/>
-            <a:ext cx="11094415" cy="822960"/>
-          </a:xfrm>
-          <a:prstGeom prst="rect">
-            <a:avLst/>
-          </a:prstGeom>
-          <a:noFill/>
-        </p:spPr>
-        <p:txBody>
-          <a:bodyPr wrap="square" anchor="ctr" lIns="0" rIns="0" tIns="0" bIns="0"/>
-          <a:lstStyle/>
-          <a:p>
-            <a:pPr algn="l"/>
-            <a:r>
-              <a:rPr sz="3200" b="1" i="0">
-                <a:solidFill>
-                  <a:srgbClr val="03306E"/>
-                </a:solidFill>
-                <a:latin typeface="Cambria"/>
-              </a:rPr>
-              <a:t>Check your understanding</a:t>
-            </a:r>
-          </a:p>
-        </p:txBody>
-      </p:sp>
-      <p:sp>
-        <p:nvSpPr>
-          <p:cNvPr id="4" name="TextBox 3"/>
-          <p:cNvSpPr txBox="1"/>
-          <p:nvPr/>
-        </p:nvSpPr>
-        <p:spPr>
-          <a:xfrm>
-            <a:off x="548640" y="6446520"/>
-            <a:ext cx="8229600" cy="274320"/>
-          </a:xfrm>
-          <a:prstGeom prst="rect">
-            <a:avLst/>
-          </a:prstGeom>
-          <a:noFill/>
-        </p:spPr>
-        <p:txBody>
-          <a:bodyPr wrap="square" anchor="t" lIns="0" rIns="0" tIns="0" bIns="0"/>
-          <a:lstStyle/>
-          <a:p>
-            <a:pPr algn="l"/>
-            <a:r>
-              <a:rPr sz="1000" b="0" i="0">
-                <a:solidFill>
-                  <a:srgbClr val="54595D"/>
-                </a:solidFill>
-                <a:latin typeface="Calibri"/>
-              </a:rPr>
-              <a:t>Design and Development for Engineering and Manufacturing T Level  ·  Designing, Modelling and Prototyping</a:t>
-            </a:r>
-          </a:p>
-        </p:txBody>
-      </p:sp>
-      <p:sp>
-        <p:nvSpPr>
-          <p:cNvPr id="5" name="TextBox 4"/>
-          <p:cNvSpPr txBox="1"/>
-          <p:nvPr/>
-        </p:nvSpPr>
-        <p:spPr>
-          <a:xfrm>
-            <a:off x="10728655" y="6446520"/>
-            <a:ext cx="914400" cy="274320"/>
-          </a:xfrm>
-          <a:prstGeom prst="rect">
-            <a:avLst/>
-          </a:prstGeom>
-          <a:noFill/>
-        </p:spPr>
-        <p:txBody>
-          <a:bodyPr wrap="square" anchor="t" lIns="0" rIns="0" tIns="0" bIns="0"/>
-          <a:lstStyle/>
-          <a:p>
-            <a:pPr algn="r"/>
-            <a:r>
-              <a:rPr sz="1000" b="0" i="0">
-                <a:solidFill>
-                  <a:srgbClr val="54595D"/>
-                </a:solidFill>
-                <a:latin typeface="Calibri"/>
-              </a:rPr>
-              <a:t>6</a:t>
-            </a:r>
-          </a:p>
-        </p:txBody>
-      </p:sp>
-      <p:sp>
-        <p:nvSpPr>
-          <p:cNvPr id="6" name="Oval 5"/>
-          <p:cNvSpPr/>
-          <p:nvPr/>
-        </p:nvSpPr>
-        <p:spPr>
-          <a:xfrm>
-            <a:off x="548640" y="1618488"/>
-            <a:ext cx="411480" cy="411480"/>
-          </a:xfrm>
-          <a:prstGeom prst="ellipse">
-            <a:avLst/>
-          </a:prstGeom>
-          <a:solidFill>
-            <a:srgbClr val="E0463A"/>
-          </a:solidFill>
-          <a:ln>
-            <a:noFill/>
-          </a:ln>
-          <a:effectLst/>
-        </p:spPr>
-        <p:style>
-          <a:lnRef idx="1">
-            <a:schemeClr val="accent1"/>
-          </a:lnRef>
-          <a:fillRef idx="3">
-            <a:schemeClr val="accent1"/>
-          </a:fillRef>
-          <a:effectRef idx="2">
-            <a:schemeClr val="accent1"/>
-          </a:effectRef>
-          <a:fontRef idx="minor">
-            <a:schemeClr val="lt1"/>
-          </a:fontRef>
-        </p:style>
-        <p:txBody>
-          <a:bodyPr rtlCol="0" anchor="ctr" lIns="0" rIns="0" tIns="0" bIns="0"/>
-          <a:lstStyle/>
-          <a:p>
-            <a:pPr algn="ctr"/>
-            <a:r>
-              <a:rPr sz="1400" b="1">
-                <a:solidFill>
-                  <a:srgbClr val="FFFFFF"/>
-                </a:solidFill>
-                <a:latin typeface="Calibri"/>
-              </a:rPr>
-              <a:t>1</a:t>
-            </a:r>
-          </a:p>
-        </p:txBody>
-      </p:sp>
-      <p:sp>
-        <p:nvSpPr>
-          <p:cNvPr id="7" name="TextBox 6"/>
-          <p:cNvSpPr txBox="1"/>
-          <p:nvPr/>
-        </p:nvSpPr>
-        <p:spPr>
-          <a:xfrm>
-            <a:off x="1234440" y="1600200"/>
-            <a:ext cx="10408615" cy="1429512"/>
-          </a:xfrm>
-          <a:prstGeom prst="rect">
-            <a:avLst/>
-          </a:prstGeom>
-          <a:noFill/>
-        </p:spPr>
-        <p:txBody>
-          <a:bodyPr wrap="square" anchor="t" lIns="0" rIns="0" tIns="0" bIns="0"/>
-          <a:lstStyle/>
-          <a:p>
-            <a:pPr algn="l"/>
-            <a:r>
-              <a:rPr sz="2200" b="0" i="0">
-                <a:solidFill>
-                  <a:srgbClr val="202122"/>
-                </a:solidFill>
-                <a:latin typeface="Calibri"/>
-              </a:rPr>
-              <a:t>What is a block model for?</a:t>
-            </a:r>
-          </a:p>
-        </p:txBody>
-      </p:sp>
-      <p:sp>
-        <p:nvSpPr>
-          <p:cNvPr id="8" name="Oval 7"/>
-          <p:cNvSpPr/>
-          <p:nvPr/>
-        </p:nvSpPr>
-        <p:spPr>
-          <a:xfrm>
-            <a:off x="548640" y="3212592"/>
-            <a:ext cx="411480" cy="411480"/>
-          </a:xfrm>
-          <a:prstGeom prst="ellipse">
-            <a:avLst/>
-          </a:prstGeom>
-          <a:solidFill>
-            <a:srgbClr val="E0463A"/>
-          </a:solidFill>
-          <a:ln>
-            <a:noFill/>
-          </a:ln>
-          <a:effectLst/>
-        </p:spPr>
-        <p:style>
-          <a:lnRef idx="1">
-            <a:schemeClr val="accent1"/>
-          </a:lnRef>
-          <a:fillRef idx="3">
-            <a:schemeClr val="accent1"/>
-          </a:fillRef>
-          <a:effectRef idx="2">
-            <a:schemeClr val="accent1"/>
-          </a:effectRef>
-          <a:fontRef idx="minor">
-            <a:schemeClr val="lt1"/>
-          </a:fontRef>
-        </p:style>
-        <p:txBody>
-          <a:bodyPr rtlCol="0" anchor="ctr" lIns="0" rIns="0" tIns="0" bIns="0"/>
-          <a:lstStyle/>
-          <a:p>
-            <a:pPr algn="ctr"/>
-            <a:r>
-              <a:rPr sz="1400" b="1">
-                <a:solidFill>
-                  <a:srgbClr val="FFFFFF"/>
-                </a:solidFill>
-                <a:latin typeface="Calibri"/>
-              </a:rPr>
-              <a:t>2</a:t>
-            </a:r>
-          </a:p>
-        </p:txBody>
-      </p:sp>
-      <p:sp>
-        <p:nvSpPr>
-          <p:cNvPr id="9" name="TextBox 8"/>
-          <p:cNvSpPr txBox="1"/>
-          <p:nvPr/>
-        </p:nvSpPr>
-        <p:spPr>
-          <a:xfrm>
-            <a:off x="1234440" y="3194304"/>
-            <a:ext cx="10408615" cy="1429512"/>
-          </a:xfrm>
-          <a:prstGeom prst="rect">
-            <a:avLst/>
-          </a:prstGeom>
-          <a:noFill/>
-        </p:spPr>
-        <p:txBody>
-          <a:bodyPr wrap="square" anchor="t" lIns="0" rIns="0" tIns="0" bIns="0"/>
-          <a:lstStyle/>
-          <a:p>
-            <a:pPr algn="l"/>
-            <a:r>
-              <a:rPr sz="2200" b="0" i="0">
-                <a:solidFill>
-                  <a:srgbClr val="202122"/>
-                </a:solidFill>
-                <a:latin typeface="Calibri"/>
-              </a:rPr>
-              <a:t>Why release tension or pressure before disassembly?</a:t>
-            </a:r>
-          </a:p>
-        </p:txBody>
-      </p:sp>
-      <p:sp>
-        <p:nvSpPr>
-          <p:cNvPr id="10" name="Oval 9"/>
-          <p:cNvSpPr/>
-          <p:nvPr/>
-        </p:nvSpPr>
-        <p:spPr>
-          <a:xfrm>
-            <a:off x="548640" y="4806695"/>
-            <a:ext cx="411480" cy="411480"/>
-          </a:xfrm>
-          <a:prstGeom prst="ellipse">
-            <a:avLst/>
-          </a:prstGeom>
-          <a:solidFill>
-            <a:srgbClr val="E0463A"/>
-          </a:solidFill>
-          <a:ln>
-            <a:noFill/>
-          </a:ln>
-          <a:effectLst/>
-        </p:spPr>
-        <p:style>
-          <a:lnRef idx="1">
-            <a:schemeClr val="accent1"/>
-          </a:lnRef>
-          <a:fillRef idx="3">
-            <a:schemeClr val="accent1"/>
-          </a:fillRef>
-          <a:effectRef idx="2">
-            <a:schemeClr val="accent1"/>
-          </a:effectRef>
-          <a:fontRef idx="minor">
-            <a:schemeClr val="lt1"/>
-          </a:fontRef>
-        </p:style>
-        <p:txBody>
-          <a:bodyPr rtlCol="0" anchor="ctr" lIns="0" rIns="0" tIns="0" bIns="0"/>
-          <a:lstStyle/>
-          <a:p>
-            <a:pPr algn="ctr"/>
-            <a:r>
-              <a:rPr sz="1400" b="1">
-                <a:solidFill>
-                  <a:srgbClr val="FFFFFF"/>
-                </a:solidFill>
-                <a:latin typeface="Calibri"/>
-              </a:rPr>
-              <a:t>3</a:t>
-            </a:r>
-          </a:p>
-        </p:txBody>
-      </p:sp>
-      <p:sp>
-        <p:nvSpPr>
-          <p:cNvPr id="11" name="TextBox 10"/>
-          <p:cNvSpPr txBox="1"/>
-          <p:nvPr/>
-        </p:nvSpPr>
-        <p:spPr>
-          <a:xfrm>
-            <a:off x="1234440" y="4788408"/>
-            <a:ext cx="10408615" cy="1429512"/>
-          </a:xfrm>
-          <a:prstGeom prst="rect">
-            <a:avLst/>
-          </a:prstGeom>
-          <a:noFill/>
-        </p:spPr>
-        <p:txBody>
-          <a:bodyPr wrap="square" anchor="t" lIns="0" rIns="0" tIns="0" bIns="0"/>
-          <a:lstStyle/>
-          <a:p>
-            <a:pPr algn="l"/>
-            <a:r>
-              <a:rPr sz="2200" b="0" i="0">
-                <a:solidFill>
-                  <a:srgbClr val="202122"/>
-                </a:solidFill>
-                <a:latin typeface="Calibri"/>
-              </a:rPr>
-              <a:t>Name two pre-use checks on a power tool.</a:t>
-            </a:r>
-          </a:p>
-        </p:txBody>
-      </p:sp>
-    </p:spTree>
-  </p:cSld>
-  <p:clrMapOvr>
-    <a:masterClrMapping/>
-  </p:clrMapOvr>
-</p:sld>
-</file>
-
 <file path=ppt/slides/slide7.xml><?xml version="1.0" encoding="utf-8"?>
 <p:sld xmlns:a="http://schemas.openxmlformats.org/drawingml/2006/main" xmlns:p="http://schemas.openxmlformats.org/presentationml/2006/main" xmlns:r="http://schemas.openxmlformats.org/officeDocument/2006/relationships">
   <p:cSld>
@@ -6763,7 +9091,7 @@
                 </a:solidFill>
                 <a:latin typeface="Cambria"/>
               </a:rPr>
-              <a:t>Answers</a:t>
+              <a:t>Tools, assembly and realisation</a:t>
             </a:r>
           </a:p>
         </p:txBody>
@@ -6836,14 +9164,154 @@
       </p:sp>
       <p:sp>
         <p:nvSpPr>
-          <p:cNvPr id="6" name="Oval 5"/>
+          <p:cNvPr id="6" name="TextBox 5"/>
+          <p:cNvSpPr txBox="1"/>
+          <p:nvPr/>
+        </p:nvSpPr>
+        <p:spPr>
+          <a:xfrm>
+            <a:off x="548640" y="1554480"/>
+            <a:ext cx="6720840" cy="4617720"/>
+          </a:xfrm>
+          <a:prstGeom prst="rect">
+            <a:avLst/>
+          </a:prstGeom>
+          <a:noFill/>
+        </p:spPr>
+        <p:txBody>
+          <a:bodyPr wrap="square" lIns="0" rIns="0" tIns="0" bIns="0">
+            <a:spAutoFit/>
+          </a:bodyPr>
+          <a:lstStyle/>
+          <a:p>
+            <a:pPr>
+              <a:spcAft>
+                <a:spcPts val="1320"/>
+              </a:spcAft>
+            </a:pPr>
+            <a:r>
+              <a:rPr sz="2200" b="0">
+                <a:solidFill>
+                  <a:srgbClr val="202122"/>
+                </a:solidFill>
+                <a:latin typeface="Calibri"/>
+              </a:rPr>
+              <a:t>Hand and power tools must be chosen correctly and used safely, with checks before, during and after use: guards fitted, cables and blades undamaged, calibration current, and damage reported.</a:t>
+            </a:r>
+          </a:p>
+          <a:p>
+            <a:pPr>
+              <a:spcAft>
+                <a:spcPts val="1320"/>
+              </a:spcAft>
+            </a:pPr>
+            <a:r>
+              <a:rPr sz="2200" b="0">
+                <a:solidFill>
+                  <a:srgbClr val="202122"/>
+                </a:solidFill>
+                <a:latin typeface="Calibri"/>
+              </a:rPr>
+              <a:t>Prototyping must use at least one type of welding and one type of 3D printing.</a:t>
+            </a:r>
+          </a:p>
+          <a:p>
+            <a:pPr>
+              <a:spcAft>
+                <a:spcPts val="1320"/>
+              </a:spcAft>
+            </a:pPr>
+            <a:r>
+              <a:rPr sz="2200" b="1">
+                <a:solidFill>
+                  <a:srgbClr val="202122"/>
+                </a:solidFill>
+                <a:latin typeface="Calibri"/>
+              </a:rPr>
+              <a:t>Assembly follows a sequence:</a:t>
+            </a:r>
+            <a:r>
+              <a:rPr sz="2200" b="0">
+                <a:solidFill>
+                  <a:srgbClr val="202122"/>
+                </a:solidFill>
+                <a:latin typeface="Calibri"/>
+              </a:rPr>
+              <a:t> aligning, fixing, jointing, pre-tensioning, sealing and tightening in order, then functional testing. Disassembly starts by safely releasing tension and pressure.</a:t>
+            </a:r>
+          </a:p>
+          <a:p>
+            <a:pPr>
+              <a:spcAft>
+                <a:spcPts val="1320"/>
+              </a:spcAft>
+            </a:pPr>
+            <a:r>
+              <a:rPr sz="2200" b="0">
+                <a:solidFill>
+                  <a:srgbClr val="202122"/>
+                </a:solidFill>
+                <a:latin typeface="Calibri"/>
+              </a:rPr>
+              <a:t>A realisable design can actually be manufactured, operated and maintained.</a:t>
+            </a:r>
+          </a:p>
+        </p:txBody>
+      </p:sp>
+      <p:sp>
+        <p:nvSpPr>
+          <p:cNvPr id="7" name="Rounded Rectangle 6"/>
           <p:cNvSpPr/>
           <p:nvPr/>
         </p:nvSpPr>
         <p:spPr>
           <a:xfrm>
-            <a:off x="548640" y="1618488"/>
-            <a:ext cx="411480" cy="411480"/>
+            <a:off x="7772400" y="1554480"/>
+            <a:ext cx="3867912" cy="4526280"/>
+          </a:xfrm>
+          <a:prstGeom prst="roundRect">
+            <a:avLst>
+              <a:gd name="adj" fmla="val 8000"/>
+            </a:avLst>
+          </a:prstGeom>
+          <a:solidFill>
+            <a:srgbClr val="03306E"/>
+          </a:solidFill>
+          <a:ln>
+            <a:noFill/>
+          </a:ln>
+          <a:effectLst/>
+        </p:spPr>
+        <p:style>
+          <a:lnRef idx="1">
+            <a:schemeClr val="accent1"/>
+          </a:lnRef>
+          <a:fillRef idx="3">
+            <a:schemeClr val="accent1"/>
+          </a:fillRef>
+          <a:effectRef idx="2">
+            <a:schemeClr val="accent1"/>
+          </a:effectRef>
+          <a:fontRef idx="minor">
+            <a:schemeClr val="lt1"/>
+          </a:fontRef>
+        </p:style>
+        <p:txBody>
+          <a:bodyPr rtlCol="0" anchor="ctr"/>
+          <a:lstStyle/>
+          <a:p/>
+        </p:txBody>
+      </p:sp>
+      <p:sp>
+        <p:nvSpPr>
+          <p:cNvPr id="8" name="Oval 7"/>
+          <p:cNvSpPr/>
+          <p:nvPr/>
+        </p:nvSpPr>
+        <p:spPr>
+          <a:xfrm>
+            <a:off x="8046720" y="1828800"/>
+            <a:ext cx="548640" cy="548640"/>
           </a:xfrm>
           <a:prstGeom prst="ellipse">
             <a:avLst/>
@@ -6876,110 +9344,13 @@
           <a:p>
             <a:pPr algn="ctr"/>
             <a:r>
-              <a:rPr sz="1400" b="1">
+              <a:rPr sz="1300" b="1">
                 <a:solidFill>
                   <a:srgbClr val="FFFFFF"/>
                 </a:solidFill>
                 <a:latin typeface="Calibri"/>
               </a:rPr>
-              <a:t>1</a:t>
-            </a:r>
-          </a:p>
-        </p:txBody>
-      </p:sp>
-      <p:sp>
-        <p:nvSpPr>
-          <p:cNvPr id="7" name="TextBox 6"/>
-          <p:cNvSpPr txBox="1"/>
-          <p:nvPr/>
-        </p:nvSpPr>
-        <p:spPr>
-          <a:xfrm>
-            <a:off x="1234440" y="1600200"/>
-            <a:ext cx="10408615" cy="1429512"/>
-          </a:xfrm>
-          <a:prstGeom prst="rect">
-            <a:avLst/>
-          </a:prstGeom>
-          <a:noFill/>
-        </p:spPr>
-        <p:txBody>
-          <a:bodyPr wrap="square" anchor="t" lIns="0" rIns="0" tIns="0" bIns="0"/>
-          <a:lstStyle/>
-          <a:p>
-            <a:pPr algn="l"/>
-            <a:r>
-              <a:rPr sz="1800" b="0" i="0">
-                <a:solidFill>
-                  <a:srgbClr val="54595D"/>
-                </a:solidFill>
-                <a:latin typeface="Calibri"/>
-              </a:rPr>
-              <a:t>What is a block model for?</a:t>
-            </a:r>
-          </a:p>
-          <a:p>
-            <a:r>
-              <a:rPr sz="1800" b="1">
-                <a:solidFill>
-                  <a:srgbClr val="03306E"/>
-                </a:solidFill>
-                <a:latin typeface="Calibri"/>
-              </a:rPr>
-              <a:t>Checking size, form and proportion.</a:t>
-            </a:r>
-          </a:p>
-        </p:txBody>
-      </p:sp>
-      <p:sp>
-        <p:nvSpPr>
-          <p:cNvPr id="8" name="Oval 7"/>
-          <p:cNvSpPr/>
-          <p:nvPr/>
-        </p:nvSpPr>
-        <p:spPr>
-          <a:xfrm>
-            <a:off x="548640" y="3212592"/>
-            <a:ext cx="411480" cy="411480"/>
-          </a:xfrm>
-          <a:prstGeom prst="ellipse">
-            <a:avLst/>
-          </a:prstGeom>
-          <a:solidFill>
-            <a:srgbClr val="E0463A"/>
-          </a:solidFill>
-          <a:ln>
-            <a:noFill/>
-          </a:ln>
-          <a:effectLst/>
-        </p:spPr>
-        <p:style>
-          <a:lnRef idx="1">
-            <a:schemeClr val="accent1"/>
-          </a:lnRef>
-          <a:fillRef idx="3">
-            <a:schemeClr val="accent1"/>
-          </a:fillRef>
-          <a:effectRef idx="2">
-            <a:schemeClr val="accent1"/>
-          </a:effectRef>
-          <a:fontRef idx="minor">
-            <a:schemeClr val="lt1"/>
-          </a:fontRef>
-        </p:style>
-        <p:txBody>
-          <a:bodyPr rtlCol="0" anchor="ctr" lIns="0" rIns="0" tIns="0" bIns="0"/>
-          <a:lstStyle/>
-          <a:p>
-            <a:pPr algn="ctr"/>
-            <a:r>
-              <a:rPr sz="1400" b="1">
-                <a:solidFill>
-                  <a:srgbClr val="FFFFFF"/>
-                </a:solidFill>
-                <a:latin typeface="Calibri"/>
-              </a:rPr>
-              <a:t>2</a:t>
+              <a:t>e.g.</a:t>
             </a:r>
           </a:p>
         </p:txBody>
@@ -6992,8 +9363,8 @@
         </p:nvSpPr>
         <p:spPr>
           <a:xfrm>
-            <a:off x="1234440" y="3194304"/>
-            <a:ext cx="10408615" cy="1429512"/>
+            <a:off x="8046720" y="2560320"/>
+            <a:ext cx="3291840" cy="365760"/>
           </a:xfrm>
           <a:prstGeom prst="rect">
             <a:avLst/>
@@ -7006,121 +9377,46 @@
           <a:p>
             <a:pPr algn="l"/>
             <a:r>
-              <a:rPr sz="1800" b="0" i="0">
-                <a:solidFill>
-                  <a:srgbClr val="54595D"/>
-                </a:solidFill>
-                <a:latin typeface="Calibri"/>
-              </a:rPr>
-              <a:t>Why release tension or pressure before disassembly?</a:t>
-            </a:r>
-          </a:p>
-          <a:p>
-            <a:r>
-              <a:rPr sz="1800" b="1">
-                <a:solidFill>
-                  <a:srgbClr val="03306E"/>
-                </a:solidFill>
-                <a:latin typeface="Calibri"/>
-              </a:rPr>
-              <a:t>Stored energy could cause injury.</a:t>
-            </a:r>
-          </a:p>
-        </p:txBody>
-      </p:sp>
-      <p:sp>
-        <p:nvSpPr>
-          <p:cNvPr id="10" name="Oval 9"/>
-          <p:cNvSpPr/>
-          <p:nvPr/>
-        </p:nvSpPr>
-        <p:spPr>
-          <a:xfrm>
-            <a:off x="548640" y="4806695"/>
-            <a:ext cx="411480" cy="411480"/>
-          </a:xfrm>
-          <a:prstGeom prst="ellipse">
-            <a:avLst/>
-          </a:prstGeom>
-          <a:solidFill>
-            <a:srgbClr val="E0463A"/>
-          </a:solidFill>
-          <a:ln>
-            <a:noFill/>
-          </a:ln>
-          <a:effectLst/>
-        </p:spPr>
-        <p:style>
-          <a:lnRef idx="1">
-            <a:schemeClr val="accent1"/>
-          </a:lnRef>
-          <a:fillRef idx="3">
-            <a:schemeClr val="accent1"/>
-          </a:fillRef>
-          <a:effectRef idx="2">
-            <a:schemeClr val="accent1"/>
-          </a:effectRef>
-          <a:fontRef idx="minor">
-            <a:schemeClr val="lt1"/>
-          </a:fontRef>
-        </p:style>
-        <p:txBody>
-          <a:bodyPr rtlCol="0" anchor="ctr" lIns="0" rIns="0" tIns="0" bIns="0"/>
-          <a:lstStyle/>
-          <a:p>
-            <a:pPr algn="ctr"/>
-            <a:r>
-              <a:rPr sz="1400" b="1">
+              <a:rPr sz="1300" b="1" i="0">
+                <a:solidFill>
+                  <a:srgbClr val="A9C8F0"/>
+                </a:solidFill>
+                <a:latin typeface="Calibri"/>
+              </a:rPr>
+              <a:t>EXAMPLE</a:t>
+            </a:r>
+          </a:p>
+        </p:txBody>
+      </p:sp>
+      <p:sp>
+        <p:nvSpPr>
+          <p:cNvPr id="10" name="TextBox 9"/>
+          <p:cNvSpPr txBox="1"/>
+          <p:nvPr/>
+        </p:nvSpPr>
+        <p:spPr>
+          <a:xfrm>
+            <a:off x="8046720" y="2971800"/>
+            <a:ext cx="3291840" cy="2971800"/>
+          </a:xfrm>
+          <a:prstGeom prst="rect">
+            <a:avLst/>
+          </a:prstGeom>
+          <a:noFill/>
+        </p:spPr>
+        <p:txBody>
+          <a:bodyPr wrap="square" anchor="t" lIns="0" rIns="0" tIns="0" bIns="0"/>
+          <a:lstStyle/>
+          <a:p>
+            <a:pPr algn="l"/>
+            <a:r>
+              <a:rPr sz="1900" b="0" i="0">
                 <a:solidFill>
                   <a:srgbClr val="FFFFFF"/>
                 </a:solidFill>
-                <a:latin typeface="Calibri"/>
-              </a:rPr>
-              <a:t>3</a:t>
-            </a:r>
-          </a:p>
-        </p:txBody>
-      </p:sp>
-      <p:sp>
-        <p:nvSpPr>
-          <p:cNvPr id="11" name="TextBox 10"/>
-          <p:cNvSpPr txBox="1"/>
-          <p:nvPr/>
-        </p:nvSpPr>
-        <p:spPr>
-          <a:xfrm>
-            <a:off x="1234440" y="4788408"/>
-            <a:ext cx="10408615" cy="1429512"/>
-          </a:xfrm>
-          <a:prstGeom prst="rect">
-            <a:avLst/>
-          </a:prstGeom>
-          <a:noFill/>
-        </p:spPr>
-        <p:txBody>
-          <a:bodyPr wrap="square" anchor="t" lIns="0" rIns="0" tIns="0" bIns="0"/>
-          <a:lstStyle/>
-          <a:p>
-            <a:pPr algn="l"/>
-            <a:r>
-              <a:rPr sz="1800" b="0" i="0">
-                <a:solidFill>
-                  <a:srgbClr val="54595D"/>
-                </a:solidFill>
-                <a:latin typeface="Calibri"/>
-              </a:rPr>
-              <a:t>Name two pre-use checks on a power tool.</a:t>
-            </a:r>
-          </a:p>
-          <a:p>
-            <a:r>
-              <a:rPr sz="1800" b="1">
-                <a:solidFill>
-                  <a:srgbClr val="03306E"/>
-                </a:solidFill>
-                <a:latin typeface="Calibri"/>
-              </a:rPr>
-              <a:t>E.g. guards fitted, cable undamaged, correct bit or blade, calibration.</a:t>
+                <a:latin typeface="Cambria"/>
+              </a:rPr>
+              <a:t>Bolts on a flange are tightened in a star pattern, a little at a time, so the joint seals evenly instead of warping.</a:t>
             </a:r>
           </a:p>
         </p:txBody>
@@ -7212,7 +9508,7 @@
                 </a:solidFill>
                 <a:latin typeface="Cambria"/>
               </a:rPr>
-              <a:t>Activity: Prototype sprint</a:t>
+              <a:t>Tools, assembly and realisation</a:t>
             </a:r>
           </a:p>
         </p:txBody>
@@ -7285,19 +9581,177 @@
       </p:sp>
       <p:sp>
         <p:nvSpPr>
-          <p:cNvPr id="6" name="Rounded Rectangle 5"/>
+          <p:cNvPr id="6" name="TextBox 5"/>
+          <p:cNvSpPr txBox="1"/>
+          <p:nvPr/>
+        </p:nvSpPr>
+        <p:spPr>
+          <a:xfrm>
+            <a:off x="548640" y="1600200"/>
+            <a:ext cx="6675120" cy="4572000"/>
+          </a:xfrm>
+          <a:prstGeom prst="rect">
+            <a:avLst/>
+          </a:prstGeom>
+          <a:noFill/>
+        </p:spPr>
+        <p:txBody>
+          <a:bodyPr wrap="square" lIns="0" rIns="0" tIns="0" bIns="0">
+            <a:spAutoFit/>
+          </a:bodyPr>
+          <a:lstStyle/>
+          <a:p>
+            <a:pPr marL="274320" indent="-274320">
+              <a:spcAft>
+                <a:spcPts val="1080"/>
+              </a:spcAft>
+              <a:buClr>
+                <a:srgbClr val="0645AD"/>
+              </a:buClr>
+              <a:buFont typeface="Arial"/>
+              <a:buChar char="•"/>
+            </a:pPr>
+            <a:r>
+              <a:rPr sz="2400" b="0">
+                <a:solidFill>
+                  <a:srgbClr val="202122"/>
+                </a:solidFill>
+                <a:latin typeface="Calibri"/>
+              </a:rPr>
+              <a:t>Use hand and power tools safely, with checks before, during and after use.</a:t>
+            </a:r>
+          </a:p>
+          <a:p>
+            <a:pPr marL="274320" indent="-274320">
+              <a:spcAft>
+                <a:spcPts val="1080"/>
+              </a:spcAft>
+              <a:buClr>
+                <a:srgbClr val="0645AD"/>
+              </a:buClr>
+              <a:buFont typeface="Arial"/>
+              <a:buChar char="•"/>
+            </a:pPr>
+            <a:r>
+              <a:rPr sz="2400" b="0">
+                <a:solidFill>
+                  <a:srgbClr val="202122"/>
+                </a:solidFill>
+                <a:latin typeface="Calibri"/>
+              </a:rPr>
+              <a:t>Use at least one welding type and one 3D printing type when prototyping.</a:t>
+            </a:r>
+          </a:p>
+          <a:p>
+            <a:pPr marL="274320" indent="-274320">
+              <a:spcAft>
+                <a:spcPts val="1080"/>
+              </a:spcAft>
+              <a:buClr>
+                <a:srgbClr val="0645AD"/>
+              </a:buClr>
+              <a:buFont typeface="Arial"/>
+              <a:buChar char="•"/>
+            </a:pPr>
+            <a:r>
+              <a:rPr sz="2400" b="1">
+                <a:solidFill>
+                  <a:srgbClr val="202122"/>
+                </a:solidFill>
+                <a:latin typeface="Calibri"/>
+              </a:rPr>
+              <a:t>Assemble and disassemble safely:</a:t>
+            </a:r>
+            <a:r>
+              <a:rPr sz="2400" b="0">
+                <a:solidFill>
+                  <a:srgbClr val="202122"/>
+                </a:solidFill>
+                <a:latin typeface="Calibri"/>
+              </a:rPr>
+              <a:t> sequence, alignment, fixing, tensioning, sealing, testing.</a:t>
+            </a:r>
+          </a:p>
+          <a:p>
+            <a:pPr marL="274320" indent="-274320">
+              <a:spcAft>
+                <a:spcPts val="1080"/>
+              </a:spcAft>
+              <a:buClr>
+                <a:srgbClr val="0645AD"/>
+              </a:buClr>
+              <a:buFont typeface="Arial"/>
+              <a:buChar char="•"/>
+            </a:pPr>
+            <a:r>
+              <a:rPr sz="2400" b="0">
+                <a:solidFill>
+                  <a:srgbClr val="202122"/>
+                </a:solidFill>
+                <a:latin typeface="Calibri"/>
+              </a:rPr>
+              <a:t>Check the design can be manufactured, operated and maintained.</a:t>
+            </a:r>
+          </a:p>
+        </p:txBody>
+      </p:sp>
+      <p:sp>
+        <p:nvSpPr>
+          <p:cNvPr id="7" name="Rounded Rectangle 6"/>
           <p:cNvSpPr/>
           <p:nvPr/>
         </p:nvSpPr>
         <p:spPr>
           <a:xfrm>
-            <a:off x="548640" y="1508760"/>
-            <a:ext cx="2011680" cy="457200"/>
+            <a:off x="7772400" y="1600200"/>
+            <a:ext cx="3867912" cy="4434840"/>
           </a:xfrm>
           <a:prstGeom prst="roundRect">
             <a:avLst>
-              <a:gd name="adj" fmla="val 50000"/>
+              <a:gd name="adj" fmla="val 8000"/>
             </a:avLst>
+          </a:prstGeom>
+          <a:solidFill>
+            <a:srgbClr val="03306E"/>
+          </a:solidFill>
+          <a:ln>
+            <a:noFill/>
+          </a:ln>
+          <a:effectLst/>
+        </p:spPr>
+        <p:style>
+          <a:lnRef idx="1">
+            <a:schemeClr val="accent1"/>
+          </a:lnRef>
+          <a:fillRef idx="3">
+            <a:schemeClr val="accent1"/>
+          </a:fillRef>
+          <a:effectRef idx="2">
+            <a:schemeClr val="accent1"/>
+          </a:effectRef>
+          <a:fontRef idx="minor">
+            <a:schemeClr val="lt1"/>
+          </a:fontRef>
+        </p:style>
+        <p:txBody>
+          <a:bodyPr rtlCol="0" anchor="ctr"/>
+          <a:lstStyle/>
+          <a:p/>
+        </p:txBody>
+      </p:sp>
+      <p:sp>
+        <p:nvSpPr>
+          <p:cNvPr id="8" name="Oval 7"/>
+          <p:cNvSpPr/>
+          <p:nvPr/>
+        </p:nvSpPr>
+        <p:spPr>
+          <a:xfrm>
+            <a:off x="8046720" y="1874519"/>
+            <a:ext cx="548640" cy="548640"/>
+          </a:xfrm>
+          <a:prstGeom prst="ellipse">
+            <a:avLst/>
           </a:prstGeom>
           <a:solidFill>
             <a:srgbClr val="E0463A"/>
@@ -7322,21 +9776,32 @@
           </a:fontRef>
         </p:style>
         <p:txBody>
-          <a:bodyPr rtlCol="0" anchor="ctr"/>
-          <a:lstStyle/>
-          <a:p/>
-        </p:txBody>
-      </p:sp>
-      <p:sp>
-        <p:nvSpPr>
-          <p:cNvPr id="7" name="TextBox 6"/>
+          <a:bodyPr rtlCol="0" anchor="ctr" lIns="0" rIns="0" tIns="0" bIns="0"/>
+          <a:lstStyle/>
+          <a:p>
+            <a:pPr algn="ctr"/>
+            <a:r>
+              <a:rPr sz="2000" b="1">
+                <a:solidFill>
+                  <a:srgbClr val="FFFFFF"/>
+                </a:solidFill>
+                <a:latin typeface="Calibri"/>
+              </a:rPr>
+              <a:t>!</a:t>
+            </a:r>
+          </a:p>
+        </p:txBody>
+      </p:sp>
+      <p:sp>
+        <p:nvSpPr>
+          <p:cNvPr id="9" name="TextBox 8"/>
           <p:cNvSpPr txBox="1"/>
           <p:nvPr/>
         </p:nvSpPr>
         <p:spPr>
           <a:xfrm>
-            <a:off x="548640" y="1508760"/>
-            <a:ext cx="2011680" cy="457200"/>
+            <a:off x="8046720" y="2606040"/>
+            <a:ext cx="3291840" cy="365760"/>
           </a:xfrm>
           <a:prstGeom prst="rect">
             <a:avLst/>
@@ -7344,104 +9809,18 @@
           <a:noFill/>
         </p:spPr>
         <p:txBody>
-          <a:bodyPr wrap="square" anchor="ctr" lIns="0" rIns="0" tIns="0" bIns="0"/>
-          <a:lstStyle/>
-          <a:p>
-            <a:pPr algn="ctr"/>
-            <a:r>
-              <a:rPr sz="1400" b="1" i="0">
-                <a:solidFill>
-                  <a:srgbClr val="FFFFFF"/>
-                </a:solidFill>
-                <a:latin typeface="Calibri"/>
-              </a:rPr>
-              <a:t>60 minutes</a:t>
-            </a:r>
-          </a:p>
-        </p:txBody>
-      </p:sp>
-      <p:sp>
-        <p:nvSpPr>
-          <p:cNvPr id="8" name="TextBox 7"/>
-          <p:cNvSpPr txBox="1"/>
-          <p:nvPr/>
-        </p:nvSpPr>
-        <p:spPr>
-          <a:xfrm>
-            <a:off x="2743200" y="1508760"/>
-            <a:ext cx="4754880" cy="457200"/>
-          </a:xfrm>
-          <a:prstGeom prst="rect">
-            <a:avLst/>
-          </a:prstGeom>
-          <a:noFill/>
-        </p:spPr>
-        <p:txBody>
-          <a:bodyPr wrap="square" anchor="ctr" lIns="0" rIns="0" tIns="0" bIns="0"/>
+          <a:bodyPr wrap="square" anchor="t" lIns="0" rIns="0" tIns="0" bIns="0"/>
           <a:lstStyle/>
           <a:p>
             <a:pPr algn="l"/>
             <a:r>
-              <a:rPr sz="1400" b="0" i="1">
-                <a:solidFill>
-                  <a:srgbClr val="54595D"/>
-                </a:solidFill>
-                <a:latin typeface="Calibri"/>
-              </a:rPr>
-              <a:t>Pairs, practical, can run over two lessons</a:t>
-            </a:r>
-          </a:p>
-        </p:txBody>
-      </p:sp>
-      <p:sp>
-        <p:nvSpPr>
-          <p:cNvPr id="9" name="Oval 8"/>
-          <p:cNvSpPr/>
-          <p:nvPr/>
-        </p:nvSpPr>
-        <p:spPr>
-          <a:xfrm>
-            <a:off x="548640" y="2482596"/>
-            <a:ext cx="384048" cy="384048"/>
-          </a:xfrm>
-          <a:prstGeom prst="ellipse">
-            <a:avLst/>
-          </a:prstGeom>
-          <a:solidFill>
-            <a:srgbClr val="0645AD"/>
-          </a:solidFill>
-          <a:ln>
-            <a:noFill/>
-          </a:ln>
-          <a:effectLst/>
-        </p:spPr>
-        <p:style>
-          <a:lnRef idx="1">
-            <a:schemeClr val="accent1"/>
-          </a:lnRef>
-          <a:fillRef idx="3">
-            <a:schemeClr val="accent1"/>
-          </a:fillRef>
-          <a:effectRef idx="2">
-            <a:schemeClr val="accent1"/>
-          </a:effectRef>
-          <a:fontRef idx="minor">
-            <a:schemeClr val="lt1"/>
-          </a:fontRef>
-        </p:style>
-        <p:txBody>
-          <a:bodyPr rtlCol="0" anchor="ctr" lIns="0" rIns="0" tIns="0" bIns="0"/>
-          <a:lstStyle/>
-          <a:p>
-            <a:pPr algn="ctr"/>
-            <a:r>
-              <a:rPr sz="1300" b="1">
-                <a:solidFill>
-                  <a:srgbClr val="FFFFFF"/>
-                </a:solidFill>
-                <a:latin typeface="Calibri"/>
-              </a:rPr>
-              <a:t>1</a:t>
+              <a:rPr sz="1300" b="1" i="0">
+                <a:solidFill>
+                  <a:srgbClr val="A9C8F0"/>
+                </a:solidFill>
+                <a:latin typeface="Calibri"/>
+              </a:rPr>
+              <a:t>KEY IDEA</a:t>
             </a:r>
           </a:p>
         </p:txBody>
@@ -7454,8 +9833,8 @@
         </p:nvSpPr>
         <p:spPr>
           <a:xfrm>
-            <a:off x="1143000" y="2240280"/>
-            <a:ext cx="5943600" cy="868680"/>
+            <a:off x="8046720" y="3017520"/>
+            <a:ext cx="3291840" cy="2926080"/>
           </a:xfrm>
           <a:prstGeom prst="rect">
             <a:avLst/>
@@ -7463,439 +9842,18 @@
           <a:noFill/>
         </p:spPr>
         <p:txBody>
-          <a:bodyPr wrap="square" anchor="ctr" lIns="0" rIns="0" tIns="0" bIns="0"/>
+          <a:bodyPr wrap="square" anchor="t" lIns="0" rIns="0" tIns="0" bIns="0"/>
           <a:lstStyle/>
           <a:p>
             <a:pPr algn="l"/>
             <a:r>
-              <a:rPr sz="1700" b="0" i="0">
-                <a:solidFill>
-                  <a:srgbClr val="202122"/>
-                </a:solidFill>
-                <a:latin typeface="Calibri"/>
-              </a:rPr>
-              <a:t>Design a phone stand with an adjustable angle.</a:t>
-            </a:r>
-          </a:p>
-        </p:txBody>
-      </p:sp>
-      <p:sp>
-        <p:nvSpPr>
-          <p:cNvPr id="11" name="Oval 10"/>
-          <p:cNvSpPr/>
-          <p:nvPr/>
-        </p:nvSpPr>
-        <p:spPr>
-          <a:xfrm>
-            <a:off x="548640" y="3461004"/>
-            <a:ext cx="384048" cy="384048"/>
-          </a:xfrm>
-          <a:prstGeom prst="ellipse">
-            <a:avLst/>
-          </a:prstGeom>
-          <a:solidFill>
-            <a:srgbClr val="0645AD"/>
-          </a:solidFill>
-          <a:ln>
-            <a:noFill/>
-          </a:ln>
-          <a:effectLst/>
-        </p:spPr>
-        <p:style>
-          <a:lnRef idx="1">
-            <a:schemeClr val="accent1"/>
-          </a:lnRef>
-          <a:fillRef idx="3">
-            <a:schemeClr val="accent1"/>
-          </a:fillRef>
-          <a:effectRef idx="2">
-            <a:schemeClr val="accent1"/>
-          </a:effectRef>
-          <a:fontRef idx="minor">
-            <a:schemeClr val="lt1"/>
-          </a:fontRef>
-        </p:style>
-        <p:txBody>
-          <a:bodyPr rtlCol="0" anchor="ctr" lIns="0" rIns="0" tIns="0" bIns="0"/>
-          <a:lstStyle/>
-          <a:p>
-            <a:pPr algn="ctr"/>
-            <a:r>
-              <a:rPr sz="1300" b="1">
+              <a:rPr sz="2200" b="0" i="0">
                 <a:solidFill>
                   <a:srgbClr val="FFFFFF"/>
                 </a:solidFill>
-                <a:latin typeface="Calibri"/>
-              </a:rPr>
-              <a:t>2</a:t>
-            </a:r>
-          </a:p>
-        </p:txBody>
-      </p:sp>
-      <p:sp>
-        <p:nvSpPr>
-          <p:cNvPr id="12" name="TextBox 11"/>
-          <p:cNvSpPr txBox="1"/>
-          <p:nvPr/>
-        </p:nvSpPr>
-        <p:spPr>
-          <a:xfrm>
-            <a:off x="1143000" y="3218688"/>
-            <a:ext cx="5943600" cy="868680"/>
-          </a:xfrm>
-          <a:prstGeom prst="rect">
-            <a:avLst/>
-          </a:prstGeom>
-          <a:noFill/>
-        </p:spPr>
-        <p:txBody>
-          <a:bodyPr wrap="square" anchor="ctr" lIns="0" rIns="0" tIns="0" bIns="0"/>
-          <a:lstStyle/>
-          <a:p>
-            <a:pPr algn="l"/>
-            <a:r>
-              <a:rPr sz="1700" b="0" i="0">
-                <a:solidFill>
-                  <a:srgbClr val="202122"/>
-                </a:solidFill>
-                <a:latin typeface="Calibri"/>
-              </a:rPr>
-              <a:t>Produce a 3D CAD model and a detailed drawing.</a:t>
-            </a:r>
-          </a:p>
-        </p:txBody>
-      </p:sp>
-      <p:sp>
-        <p:nvSpPr>
-          <p:cNvPr id="13" name="Oval 12"/>
-          <p:cNvSpPr/>
-          <p:nvPr/>
-        </p:nvSpPr>
-        <p:spPr>
-          <a:xfrm>
-            <a:off x="548640" y="4439412"/>
-            <a:ext cx="384048" cy="384048"/>
-          </a:xfrm>
-          <a:prstGeom prst="ellipse">
-            <a:avLst/>
-          </a:prstGeom>
-          <a:solidFill>
-            <a:srgbClr val="0645AD"/>
-          </a:solidFill>
-          <a:ln>
-            <a:noFill/>
-          </a:ln>
-          <a:effectLst/>
-        </p:spPr>
-        <p:style>
-          <a:lnRef idx="1">
-            <a:schemeClr val="accent1"/>
-          </a:lnRef>
-          <a:fillRef idx="3">
-            <a:schemeClr val="accent1"/>
-          </a:fillRef>
-          <a:effectRef idx="2">
-            <a:schemeClr val="accent1"/>
-          </a:effectRef>
-          <a:fontRef idx="minor">
-            <a:schemeClr val="lt1"/>
-          </a:fontRef>
-        </p:style>
-        <p:txBody>
-          <a:bodyPr rtlCol="0" anchor="ctr" lIns="0" rIns="0" tIns="0" bIns="0"/>
-          <a:lstStyle/>
-          <a:p>
-            <a:pPr algn="ctr"/>
-            <a:r>
-              <a:rPr sz="1300" b="1">
-                <a:solidFill>
-                  <a:srgbClr val="FFFFFF"/>
-                </a:solidFill>
-                <a:latin typeface="Calibri"/>
-              </a:rPr>
-              <a:t>3</a:t>
-            </a:r>
-          </a:p>
-        </p:txBody>
-      </p:sp>
-      <p:sp>
-        <p:nvSpPr>
-          <p:cNvPr id="14" name="TextBox 13"/>
-          <p:cNvSpPr txBox="1"/>
-          <p:nvPr/>
-        </p:nvSpPr>
-        <p:spPr>
-          <a:xfrm>
-            <a:off x="1143000" y="4197096"/>
-            <a:ext cx="5943600" cy="868680"/>
-          </a:xfrm>
-          <a:prstGeom prst="rect">
-            <a:avLst/>
-          </a:prstGeom>
-          <a:noFill/>
-        </p:spPr>
-        <p:txBody>
-          <a:bodyPr wrap="square" anchor="ctr" lIns="0" rIns="0" tIns="0" bIns="0"/>
-          <a:lstStyle/>
-          <a:p>
-            <a:pPr algn="l"/>
-            <a:r>
-              <a:rPr sz="1700" b="0" i="0">
-                <a:solidFill>
-                  <a:srgbClr val="202122"/>
-                </a:solidFill>
-                <a:latin typeface="Calibri"/>
-              </a:rPr>
-              <a:t>3D print or build a block model.</a:t>
-            </a:r>
-          </a:p>
-        </p:txBody>
-      </p:sp>
-      <p:sp>
-        <p:nvSpPr>
-          <p:cNvPr id="15" name="Oval 14"/>
-          <p:cNvSpPr/>
-          <p:nvPr/>
-        </p:nvSpPr>
-        <p:spPr>
-          <a:xfrm>
-            <a:off x="548640" y="5417820"/>
-            <a:ext cx="384048" cy="384048"/>
-          </a:xfrm>
-          <a:prstGeom prst="ellipse">
-            <a:avLst/>
-          </a:prstGeom>
-          <a:solidFill>
-            <a:srgbClr val="0645AD"/>
-          </a:solidFill>
-          <a:ln>
-            <a:noFill/>
-          </a:ln>
-          <a:effectLst/>
-        </p:spPr>
-        <p:style>
-          <a:lnRef idx="1">
-            <a:schemeClr val="accent1"/>
-          </a:lnRef>
-          <a:fillRef idx="3">
-            <a:schemeClr val="accent1"/>
-          </a:fillRef>
-          <a:effectRef idx="2">
-            <a:schemeClr val="accent1"/>
-          </a:effectRef>
-          <a:fontRef idx="minor">
-            <a:schemeClr val="lt1"/>
-          </a:fontRef>
-        </p:style>
-        <p:txBody>
-          <a:bodyPr rtlCol="0" anchor="ctr" lIns="0" rIns="0" tIns="0" bIns="0"/>
-          <a:lstStyle/>
-          <a:p>
-            <a:pPr algn="ctr"/>
-            <a:r>
-              <a:rPr sz="1300" b="1">
-                <a:solidFill>
-                  <a:srgbClr val="FFFFFF"/>
-                </a:solidFill>
-                <a:latin typeface="Calibri"/>
-              </a:rPr>
-              <a:t>4</a:t>
-            </a:r>
-          </a:p>
-        </p:txBody>
-      </p:sp>
-      <p:sp>
-        <p:nvSpPr>
-          <p:cNvPr id="16" name="TextBox 15"/>
-          <p:cNvSpPr txBox="1"/>
-          <p:nvPr/>
-        </p:nvSpPr>
-        <p:spPr>
-          <a:xfrm>
-            <a:off x="1143000" y="5175504"/>
-            <a:ext cx="5943600" cy="868680"/>
-          </a:xfrm>
-          <a:prstGeom prst="rect">
-            <a:avLst/>
-          </a:prstGeom>
-          <a:noFill/>
-        </p:spPr>
-        <p:txBody>
-          <a:bodyPr wrap="square" anchor="ctr" lIns="0" rIns="0" tIns="0" bIns="0"/>
-          <a:lstStyle/>
-          <a:p>
-            <a:pPr algn="l"/>
-            <a:r>
-              <a:rPr sz="1700" b="0" i="0">
-                <a:solidFill>
-                  <a:srgbClr val="202122"/>
-                </a:solidFill>
-                <a:latin typeface="Calibri"/>
-              </a:rPr>
-              <a:t>Test it and annotate improvements.</a:t>
-            </a:r>
-          </a:p>
-        </p:txBody>
-      </p:sp>
-      <p:sp>
-        <p:nvSpPr>
-          <p:cNvPr id="17" name="Rounded Rectangle 16"/>
-          <p:cNvSpPr/>
-          <p:nvPr/>
-        </p:nvSpPr>
-        <p:spPr>
-          <a:xfrm>
-            <a:off x="7772400" y="1508760"/>
-            <a:ext cx="3867912" cy="4572000"/>
-          </a:xfrm>
-          <a:prstGeom prst="roundRect">
-            <a:avLst>
-              <a:gd name="adj" fmla="val 8000"/>
-            </a:avLst>
-          </a:prstGeom>
-          <a:solidFill>
-            <a:srgbClr val="EAF3FF"/>
-          </a:solidFill>
-          <a:ln>
-            <a:noFill/>
-          </a:ln>
-          <a:effectLst/>
-        </p:spPr>
-        <p:style>
-          <a:lnRef idx="1">
-            <a:schemeClr val="accent1"/>
-          </a:lnRef>
-          <a:fillRef idx="3">
-            <a:schemeClr val="accent1"/>
-          </a:fillRef>
-          <a:effectRef idx="2">
-            <a:schemeClr val="accent1"/>
-          </a:effectRef>
-          <a:fontRef idx="minor">
-            <a:schemeClr val="lt1"/>
-          </a:fontRef>
-        </p:style>
-        <p:txBody>
-          <a:bodyPr rtlCol="0" anchor="ctr"/>
-          <a:lstStyle/>
-          <a:p/>
-        </p:txBody>
-      </p:sp>
-      <p:sp>
-        <p:nvSpPr>
-          <p:cNvPr id="18" name="TextBox 17"/>
-          <p:cNvSpPr txBox="1"/>
-          <p:nvPr/>
-        </p:nvSpPr>
-        <p:spPr>
-          <a:xfrm>
-            <a:off x="8046720" y="1737360"/>
-            <a:ext cx="3291840" cy="365760"/>
-          </a:xfrm>
-          <a:prstGeom prst="rect">
-            <a:avLst/>
-          </a:prstGeom>
-          <a:noFill/>
-        </p:spPr>
-        <p:txBody>
-          <a:bodyPr wrap="square" anchor="t" lIns="0" rIns="0" tIns="0" bIns="0"/>
-          <a:lstStyle/>
-          <a:p>
-            <a:pPr algn="l"/>
-            <a:r>
-              <a:rPr sz="1300" b="1" i="0">
-                <a:solidFill>
-                  <a:srgbClr val="0645AD"/>
-                </a:solidFill>
-                <a:latin typeface="Calibri"/>
-              </a:rPr>
-              <a:t>SUCCESS CRITERIA</a:t>
-            </a:r>
-          </a:p>
-        </p:txBody>
-      </p:sp>
-      <p:sp>
-        <p:nvSpPr>
-          <p:cNvPr id="19" name="TextBox 18"/>
-          <p:cNvSpPr txBox="1"/>
-          <p:nvPr/>
-        </p:nvSpPr>
-        <p:spPr>
-          <a:xfrm>
-            <a:off x="8046720" y="2240280"/>
-            <a:ext cx="3337560" cy="3657600"/>
-          </a:xfrm>
-          <a:prstGeom prst="rect">
-            <a:avLst/>
-          </a:prstGeom>
-          <a:noFill/>
-        </p:spPr>
-        <p:txBody>
-          <a:bodyPr wrap="square" lIns="0" rIns="0" tIns="0" bIns="0">
-            <a:spAutoFit/>
-          </a:bodyPr>
-          <a:lstStyle/>
-          <a:p>
-            <a:pPr marL="274320" indent="-274320">
-              <a:spcAft>
-                <a:spcPts val="810"/>
-              </a:spcAft>
-              <a:buClr>
-                <a:srgbClr val="0645AD"/>
-              </a:buClr>
-              <a:buFont typeface="Arial"/>
-              <a:buChar char="•"/>
-            </a:pPr>
-            <a:r>
-              <a:rPr sz="1800" b="0">
-                <a:solidFill>
-                  <a:srgbClr val="202122"/>
-                </a:solidFill>
-                <a:latin typeface="Calibri"/>
-              </a:rPr>
-              <a:t>Drawing follows standards</a:t>
-            </a:r>
-          </a:p>
-          <a:p>
-            <a:pPr marL="274320" indent="-274320">
-              <a:spcAft>
-                <a:spcPts val="810"/>
-              </a:spcAft>
-              <a:buClr>
-                <a:srgbClr val="0645AD"/>
-              </a:buClr>
-              <a:buFont typeface="Arial"/>
-              <a:buChar char="•"/>
-            </a:pPr>
-            <a:r>
-              <a:rPr sz="1800" b="0">
-                <a:solidFill>
-                  <a:srgbClr val="202122"/>
-                </a:solidFill>
-                <a:latin typeface="Calibri"/>
-              </a:rPr>
-              <a:t>Model built safely</a:t>
-            </a:r>
-          </a:p>
-          <a:p>
-            <a:pPr marL="274320" indent="-274320">
-              <a:spcAft>
-                <a:spcPts val="810"/>
-              </a:spcAft>
-              <a:buClr>
-                <a:srgbClr val="0645AD"/>
-              </a:buClr>
-              <a:buFont typeface="Arial"/>
-              <a:buChar char="•"/>
-            </a:pPr>
-            <a:r>
-              <a:rPr sz="1800" b="0">
-                <a:solidFill>
-                  <a:srgbClr val="202122"/>
-                </a:solidFill>
-                <a:latin typeface="Calibri"/>
-              </a:rPr>
-              <a:t>Improvements based on testing</a:t>
+                <a:latin typeface="Cambria"/>
+              </a:rPr>
+              <a:t>A design isn't finished until someone could actually make it and look after it.</a:t>
             </a:r>
           </a:p>
         </p:txBody>
@@ -7914,7 +9872,7 @@
     <p:bg>
       <p:bgPr>
         <a:solidFill>
-          <a:srgbClr val="03306E"/>
+          <a:srgbClr val="FFFFFF"/>
         </a:solidFill>
         <a:effectLst/>
       </p:bgPr>
@@ -7950,7 +9908,7 @@
             <a:r>
               <a:rPr sz="1100" b="1" i="0">
                 <a:solidFill>
-                  <a:srgbClr val="A9C8F0"/>
+                  <a:srgbClr val="54595D"/>
                 </a:solidFill>
                 <a:latin typeface="Calibri"/>
               </a:rPr>
@@ -7983,24 +9941,90 @@
             <a:r>
               <a:rPr sz="3200" b="1" i="0">
                 <a:solidFill>
-                  <a:srgbClr val="FFFFFF"/>
+                  <a:srgbClr val="03306E"/>
                 </a:solidFill>
                 <a:latin typeface="Cambria"/>
               </a:rPr>
-              <a:t>Exit ticket</a:t>
-            </a:r>
-          </a:p>
-        </p:txBody>
-      </p:sp>
-      <p:sp>
-        <p:nvSpPr>
-          <p:cNvPr id="4" name="Oval 3"/>
+              <a:t>Quick check: Tools, assembly and realisation</a:t>
+            </a:r>
+          </a:p>
+        </p:txBody>
+      </p:sp>
+      <p:sp>
+        <p:nvSpPr>
+          <p:cNvPr id="4" name="TextBox 3"/>
+          <p:cNvSpPr txBox="1"/>
+          <p:nvPr/>
+        </p:nvSpPr>
+        <p:spPr>
+          <a:xfrm>
+            <a:off x="548640" y="6446520"/>
+            <a:ext cx="8229600" cy="274320"/>
+          </a:xfrm>
+          <a:prstGeom prst="rect">
+            <a:avLst/>
+          </a:prstGeom>
+          <a:noFill/>
+        </p:spPr>
+        <p:txBody>
+          <a:bodyPr wrap="square" anchor="t" lIns="0" rIns="0" tIns="0" bIns="0"/>
+          <a:lstStyle/>
+          <a:p>
+            <a:pPr algn="l"/>
+            <a:r>
+              <a:rPr sz="1000" b="0" i="0">
+                <a:solidFill>
+                  <a:srgbClr val="54595D"/>
+                </a:solidFill>
+                <a:latin typeface="Calibri"/>
+              </a:rPr>
+              <a:t>Design and Development for Engineering and Manufacturing T Level  ·  Designing, Modelling and Prototyping</a:t>
+            </a:r>
+          </a:p>
+        </p:txBody>
+      </p:sp>
+      <p:sp>
+        <p:nvSpPr>
+          <p:cNvPr id="5" name="TextBox 4"/>
+          <p:cNvSpPr txBox="1"/>
+          <p:nvPr/>
+        </p:nvSpPr>
+        <p:spPr>
+          <a:xfrm>
+            <a:off x="10728655" y="6446520"/>
+            <a:ext cx="914400" cy="274320"/>
+          </a:xfrm>
+          <a:prstGeom prst="rect">
+            <a:avLst/>
+          </a:prstGeom>
+          <a:noFill/>
+        </p:spPr>
+        <p:txBody>
+          <a:bodyPr wrap="square" anchor="t" lIns="0" rIns="0" tIns="0" bIns="0"/>
+          <a:lstStyle/>
+          <a:p>
+            <a:pPr algn="r"/>
+            <a:r>
+              <a:rPr sz="1000" b="0" i="0">
+                <a:solidFill>
+                  <a:srgbClr val="54595D"/>
+                </a:solidFill>
+                <a:latin typeface="Calibri"/>
+              </a:rPr>
+              <a:t>9</a:t>
+            </a:r>
+          </a:p>
+        </p:txBody>
+      </p:sp>
+      <p:sp>
+        <p:nvSpPr>
+          <p:cNvPr id="6" name="Oval 5"/>
           <p:cNvSpPr/>
           <p:nvPr/>
         </p:nvSpPr>
         <p:spPr>
           <a:xfrm>
-            <a:off x="548640" y="1737360"/>
+            <a:off x="548640" y="1691640"/>
             <a:ext cx="502920" cy="502920"/>
           </a:xfrm>
           <a:prstGeom prst="ellipse">
@@ -8034,7 +10058,7 @@
           <a:p>
             <a:pPr algn="ctr"/>
             <a:r>
-              <a:rPr sz="1700" b="1">
+              <a:rPr sz="1600" b="1">
                 <a:solidFill>
                   <a:srgbClr val="FFFFFF"/>
                 </a:solidFill>
@@ -8047,14 +10071,14 @@
       </p:sp>
       <p:sp>
         <p:nvSpPr>
-          <p:cNvPr id="5" name="TextBox 4"/>
+          <p:cNvPr id="7" name="TextBox 6"/>
           <p:cNvSpPr txBox="1"/>
           <p:nvPr/>
         </p:nvSpPr>
         <p:spPr>
           <a:xfrm>
-            <a:off x="1325880" y="1645920"/>
-            <a:ext cx="6583680" cy="822960"/>
+            <a:off x="1371600" y="1645920"/>
+            <a:ext cx="10271455" cy="1188720"/>
           </a:xfrm>
           <a:prstGeom prst="rect">
             <a:avLst/>
@@ -8062,31 +10086,31 @@
           <a:noFill/>
         </p:spPr>
         <p:txBody>
-          <a:bodyPr wrap="square" anchor="ctr" lIns="0" rIns="0" tIns="0" bIns="0"/>
+          <a:bodyPr wrap="square" anchor="t" lIns="0" rIns="0" tIns="0" bIns="0"/>
           <a:lstStyle/>
           <a:p>
             <a:pPr algn="l"/>
             <a:r>
-              <a:rPr sz="2000" b="0" i="0">
-                <a:solidFill>
-                  <a:srgbClr val="FFFFFF"/>
-                </a:solidFill>
-                <a:latin typeface="Calibri"/>
-              </a:rPr>
-              <a:t>When would you choose a one-off prototype over a 3D print?</a:t>
-            </a:r>
-          </a:p>
-        </p:txBody>
-      </p:sp>
-      <p:sp>
-        <p:nvSpPr>
-          <p:cNvPr id="6" name="Oval 5"/>
+              <a:rPr sz="2400" b="0" i="0">
+                <a:solidFill>
+                  <a:srgbClr val="202122"/>
+                </a:solidFill>
+                <a:latin typeface="Calibri"/>
+              </a:rPr>
+              <a:t>Name two pre-use checks on a power tool.</a:t>
+            </a:r>
+          </a:p>
+        </p:txBody>
+      </p:sp>
+      <p:sp>
+        <p:nvSpPr>
+          <p:cNvPr id="8" name="Oval 7"/>
           <p:cNvSpPr/>
           <p:nvPr/>
         </p:nvSpPr>
         <p:spPr>
           <a:xfrm>
-            <a:off x="548640" y="2697480"/>
+            <a:off x="548640" y="3108960"/>
             <a:ext cx="502920" cy="502920"/>
           </a:xfrm>
           <a:prstGeom prst="ellipse">
@@ -8120,7 +10144,7 @@
           <a:p>
             <a:pPr algn="ctr"/>
             <a:r>
-              <a:rPr sz="1700" b="1">
+              <a:rPr sz="1600" b="1">
                 <a:solidFill>
                   <a:srgbClr val="FFFFFF"/>
                 </a:solidFill>
@@ -8133,14 +10157,14 @@
       </p:sp>
       <p:sp>
         <p:nvSpPr>
-          <p:cNvPr id="7" name="TextBox 6"/>
+          <p:cNvPr id="9" name="TextBox 8"/>
           <p:cNvSpPr txBox="1"/>
           <p:nvPr/>
         </p:nvSpPr>
         <p:spPr>
           <a:xfrm>
-            <a:off x="1325880" y="2606040"/>
-            <a:ext cx="6583680" cy="822960"/>
+            <a:off x="1371600" y="3063240"/>
+            <a:ext cx="10271455" cy="1188720"/>
           </a:xfrm>
           <a:prstGeom prst="rect">
             <a:avLst/>
@@ -8148,31 +10172,31 @@
           <a:noFill/>
         </p:spPr>
         <p:txBody>
-          <a:bodyPr wrap="square" anchor="ctr" lIns="0" rIns="0" tIns="0" bIns="0"/>
+          <a:bodyPr wrap="square" anchor="t" lIns="0" rIns="0" tIns="0" bIns="0"/>
           <a:lstStyle/>
           <a:p>
             <a:pPr algn="l"/>
             <a:r>
-              <a:rPr sz="2000" b="0" i="0">
-                <a:solidFill>
-                  <a:srgbClr val="FFFFFF"/>
-                </a:solidFill>
-                <a:latin typeface="Calibri"/>
-              </a:rPr>
-              <a:t>Why annotate concept sketches?</a:t>
-            </a:r>
-          </a:p>
-        </p:txBody>
-      </p:sp>
-      <p:sp>
-        <p:nvSpPr>
-          <p:cNvPr id="8" name="Oval 7"/>
+              <a:rPr sz="2400" b="0" i="0">
+                <a:solidFill>
+                  <a:srgbClr val="202122"/>
+                </a:solidFill>
+                <a:latin typeface="Calibri"/>
+              </a:rPr>
+              <a:t>Why release tension before disassembly?</a:t>
+            </a:r>
+          </a:p>
+        </p:txBody>
+      </p:sp>
+      <p:sp>
+        <p:nvSpPr>
+          <p:cNvPr id="10" name="Oval 9"/>
           <p:cNvSpPr/>
           <p:nvPr/>
         </p:nvSpPr>
         <p:spPr>
           <a:xfrm>
-            <a:off x="548640" y="3657600"/>
+            <a:off x="548640" y="4526280"/>
             <a:ext cx="502920" cy="502920"/>
           </a:xfrm>
           <a:prstGeom prst="ellipse">
@@ -8206,7 +10230,7 @@
           <a:p>
             <a:pPr algn="ctr"/>
             <a:r>
-              <a:rPr sz="1700" b="1">
+              <a:rPr sz="1600" b="1">
                 <a:solidFill>
                   <a:srgbClr val="FFFFFF"/>
                 </a:solidFill>
@@ -8215,83 +10239,6 @@
               <a:t>3</a:t>
             </a:r>
           </a:p>
-        </p:txBody>
-      </p:sp>
-      <p:sp>
-        <p:nvSpPr>
-          <p:cNvPr id="9" name="TextBox 8"/>
-          <p:cNvSpPr txBox="1"/>
-          <p:nvPr/>
-        </p:nvSpPr>
-        <p:spPr>
-          <a:xfrm>
-            <a:off x="1325880" y="3566160"/>
-            <a:ext cx="6583680" cy="822960"/>
-          </a:xfrm>
-          <a:prstGeom prst="rect">
-            <a:avLst/>
-          </a:prstGeom>
-          <a:noFill/>
-        </p:spPr>
-        <p:txBody>
-          <a:bodyPr wrap="square" anchor="ctr" lIns="0" rIns="0" tIns="0" bIns="0"/>
-          <a:lstStyle/>
-          <a:p>
-            <a:pPr algn="l"/>
-            <a:r>
-              <a:rPr sz="2000" b="0" i="0">
-                <a:solidFill>
-                  <a:srgbClr val="FFFFFF"/>
-                </a:solidFill>
-                <a:latin typeface="Calibri"/>
-              </a:rPr>
-              <a:t>What makes a design realisable?</a:t>
-            </a:r>
-          </a:p>
-        </p:txBody>
-      </p:sp>
-      <p:sp>
-        <p:nvSpPr>
-          <p:cNvPr id="10" name="Rounded Rectangle 9"/>
-          <p:cNvSpPr/>
-          <p:nvPr/>
-        </p:nvSpPr>
-        <p:spPr>
-          <a:xfrm>
-            <a:off x="8229600" y="1645920"/>
-            <a:ext cx="3410712" cy="2926080"/>
-          </a:xfrm>
-          <a:prstGeom prst="roundRect">
-            <a:avLst>
-              <a:gd name="adj" fmla="val 8000"/>
-            </a:avLst>
-          </a:prstGeom>
-          <a:solidFill>
-            <a:srgbClr val="0645AD"/>
-          </a:solidFill>
-          <a:ln>
-            <a:noFill/>
-          </a:ln>
-          <a:effectLst/>
-        </p:spPr>
-        <p:style>
-          <a:lnRef idx="1">
-            <a:schemeClr val="accent1"/>
-          </a:lnRef>
-          <a:fillRef idx="3">
-            <a:schemeClr val="accent1"/>
-          </a:fillRef>
-          <a:effectRef idx="2">
-            <a:schemeClr val="accent1"/>
-          </a:effectRef>
-          <a:fontRef idx="minor">
-            <a:schemeClr val="lt1"/>
-          </a:fontRef>
-        </p:style>
-        <p:txBody>
-          <a:bodyPr rtlCol="0" anchor="ctr"/>
-          <a:lstStyle/>
-          <a:p/>
         </p:txBody>
       </p:sp>
       <p:sp>
@@ -8302,8 +10249,8 @@
         </p:nvSpPr>
         <p:spPr>
           <a:xfrm>
-            <a:off x="8503920" y="1874519"/>
-            <a:ext cx="2926080" cy="365760"/>
+            <a:off x="1371600" y="4480560"/>
+            <a:ext cx="10271455" cy="1188720"/>
           </a:xfrm>
           <a:prstGeom prst="rect">
             <a:avLst/>
@@ -8316,13 +10263,13 @@
           <a:p>
             <a:pPr algn="l"/>
             <a:r>
-              <a:rPr sz="1300" b="1" i="0">
-                <a:solidFill>
-                  <a:srgbClr val="A9C8F0"/>
-                </a:solidFill>
-                <a:latin typeface="Calibri"/>
-              </a:rPr>
-              <a:t>REVISE THIS TOPIC</a:t>
+              <a:rPr sz="2400" b="0" i="0">
+                <a:solidFill>
+                  <a:srgbClr val="202122"/>
+                </a:solidFill>
+                <a:latin typeface="Calibri"/>
+              </a:rPr>
+              <a:t>What makes a design realisable?</a:t>
             </a:r>
           </a:p>
         </p:txBody>
@@ -8335,8 +10282,8 @@
         </p:nvSpPr>
         <p:spPr>
           <a:xfrm>
-            <a:off x="8503920" y="2286000"/>
-            <a:ext cx="2926080" cy="548640"/>
+            <a:off x="548640" y="5852160"/>
+            <a:ext cx="11094415" cy="365760"/>
           </a:xfrm>
           <a:prstGeom prst="rect">
             <a:avLst/>
@@ -8349,79 +10296,13 @@
           <a:p>
             <a:pPr algn="l"/>
             <a:r>
-              <a:rPr sz="1400" b="0" i="0">
-                <a:solidFill>
-                  <a:srgbClr val="FFFFFF"/>
-                </a:solidFill>
-                <a:latin typeface="Calibri"/>
-              </a:rPr>
-              <a:t>Revision notes for this lesson are on the study wiki:</a:t>
-            </a:r>
-          </a:p>
-        </p:txBody>
-      </p:sp>
-      <p:sp>
-        <p:nvSpPr>
-          <p:cNvPr id="13" name="TextBox 12"/>
-          <p:cNvSpPr txBox="1"/>
-          <p:nvPr/>
-        </p:nvSpPr>
-        <p:spPr>
-          <a:xfrm>
-            <a:off x="8503920" y="2926080"/>
-            <a:ext cx="2926080" cy="1463040"/>
-          </a:xfrm>
-          <a:prstGeom prst="rect">
-            <a:avLst/>
-          </a:prstGeom>
-          <a:noFill/>
-        </p:spPr>
-        <p:txBody>
-          <a:bodyPr wrap="square" anchor="t" lIns="0" rIns="0" tIns="0" bIns="0"/>
-          <a:lstStyle/>
-          <a:p>
-            <a:pPr algn="l"/>
-            <a:r>
-              <a:rPr sz="2000" b="1" i="0">
-                <a:solidFill>
-                  <a:srgbClr val="FFFFFF"/>
-                </a:solidFill>
-                <a:latin typeface="Cambria"/>
-              </a:rPr>
-              <a:t>Practical Criteria</a:t>
-            </a:r>
-          </a:p>
-        </p:txBody>
-      </p:sp>
-      <p:sp>
-        <p:nvSpPr>
-          <p:cNvPr id="14" name="TextBox 13"/>
-          <p:cNvSpPr txBox="1"/>
-          <p:nvPr/>
-        </p:nvSpPr>
-        <p:spPr>
-          <a:xfrm>
-            <a:off x="548640" y="5669280"/>
-            <a:ext cx="11094415" cy="548640"/>
-          </a:xfrm>
-          <a:prstGeom prst="rect">
-            <a:avLst/>
-          </a:prstGeom>
-          <a:noFill/>
-        </p:spPr>
-        <p:txBody>
-          <a:bodyPr wrap="square" anchor="t" lIns="0" rIns="0" tIns="0" bIns="0"/>
-          <a:lstStyle/>
-          <a:p>
-            <a:pPr algn="l"/>
-            <a:r>
-              <a:rPr sz="1200" b="0" i="0">
-                <a:solidFill>
-                  <a:srgbClr val="A9C8F0"/>
-                </a:solidFill>
-                <a:latin typeface="Calibri"/>
-              </a:rPr>
-              <a:t>https://lana6478.github.io/T-level-Design-Development-Engineering-Manufacturing/#/02-occupational-specialism/02-practical-criteria.md</a:t>
+              <a:rPr sz="1300" b="0" i="1">
+                <a:solidFill>
+                  <a:srgbClr val="54595D"/>
+                </a:solidFill>
+                <a:latin typeface="Calibri"/>
+              </a:rPr>
+              <a:t>Answer on mini whiteboards or in your book. Answers are in the speaker notes.</a:t>
             </a:r>
           </a:p>
         </p:txBody>
